--- a/output/wordlabs-non-prefix-3day.pptx
+++ b/output/wordlabs-non-prefix-3day.pptx
@@ -6057,7 +6057,7 @@
                 <a:ea typeface="Calibri" pitchFamily="34" charset="-122"/>
                 <a:cs typeface="Calibri" pitchFamily="34" charset="-120"/>
               </a:rPr>
-              <a:t>nonfiction</a:t>
+              <a:t>nonstop</a:t>
             </a:r>
             <a:pPr algn="l" indent="0" marL="0">
               <a:buNone/>
@@ -6071,7 +6071,7 @@
                 <a:ea typeface="Calibri" pitchFamily="34" charset="-122"/>
                 <a:cs typeface="Calibri" pitchFamily="34" charset="-120"/>
               </a:rPr>
-              <a:t> book explained why some animals are </a:t>
+              <a:t> rain meant our </a:t>
             </a:r>
             <a:pPr algn="l" indent="0" marL="0">
               <a:buNone/>
@@ -6088,7 +6088,7 @@
                 <a:ea typeface="Calibri" pitchFamily="34" charset="-122"/>
                 <a:cs typeface="Calibri" pitchFamily="34" charset="-120"/>
               </a:rPr>
-              <a:t>nonliving</a:t>
+              <a:t>nonverbal</a:t>
             </a:r>
             <a:pPr algn="l" indent="0" marL="0">
               <a:buNone/>
@@ -6102,7 +6102,7 @@
                 <a:ea typeface="Calibri" pitchFamily="34" charset="-122"/>
                 <a:cs typeface="Calibri" pitchFamily="34" charset="-120"/>
               </a:rPr>
-              <a:t> fossils preserved in rock.</a:t>
+              <a:t> signals helped us communicate under the shelter.</a:t>
             </a:r>
             <a:endParaRPr lang="en-US" sz="1800" dirty="0"/>
           </a:p>
@@ -6257,7 +6257,7 @@
                 <a:ea typeface="Trebuchet MS" pitchFamily="34" charset="-122"/>
                 <a:cs typeface="Trebuchet MS" pitchFamily="34" charset="-120"/>
               </a:rPr>
-              <a:t>nonfiction</a:t>
+              <a:t>nonstop</a:t>
             </a:r>
             <a:endParaRPr lang="en-US" sz="1400" dirty="0"/>
           </a:p>
@@ -6385,7 +6385,7 @@
                 <a:ea typeface="Trebuchet MS" pitchFamily="34" charset="-122"/>
                 <a:cs typeface="Trebuchet MS" pitchFamily="34" charset="-120"/>
               </a:rPr>
-              <a:t>nonliving</a:t>
+              <a:t>nonverbal</a:t>
             </a:r>
             <a:endParaRPr lang="en-US" sz="1400" dirty="0"/>
           </a:p>
@@ -6855,7 +6855,7 @@
                 <a:ea typeface="Trebuchet MS" pitchFamily="34" charset="-122"/>
                 <a:cs typeface="Trebuchet MS" pitchFamily="34" charset="-120"/>
               </a:rPr>
-              <a:t>nonfiction</a:t>
+              <a:t>nonstop</a:t>
             </a:r>
             <a:endParaRPr lang="en-US" sz="2800" dirty="0"/>
           </a:p>
@@ -7682,7 +7682,7 @@
                 <a:ea typeface="Trebuchet MS" pitchFamily="34" charset="-122"/>
                 <a:cs typeface="Trebuchet MS" pitchFamily="34" charset="-120"/>
               </a:rPr>
-              <a:t>nonfiction</a:t>
+              <a:t>nonstop</a:t>
             </a:r>
             <a:endParaRPr lang="en-US" sz="2800" dirty="0"/>
           </a:p>
@@ -7762,7 +7762,7 @@
         </p:nvSpPr>
         <p:spPr>
           <a:xfrm>
-            <a:off x="2221992" y="2258568"/>
+            <a:off x="2938272" y="2258568"/>
             <a:ext cx="1828800" cy="292608"/>
           </a:xfrm>
           <a:prstGeom prst="rect">
@@ -7796,7 +7796,7 @@
         </p:nvSpPr>
         <p:spPr>
           <a:xfrm>
-            <a:off x="2221992" y="2258568"/>
+            <a:off x="2938272" y="2258568"/>
             <a:ext cx="1828800" cy="292608"/>
           </a:xfrm>
           <a:prstGeom prst="rect">
@@ -7835,7 +7835,7 @@
         </p:nvSpPr>
         <p:spPr>
           <a:xfrm>
-            <a:off x="2221992" y="2569464"/>
+            <a:off x="2938272" y="2569464"/>
             <a:ext cx="1828800" cy="201168"/>
           </a:xfrm>
           <a:prstGeom prst="rect">
@@ -7860,7 +7860,7 @@
                 <a:ea typeface="Calibri" pitchFamily="34" charset="-122"/>
                 <a:cs typeface="Calibri" pitchFamily="34" charset="-120"/>
               </a:rPr>
-              <a:t>not</a:t>
+              <a:t>not, without</a:t>
             </a:r>
             <a:endParaRPr lang="en-US" sz="850" dirty="0"/>
           </a:p>
@@ -7874,7 +7874,7 @@
         </p:nvSpPr>
         <p:spPr>
           <a:xfrm>
-            <a:off x="4370832" y="2258568"/>
+            <a:off x="5803392" y="2258568"/>
             <a:ext cx="1828800" cy="292608"/>
           </a:xfrm>
           <a:prstGeom prst="rect">
@@ -7908,7 +7908,7 @@
         </p:nvSpPr>
         <p:spPr>
           <a:xfrm>
-            <a:off x="4370832" y="2258568"/>
+            <a:off x="5803392" y="2258568"/>
             <a:ext cx="1828800" cy="292608"/>
           </a:xfrm>
           <a:prstGeom prst="rect">
@@ -7933,7 +7933,7 @@
                 <a:ea typeface="Trebuchet MS" pitchFamily="34" charset="-122"/>
                 <a:cs typeface="Trebuchet MS" pitchFamily="34" charset="-120"/>
               </a:rPr>
-              <a:t>fict</a:t>
+              <a:t>stop</a:t>
             </a:r>
             <a:endParaRPr lang="en-US" sz="1300" dirty="0"/>
           </a:p>
@@ -7947,7 +7947,7 @@
         </p:nvSpPr>
         <p:spPr>
           <a:xfrm>
-            <a:off x="4370832" y="2569464"/>
+            <a:off x="5803392" y="2569464"/>
             <a:ext cx="1828800" cy="201168"/>
           </a:xfrm>
           <a:prstGeom prst="rect">
@@ -7972,7 +7972,7 @@
                 <a:ea typeface="Calibri" pitchFamily="34" charset="-122"/>
                 <a:cs typeface="Calibri" pitchFamily="34" charset="-120"/>
               </a:rPr>
-              <a:t>made up, invented</a:t>
+              <a:t>to cease or pause</a:t>
             </a:r>
             <a:endParaRPr lang="en-US" sz="850" dirty="0"/>
           </a:p>
@@ -7986,30 +7986,23 @@
         </p:nvSpPr>
         <p:spPr>
           <a:xfrm>
-            <a:off x="6519672" y="2258568"/>
-            <a:ext cx="1828800" cy="292608"/>
+            <a:off x="365760" y="3273552"/>
+            <a:ext cx="1371600" cy="658368"/>
           </a:xfrm>
           <a:prstGeom prst="rect">
             <a:avLst>
-              <a:gd name="adj" fmla="val 25000"/>
+              <a:gd name="adj" fmla="val 8333"/>
             </a:avLst>
           </a:prstGeom>
           <a:solidFill>
-            <a:srgbClr val="FCE7F3"/>
-          </a:solidFill>
-          <a:ln w="19050">
-            <a:solidFill>
-              <a:srgbClr val="DB2777"/>
-            </a:solidFill>
-            <a:prstDash val="solid"/>
-          </a:ln>
-          <a:effectLst>
-            <a:outerShdw sx="100000" sy="100000" kx="0" ky="0" algn="bl" rotWithShape="0" blurRad="101600" dist="38100" dir="8100000">
-              <a:srgbClr val="000000">
-                <a:alpha val="12000"/>
-              </a:srgbClr>
-            </a:outerShdw>
-          </a:effectLst>
+            <a:srgbClr val="E2E8F0"/>
+          </a:solidFill>
+          <a:ln w="12700">
+            <a:solidFill>
+              <a:srgbClr val="E2E8F0"/>
+            </a:solidFill>
+            <a:prstDash val="solid"/>
+          </a:ln>
         </p:spPr>
       </p:sp>
       <p:sp>
@@ -8020,90 +8013,117 @@
         </p:nvSpPr>
         <p:spPr>
           <a:xfrm>
-            <a:off x="6519672" y="2258568"/>
-            <a:ext cx="1828800" cy="292608"/>
-          </a:xfrm>
-          <a:prstGeom prst="rect">
-            <a:avLst/>
-          </a:prstGeom>
-          <a:noFill/>
-          <a:ln/>
-        </p:spPr>
-        <p:txBody>
-          <a:bodyPr wrap="square" lIns="0" tIns="0" rIns="0" bIns="0" rtlCol="0" anchor="ctr"/>
-          <a:lstStyle/>
-          <a:p>
-            <a:pPr algn="ctr" indent="0" marL="0">
-              <a:buNone/>
-            </a:pPr>
-            <a:r>
-              <a:rPr lang="en-US" sz="1300" b="1" dirty="0">
-                <a:solidFill>
-                  <a:srgbClr val="9D174D"/>
+            <a:off x="365760" y="3273552"/>
+            <a:ext cx="1371600" cy="658368"/>
+          </a:xfrm>
+          <a:prstGeom prst="rect">
+            <a:avLst/>
+          </a:prstGeom>
+          <a:noFill/>
+          <a:ln/>
+        </p:spPr>
+        <p:txBody>
+          <a:bodyPr wrap="square" lIns="0" tIns="0" rIns="0" bIns="0" rtlCol="0" anchor="ctr"/>
+          <a:lstStyle/>
+          <a:p>
+            <a:pPr algn="ctr" indent="0" marL="0">
+              <a:buNone/>
+            </a:pPr>
+            <a:r>
+              <a:rPr lang="en-US" sz="1100" b="1" dirty="0">
+                <a:solidFill>
+                  <a:srgbClr val="475569"/>
                 </a:solidFill>
                 <a:latin typeface="Trebuchet MS" pitchFamily="34" charset="0"/>
                 <a:ea typeface="Trebuchet MS" pitchFamily="34" charset="-122"/>
                 <a:cs typeface="Trebuchet MS" pitchFamily="34" charset="-120"/>
               </a:rPr>
-              <a:t>ion</a:t>
-            </a:r>
-            <a:endParaRPr lang="en-US" sz="1300" dirty="0"/>
-          </a:p>
-        </p:txBody>
-      </p:sp>
-      <p:sp>
-        <p:nvSpPr>
-          <p:cNvPr id="24" name="Text 22"/>
-          <p:cNvSpPr/>
-          <p:nvPr/>
-        </p:nvSpPr>
-        <p:spPr>
-          <a:xfrm>
-            <a:off x="6519672" y="2569464"/>
-            <a:ext cx="1828800" cy="201168"/>
-          </a:xfrm>
-          <a:prstGeom prst="rect">
-            <a:avLst/>
-          </a:prstGeom>
-          <a:noFill/>
-          <a:ln/>
-        </p:spPr>
-        <p:txBody>
-          <a:bodyPr wrap="square" lIns="0" tIns="0" rIns="0" bIns="0" rtlCol="0" anchor="t"/>
-          <a:lstStyle/>
-          <a:p>
-            <a:pPr algn="ctr" indent="0" marL="0">
-              <a:buNone/>
-            </a:pPr>
-            <a:r>
-              <a:rPr lang="en-US" sz="850" dirty="0">
-                <a:solidFill>
-                  <a:srgbClr val="475569"/>
+              <a:t>Syllables</a:t>
+            </a:r>
+            <a:endParaRPr lang="en-US" sz="1100" dirty="0"/>
+          </a:p>
+        </p:txBody>
+      </p:sp>
+      <p:sp>
+        <p:nvSpPr>
+          <p:cNvPr id="24" name="Shape 22"/>
+          <p:cNvSpPr/>
+          <p:nvPr/>
+        </p:nvSpPr>
+        <p:spPr>
+          <a:xfrm>
+            <a:off x="1874520" y="3273552"/>
+            <a:ext cx="6903720" cy="658368"/>
+          </a:xfrm>
+          <a:prstGeom prst="rect">
+            <a:avLst>
+              <a:gd name="adj" fmla="val 8333"/>
+            </a:avLst>
+          </a:prstGeom>
+          <a:solidFill>
+            <a:srgbClr val="F8FAFC"/>
+          </a:solidFill>
+          <a:ln w="12700">
+            <a:solidFill>
+              <a:srgbClr val="E2E8F0"/>
+            </a:solidFill>
+            <a:prstDash val="dash"/>
+          </a:ln>
+        </p:spPr>
+      </p:sp>
+      <p:sp>
+        <p:nvSpPr>
+          <p:cNvPr id="25" name="Text 23"/>
+          <p:cNvSpPr/>
+          <p:nvPr/>
+        </p:nvSpPr>
+        <p:spPr>
+          <a:xfrm>
+            <a:off x="1874520" y="3273552"/>
+            <a:ext cx="6903720" cy="658368"/>
+          </a:xfrm>
+          <a:prstGeom prst="rect">
+            <a:avLst/>
+          </a:prstGeom>
+          <a:noFill/>
+          <a:ln/>
+        </p:spPr>
+        <p:txBody>
+          <a:bodyPr wrap="square" rtlCol="0" anchor="ctr"/>
+          <a:lstStyle/>
+          <a:p>
+            <a:pPr algn="ctr" indent="0" marL="0">
+              <a:buNone/>
+            </a:pPr>
+            <a:r>
+              <a:rPr lang="en-US" sz="1100" i="1" dirty="0">
+                <a:solidFill>
+                  <a:srgbClr val="CBD5E1"/>
                 </a:solidFill>
                 <a:latin typeface="Calibri" pitchFamily="34" charset="0"/>
                 <a:ea typeface="Calibri" pitchFamily="34" charset="-122"/>
                 <a:cs typeface="Calibri" pitchFamily="34" charset="-120"/>
               </a:rPr>
-              <a:t>result, state</a:t>
-            </a:r>
-            <a:endParaRPr lang="en-US" sz="850" dirty="0"/>
-          </a:p>
-        </p:txBody>
-      </p:sp>
-      <p:sp>
-        <p:nvSpPr>
-          <p:cNvPr id="25" name="Shape 23"/>
-          <p:cNvSpPr/>
-          <p:nvPr/>
-        </p:nvSpPr>
-        <p:spPr>
-          <a:xfrm>
-            <a:off x="365760" y="3273552"/>
-            <a:ext cx="1371600" cy="658368"/>
+              <a:t>Write here...</a:t>
+            </a:r>
+            <a:endParaRPr lang="en-US" sz="1100" dirty="0"/>
+          </a:p>
+        </p:txBody>
+      </p:sp>
+      <p:sp>
+        <p:nvSpPr>
+          <p:cNvPr id="26" name="Shape 24"/>
+          <p:cNvSpPr/>
+          <p:nvPr/>
+        </p:nvSpPr>
+        <p:spPr>
+          <a:xfrm>
+            <a:off x="365760" y="4096512"/>
+            <a:ext cx="1371600" cy="804672"/>
           </a:xfrm>
           <a:prstGeom prst="rect">
             <a:avLst>
-              <a:gd name="adj" fmla="val 8333"/>
+              <a:gd name="adj" fmla="val 6818"/>
             </a:avLst>
           </a:prstGeom>
           <a:solidFill>
@@ -8119,14 +8139,14 @@
       </p:sp>
       <p:sp>
         <p:nvSpPr>
-          <p:cNvPr id="26" name="Text 24"/>
-          <p:cNvSpPr/>
-          <p:nvPr/>
-        </p:nvSpPr>
-        <p:spPr>
-          <a:xfrm>
-            <a:off x="365760" y="3273552"/>
-            <a:ext cx="1371600" cy="658368"/>
+          <p:cNvPr id="27" name="Text 25"/>
+          <p:cNvSpPr/>
+          <p:nvPr/>
+        </p:nvSpPr>
+        <p:spPr>
+          <a:xfrm>
+            <a:off x="365760" y="4096512"/>
+            <a:ext cx="1371600" cy="804672"/>
           </a:xfrm>
           <a:prstGeom prst="rect">
             <a:avLst/>
@@ -8150,7 +8170,7 @@
                 <a:ea typeface="Trebuchet MS" pitchFamily="34" charset="-122"/>
                 <a:cs typeface="Trebuchet MS" pitchFamily="34" charset="-120"/>
               </a:rPr>
-              <a:t>Syllables</a:t>
+              <a:t>Phonemes</a:t>
             </a:r>
             <a:endParaRPr lang="en-US" sz="1100" dirty="0"/>
           </a:p>
@@ -8158,80 +8178,14 @@
       </p:sp>
       <p:sp>
         <p:nvSpPr>
-          <p:cNvPr id="27" name="Shape 25"/>
-          <p:cNvSpPr/>
-          <p:nvPr/>
-        </p:nvSpPr>
-        <p:spPr>
-          <a:xfrm>
-            <a:off x="1874520" y="3273552"/>
-            <a:ext cx="6903720" cy="658368"/>
-          </a:xfrm>
-          <a:prstGeom prst="rect">
-            <a:avLst>
-              <a:gd name="adj" fmla="val 8333"/>
-            </a:avLst>
-          </a:prstGeom>
-          <a:solidFill>
-            <a:srgbClr val="F8FAFC"/>
-          </a:solidFill>
-          <a:ln w="12700">
-            <a:solidFill>
-              <a:srgbClr val="E2E8F0"/>
-            </a:solidFill>
-            <a:prstDash val="dash"/>
-          </a:ln>
-        </p:spPr>
-      </p:sp>
-      <p:sp>
-        <p:nvSpPr>
-          <p:cNvPr id="28" name="Text 26"/>
-          <p:cNvSpPr/>
-          <p:nvPr/>
-        </p:nvSpPr>
-        <p:spPr>
-          <a:xfrm>
-            <a:off x="1874520" y="3273552"/>
-            <a:ext cx="6903720" cy="658368"/>
-          </a:xfrm>
-          <a:prstGeom prst="rect">
-            <a:avLst/>
-          </a:prstGeom>
-          <a:noFill/>
-          <a:ln/>
-        </p:spPr>
-        <p:txBody>
-          <a:bodyPr wrap="square" rtlCol="0" anchor="ctr"/>
-          <a:lstStyle/>
-          <a:p>
-            <a:pPr algn="ctr" indent="0" marL="0">
-              <a:buNone/>
-            </a:pPr>
-            <a:r>
-              <a:rPr lang="en-US" sz="1100" i="1" dirty="0">
-                <a:solidFill>
-                  <a:srgbClr val="CBD5E1"/>
-                </a:solidFill>
-                <a:latin typeface="Calibri" pitchFamily="34" charset="0"/>
-                <a:ea typeface="Calibri" pitchFamily="34" charset="-122"/>
-                <a:cs typeface="Calibri" pitchFamily="34" charset="-120"/>
-              </a:rPr>
-              <a:t>Write here...</a:t>
-            </a:r>
-            <a:endParaRPr lang="en-US" sz="1100" dirty="0"/>
-          </a:p>
-        </p:txBody>
-      </p:sp>
-      <p:sp>
-        <p:nvSpPr>
-          <p:cNvPr id="29" name="Shape 27"/>
-          <p:cNvSpPr/>
-          <p:nvPr/>
-        </p:nvSpPr>
-        <p:spPr>
-          <a:xfrm>
-            <a:off x="365760" y="4096512"/>
-            <a:ext cx="1371600" cy="804672"/>
+          <p:cNvPr id="28" name="Shape 26"/>
+          <p:cNvSpPr/>
+          <p:nvPr/>
+        </p:nvSpPr>
+        <p:spPr>
+          <a:xfrm>
+            <a:off x="1874520" y="4096512"/>
+            <a:ext cx="6903720" cy="804672"/>
           </a:xfrm>
           <a:prstGeom prst="rect">
             <a:avLst>
@@ -8239,85 +8193,19 @@
             </a:avLst>
           </a:prstGeom>
           <a:solidFill>
-            <a:srgbClr val="E2E8F0"/>
+            <a:srgbClr val="F8FAFC"/>
           </a:solidFill>
           <a:ln w="12700">
             <a:solidFill>
               <a:srgbClr val="E2E8F0"/>
             </a:solidFill>
-            <a:prstDash val="solid"/>
-          </a:ln>
-        </p:spPr>
-      </p:sp>
-      <p:sp>
-        <p:nvSpPr>
-          <p:cNvPr id="30" name="Text 28"/>
-          <p:cNvSpPr/>
-          <p:nvPr/>
-        </p:nvSpPr>
-        <p:spPr>
-          <a:xfrm>
-            <a:off x="365760" y="4096512"/>
-            <a:ext cx="1371600" cy="804672"/>
-          </a:xfrm>
-          <a:prstGeom prst="rect">
-            <a:avLst/>
-          </a:prstGeom>
-          <a:noFill/>
-          <a:ln/>
-        </p:spPr>
-        <p:txBody>
-          <a:bodyPr wrap="square" lIns="0" tIns="0" rIns="0" bIns="0" rtlCol="0" anchor="ctr"/>
-          <a:lstStyle/>
-          <a:p>
-            <a:pPr algn="ctr" indent="0" marL="0">
-              <a:buNone/>
-            </a:pPr>
-            <a:r>
-              <a:rPr lang="en-US" sz="1100" b="1" dirty="0">
-                <a:solidFill>
-                  <a:srgbClr val="475569"/>
-                </a:solidFill>
-                <a:latin typeface="Trebuchet MS" pitchFamily="34" charset="0"/>
-                <a:ea typeface="Trebuchet MS" pitchFamily="34" charset="-122"/>
-                <a:cs typeface="Trebuchet MS" pitchFamily="34" charset="-120"/>
-              </a:rPr>
-              <a:t>Phonemes</a:t>
-            </a:r>
-            <a:endParaRPr lang="en-US" sz="1100" dirty="0"/>
-          </a:p>
-        </p:txBody>
-      </p:sp>
-      <p:sp>
-        <p:nvSpPr>
-          <p:cNvPr id="31" name="Shape 29"/>
-          <p:cNvSpPr/>
-          <p:nvPr/>
-        </p:nvSpPr>
-        <p:spPr>
-          <a:xfrm>
-            <a:off x="1874520" y="4096512"/>
-            <a:ext cx="6903720" cy="804672"/>
-          </a:xfrm>
-          <a:prstGeom prst="rect">
-            <a:avLst>
-              <a:gd name="adj" fmla="val 6818"/>
-            </a:avLst>
-          </a:prstGeom>
-          <a:solidFill>
-            <a:srgbClr val="F8FAFC"/>
-          </a:solidFill>
-          <a:ln w="12700">
-            <a:solidFill>
-              <a:srgbClr val="E2E8F0"/>
-            </a:solidFill>
             <a:prstDash val="dash"/>
           </a:ln>
         </p:spPr>
       </p:sp>
       <p:sp>
         <p:nvSpPr>
-          <p:cNvPr id="32" name="Text 30"/>
+          <p:cNvPr id="29" name="Text 27"/>
           <p:cNvSpPr/>
           <p:nvPr/>
         </p:nvSpPr>
@@ -8779,7 +8667,7 @@
                 <a:ea typeface="Trebuchet MS" pitchFamily="34" charset="-122"/>
                 <a:cs typeface="Trebuchet MS" pitchFamily="34" charset="-120"/>
               </a:rPr>
-              <a:t>nonfiction</a:t>
+              <a:t>nonstop</a:t>
             </a:r>
             <a:endParaRPr lang="en-US" sz="2800" dirty="0"/>
           </a:p>
@@ -8859,7 +8747,7 @@
         </p:nvSpPr>
         <p:spPr>
           <a:xfrm>
-            <a:off x="2221992" y="2258568"/>
+            <a:off x="2938272" y="2258568"/>
             <a:ext cx="1828800" cy="292608"/>
           </a:xfrm>
           <a:prstGeom prst="rect">
@@ -8893,7 +8781,7 @@
         </p:nvSpPr>
         <p:spPr>
           <a:xfrm>
-            <a:off x="2221992" y="2258568"/>
+            <a:off x="2938272" y="2258568"/>
             <a:ext cx="1828800" cy="292608"/>
           </a:xfrm>
           <a:prstGeom prst="rect">
@@ -8932,7 +8820,7 @@
         </p:nvSpPr>
         <p:spPr>
           <a:xfrm>
-            <a:off x="2221992" y="2569464"/>
+            <a:off x="2938272" y="2569464"/>
             <a:ext cx="1828800" cy="201168"/>
           </a:xfrm>
           <a:prstGeom prst="rect">
@@ -8957,7 +8845,7 @@
                 <a:ea typeface="Calibri" pitchFamily="34" charset="-122"/>
                 <a:cs typeface="Calibri" pitchFamily="34" charset="-120"/>
               </a:rPr>
-              <a:t>not</a:t>
+              <a:t>not, without</a:t>
             </a:r>
             <a:endParaRPr lang="en-US" sz="850" dirty="0"/>
           </a:p>
@@ -8971,7 +8859,7 @@
         </p:nvSpPr>
         <p:spPr>
           <a:xfrm>
-            <a:off x="4370832" y="2258568"/>
+            <a:off x="5803392" y="2258568"/>
             <a:ext cx="1828800" cy="292608"/>
           </a:xfrm>
           <a:prstGeom prst="rect">
@@ -9005,7 +8893,7 @@
         </p:nvSpPr>
         <p:spPr>
           <a:xfrm>
-            <a:off x="4370832" y="2258568"/>
+            <a:off x="5803392" y="2258568"/>
             <a:ext cx="1828800" cy="292608"/>
           </a:xfrm>
           <a:prstGeom prst="rect">
@@ -9030,7 +8918,7 @@
                 <a:ea typeface="Trebuchet MS" pitchFamily="34" charset="-122"/>
                 <a:cs typeface="Trebuchet MS" pitchFamily="34" charset="-120"/>
               </a:rPr>
-              <a:t>fict</a:t>
+              <a:t>stop</a:t>
             </a:r>
             <a:endParaRPr lang="en-US" sz="1300" dirty="0"/>
           </a:p>
@@ -9044,7 +8932,7 @@
         </p:nvSpPr>
         <p:spPr>
           <a:xfrm>
-            <a:off x="4370832" y="2569464"/>
+            <a:off x="5803392" y="2569464"/>
             <a:ext cx="1828800" cy="201168"/>
           </a:xfrm>
           <a:prstGeom prst="rect">
@@ -9069,7 +8957,7 @@
                 <a:ea typeface="Calibri" pitchFamily="34" charset="-122"/>
                 <a:cs typeface="Calibri" pitchFamily="34" charset="-120"/>
               </a:rPr>
-              <a:t>made up, invented</a:t>
+              <a:t>to cease or pause</a:t>
             </a:r>
             <a:endParaRPr lang="en-US" sz="850" dirty="0"/>
           </a:p>
@@ -9083,30 +8971,23 @@
         </p:nvSpPr>
         <p:spPr>
           <a:xfrm>
-            <a:off x="6519672" y="2258568"/>
-            <a:ext cx="1828800" cy="292608"/>
+            <a:off x="365760" y="3273552"/>
+            <a:ext cx="1371600" cy="658368"/>
           </a:xfrm>
           <a:prstGeom prst="rect">
             <a:avLst>
-              <a:gd name="adj" fmla="val 25000"/>
+              <a:gd name="adj" fmla="val 8333"/>
             </a:avLst>
           </a:prstGeom>
           <a:solidFill>
-            <a:srgbClr val="FCE7F3"/>
-          </a:solidFill>
-          <a:ln w="19050">
-            <a:solidFill>
-              <a:srgbClr val="DB2777"/>
-            </a:solidFill>
-            <a:prstDash val="solid"/>
-          </a:ln>
-          <a:effectLst>
-            <a:outerShdw sx="100000" sy="100000" kx="0" ky="0" algn="bl" rotWithShape="0" blurRad="101600" dist="38100" dir="8100000">
-              <a:srgbClr val="000000">
-                <a:alpha val="12000"/>
-              </a:srgbClr>
-            </a:outerShdw>
-          </a:effectLst>
+            <a:srgbClr val="E2E8F0"/>
+          </a:solidFill>
+          <a:ln w="12700">
+            <a:solidFill>
+              <a:srgbClr val="E2E8F0"/>
+            </a:solidFill>
+            <a:prstDash val="solid"/>
+          </a:ln>
         </p:spPr>
       </p:sp>
       <p:sp>
@@ -9117,86 +8998,47 @@
         </p:nvSpPr>
         <p:spPr>
           <a:xfrm>
-            <a:off x="6519672" y="2258568"/>
-            <a:ext cx="1828800" cy="292608"/>
-          </a:xfrm>
-          <a:prstGeom prst="rect">
-            <a:avLst/>
-          </a:prstGeom>
-          <a:noFill/>
-          <a:ln/>
-        </p:spPr>
-        <p:txBody>
-          <a:bodyPr wrap="square" lIns="0" tIns="0" rIns="0" bIns="0" rtlCol="0" anchor="ctr"/>
-          <a:lstStyle/>
-          <a:p>
-            <a:pPr algn="ctr" indent="0" marL="0">
-              <a:buNone/>
-            </a:pPr>
-            <a:r>
-              <a:rPr lang="en-US" sz="1300" b="1" dirty="0">
-                <a:solidFill>
-                  <a:srgbClr val="9D174D"/>
+            <a:off x="365760" y="3273552"/>
+            <a:ext cx="1371600" cy="658368"/>
+          </a:xfrm>
+          <a:prstGeom prst="rect">
+            <a:avLst/>
+          </a:prstGeom>
+          <a:noFill/>
+          <a:ln/>
+        </p:spPr>
+        <p:txBody>
+          <a:bodyPr wrap="square" lIns="0" tIns="0" rIns="0" bIns="0" rtlCol="0" anchor="ctr"/>
+          <a:lstStyle/>
+          <a:p>
+            <a:pPr algn="ctr" indent="0" marL="0">
+              <a:buNone/>
+            </a:pPr>
+            <a:r>
+              <a:rPr lang="en-US" sz="1100" b="1" dirty="0">
+                <a:solidFill>
+                  <a:srgbClr val="475569"/>
                 </a:solidFill>
                 <a:latin typeface="Trebuchet MS" pitchFamily="34" charset="0"/>
                 <a:ea typeface="Trebuchet MS" pitchFamily="34" charset="-122"/>
                 <a:cs typeface="Trebuchet MS" pitchFamily="34" charset="-120"/>
               </a:rPr>
-              <a:t>ion</a:t>
-            </a:r>
-            <a:endParaRPr lang="en-US" sz="1300" dirty="0"/>
-          </a:p>
-        </p:txBody>
-      </p:sp>
-      <p:sp>
-        <p:nvSpPr>
-          <p:cNvPr id="24" name="Text 22"/>
-          <p:cNvSpPr/>
-          <p:nvPr/>
-        </p:nvSpPr>
-        <p:spPr>
-          <a:xfrm>
-            <a:off x="6519672" y="2569464"/>
-            <a:ext cx="1828800" cy="201168"/>
-          </a:xfrm>
-          <a:prstGeom prst="rect">
-            <a:avLst/>
-          </a:prstGeom>
-          <a:noFill/>
-          <a:ln/>
-        </p:spPr>
-        <p:txBody>
-          <a:bodyPr wrap="square" lIns="0" tIns="0" rIns="0" bIns="0" rtlCol="0" anchor="t"/>
-          <a:lstStyle/>
-          <a:p>
-            <a:pPr algn="ctr" indent="0" marL="0">
-              <a:buNone/>
-            </a:pPr>
-            <a:r>
-              <a:rPr lang="en-US" sz="850" dirty="0">
-                <a:solidFill>
-                  <a:srgbClr val="475569"/>
-                </a:solidFill>
-                <a:latin typeface="Calibri" pitchFamily="34" charset="0"/>
-                <a:ea typeface="Calibri" pitchFamily="34" charset="-122"/>
-                <a:cs typeface="Calibri" pitchFamily="34" charset="-120"/>
-              </a:rPr>
-              <a:t>result, state</a:t>
-            </a:r>
-            <a:endParaRPr lang="en-US" sz="850" dirty="0"/>
-          </a:p>
-        </p:txBody>
-      </p:sp>
-      <p:sp>
-        <p:nvSpPr>
-          <p:cNvPr id="25" name="Shape 23"/>
-          <p:cNvSpPr/>
-          <p:nvPr/>
-        </p:nvSpPr>
-        <p:spPr>
-          <a:xfrm>
-            <a:off x="365760" y="3273552"/>
-            <a:ext cx="1371600" cy="658368"/>
+              <a:t>Syllables</a:t>
+            </a:r>
+            <a:endParaRPr lang="en-US" sz="1100" dirty="0"/>
+          </a:p>
+        </p:txBody>
+      </p:sp>
+      <p:sp>
+        <p:nvSpPr>
+          <p:cNvPr id="24" name="Shape 22"/>
+          <p:cNvSpPr/>
+          <p:nvPr/>
+        </p:nvSpPr>
+        <p:spPr>
+          <a:xfrm>
+            <a:off x="1874520" y="3273552"/>
+            <a:ext cx="6903720" cy="658368"/>
           </a:xfrm>
           <a:prstGeom prst="rect">
             <a:avLst>
@@ -9204,11 +9046,38 @@
             </a:avLst>
           </a:prstGeom>
           <a:solidFill>
-            <a:srgbClr val="E2E8F0"/>
-          </a:solidFill>
-          <a:ln w="12700">
-            <a:solidFill>
-              <a:srgbClr val="E2E8F0"/>
+            <a:srgbClr val="CCFBF1"/>
+          </a:solidFill>
+          <a:ln w="12700">
+            <a:solidFill>
+              <a:srgbClr val="0D9488"/>
+            </a:solidFill>
+            <a:prstDash val="solid"/>
+          </a:ln>
+        </p:spPr>
+      </p:sp>
+      <p:sp>
+        <p:nvSpPr>
+          <p:cNvPr id="25" name="Shape 23"/>
+          <p:cNvSpPr/>
+          <p:nvPr/>
+        </p:nvSpPr>
+        <p:spPr>
+          <a:xfrm>
+            <a:off x="2999232" y="3364992"/>
+            <a:ext cx="1645920" cy="475488"/>
+          </a:xfrm>
+          <a:prstGeom prst="rect">
+            <a:avLst>
+              <a:gd name="adj" fmla="val 9615"/>
+            </a:avLst>
+          </a:prstGeom>
+          <a:solidFill>
+            <a:srgbClr val="FFFFFF"/>
+          </a:solidFill>
+          <a:ln w="12700">
+            <a:solidFill>
+              <a:srgbClr val="0D9488"/>
             </a:solidFill>
             <a:prstDash val="solid"/>
           </a:ln>
@@ -9222,63 +9091,75 @@
         </p:nvSpPr>
         <p:spPr>
           <a:xfrm>
-            <a:off x="365760" y="3273552"/>
-            <a:ext cx="1371600" cy="658368"/>
-          </a:xfrm>
-          <a:prstGeom prst="rect">
-            <a:avLst/>
-          </a:prstGeom>
-          <a:noFill/>
-          <a:ln/>
-        </p:spPr>
-        <p:txBody>
-          <a:bodyPr wrap="square" lIns="0" tIns="0" rIns="0" bIns="0" rtlCol="0" anchor="ctr"/>
-          <a:lstStyle/>
-          <a:p>
-            <a:pPr algn="ctr" indent="0" marL="0">
-              <a:buNone/>
-            </a:pPr>
-            <a:r>
-              <a:rPr lang="en-US" sz="1100" b="1" dirty="0">
-                <a:solidFill>
-                  <a:srgbClr val="475569"/>
+            <a:off x="2999232" y="3364992"/>
+            <a:ext cx="1645920" cy="475488"/>
+          </a:xfrm>
+          <a:prstGeom prst="rect">
+            <a:avLst/>
+          </a:prstGeom>
+          <a:noFill/>
+          <a:ln/>
+        </p:spPr>
+        <p:txBody>
+          <a:bodyPr wrap="square" lIns="0" tIns="0" rIns="0" bIns="0" rtlCol="0" anchor="ctr"/>
+          <a:lstStyle/>
+          <a:p>
+            <a:pPr algn="ctr" indent="0" marL="0">
+              <a:buNone/>
+            </a:pPr>
+            <a:r>
+              <a:rPr lang="en-US" sz="1400" b="1" dirty="0">
+                <a:solidFill>
+                  <a:srgbClr val="0D9488"/>
                 </a:solidFill>
                 <a:latin typeface="Trebuchet MS" pitchFamily="34" charset="0"/>
                 <a:ea typeface="Trebuchet MS" pitchFamily="34" charset="-122"/>
                 <a:cs typeface="Trebuchet MS" pitchFamily="34" charset="-120"/>
               </a:rPr>
-              <a:t>Syllables</a:t>
-            </a:r>
-            <a:endParaRPr lang="en-US" sz="1100" dirty="0"/>
-          </a:p>
-        </p:txBody>
-      </p:sp>
-      <p:sp>
-        <p:nvSpPr>
-          <p:cNvPr id="27" name="Shape 25"/>
-          <p:cNvSpPr/>
-          <p:nvPr/>
-        </p:nvSpPr>
-        <p:spPr>
-          <a:xfrm>
-            <a:off x="1874520" y="3273552"/>
-            <a:ext cx="6903720" cy="658368"/>
-          </a:xfrm>
-          <a:prstGeom prst="rect">
-            <a:avLst>
-              <a:gd name="adj" fmla="val 8333"/>
-            </a:avLst>
-          </a:prstGeom>
-          <a:solidFill>
-            <a:srgbClr val="CCFBF1"/>
-          </a:solidFill>
-          <a:ln w="12700">
-            <a:solidFill>
-              <a:srgbClr val="0D9488"/>
-            </a:solidFill>
-            <a:prstDash val="solid"/>
-          </a:ln>
-        </p:spPr>
+              <a:t>non</a:t>
+            </a:r>
+            <a:endParaRPr lang="en-US" sz="1400" dirty="0"/>
+          </a:p>
+        </p:txBody>
+      </p:sp>
+      <p:sp>
+        <p:nvSpPr>
+          <p:cNvPr id="27" name="Text 25"/>
+          <p:cNvSpPr/>
+          <p:nvPr/>
+        </p:nvSpPr>
+        <p:spPr>
+          <a:xfrm>
+            <a:off x="4645152" y="3364992"/>
+            <a:ext cx="1097280" cy="475488"/>
+          </a:xfrm>
+          <a:prstGeom prst="rect">
+            <a:avLst/>
+          </a:prstGeom>
+          <a:noFill/>
+          <a:ln/>
+        </p:spPr>
+        <p:txBody>
+          <a:bodyPr wrap="square" lIns="0" tIns="0" rIns="0" bIns="0" rtlCol="0" anchor="ctr"/>
+          <a:lstStyle/>
+          <a:p>
+            <a:pPr algn="ctr" indent="0" marL="0">
+              <a:buNone/>
+            </a:pPr>
+            <a:r>
+              <a:rPr lang="en-US" sz="1600" b="1" dirty="0">
+                <a:solidFill>
+                  <a:srgbClr val="0D9488"/>
+                </a:solidFill>
+                <a:latin typeface="Trebuchet MS" pitchFamily="34" charset="0"/>
+                <a:ea typeface="Trebuchet MS" pitchFamily="34" charset="-122"/>
+                <a:cs typeface="Trebuchet MS" pitchFamily="34" charset="-120"/>
+              </a:rPr>
+              <a:t>·</a:t>
+            </a:r>
+            <a:endParaRPr lang="en-US" sz="1600" dirty="0"/>
+          </a:p>
+        </p:txBody>
       </p:sp>
       <p:sp>
         <p:nvSpPr>
@@ -9288,7 +9169,7 @@
         </p:nvSpPr>
         <p:spPr>
           <a:xfrm>
-            <a:off x="2313432" y="3364992"/>
+            <a:off x="5742432" y="3364992"/>
             <a:ext cx="1645920" cy="475488"/>
           </a:xfrm>
           <a:prstGeom prst="rect">
@@ -9315,7 +9196,7 @@
         </p:nvSpPr>
         <p:spPr>
           <a:xfrm>
-            <a:off x="2313432" y="3364992"/>
+            <a:off x="5742432" y="3364992"/>
             <a:ext cx="1645920" cy="475488"/>
           </a:xfrm>
           <a:prstGeom prst="rect">
@@ -9340,7 +9221,7 @@
                 <a:ea typeface="Trebuchet MS" pitchFamily="34" charset="-122"/>
                 <a:cs typeface="Trebuchet MS" pitchFamily="34" charset="-120"/>
               </a:rPr>
-              <a:t>non</a:t>
+              <a:t>stop</a:t>
             </a:r>
             <a:endParaRPr lang="en-US" sz="1400" dirty="0"/>
           </a:p>
@@ -9348,224 +9229,80 @@
       </p:sp>
       <p:sp>
         <p:nvSpPr>
-          <p:cNvPr id="30" name="Text 28"/>
-          <p:cNvSpPr/>
-          <p:nvPr/>
-        </p:nvSpPr>
-        <p:spPr>
-          <a:xfrm>
-            <a:off x="3959352" y="3364992"/>
-            <a:ext cx="411480" cy="475488"/>
-          </a:xfrm>
-          <a:prstGeom prst="rect">
-            <a:avLst/>
-          </a:prstGeom>
-          <a:noFill/>
-          <a:ln/>
-        </p:spPr>
-        <p:txBody>
-          <a:bodyPr wrap="square" lIns="0" tIns="0" rIns="0" bIns="0" rtlCol="0" anchor="ctr"/>
-          <a:lstStyle/>
-          <a:p>
-            <a:pPr algn="ctr" indent="0" marL="0">
-              <a:buNone/>
-            </a:pPr>
-            <a:r>
-              <a:rPr lang="en-US" sz="1600" b="1" dirty="0">
-                <a:solidFill>
-                  <a:srgbClr val="0D9488"/>
+          <p:cNvPr id="30" name="Shape 28"/>
+          <p:cNvSpPr/>
+          <p:nvPr/>
+        </p:nvSpPr>
+        <p:spPr>
+          <a:xfrm>
+            <a:off x="365760" y="4096512"/>
+            <a:ext cx="1371600" cy="804672"/>
+          </a:xfrm>
+          <a:prstGeom prst="rect">
+            <a:avLst>
+              <a:gd name="adj" fmla="val 6818"/>
+            </a:avLst>
+          </a:prstGeom>
+          <a:solidFill>
+            <a:srgbClr val="E2E8F0"/>
+          </a:solidFill>
+          <a:ln w="12700">
+            <a:solidFill>
+              <a:srgbClr val="E2E8F0"/>
+            </a:solidFill>
+            <a:prstDash val="solid"/>
+          </a:ln>
+        </p:spPr>
+      </p:sp>
+      <p:sp>
+        <p:nvSpPr>
+          <p:cNvPr id="31" name="Text 29"/>
+          <p:cNvSpPr/>
+          <p:nvPr/>
+        </p:nvSpPr>
+        <p:spPr>
+          <a:xfrm>
+            <a:off x="365760" y="4096512"/>
+            <a:ext cx="1371600" cy="804672"/>
+          </a:xfrm>
+          <a:prstGeom prst="rect">
+            <a:avLst/>
+          </a:prstGeom>
+          <a:noFill/>
+          <a:ln/>
+        </p:spPr>
+        <p:txBody>
+          <a:bodyPr wrap="square" lIns="0" tIns="0" rIns="0" bIns="0" rtlCol="0" anchor="ctr"/>
+          <a:lstStyle/>
+          <a:p>
+            <a:pPr algn="ctr" indent="0" marL="0">
+              <a:buNone/>
+            </a:pPr>
+            <a:r>
+              <a:rPr lang="en-US" sz="1100" b="1" dirty="0">
+                <a:solidFill>
+                  <a:srgbClr val="475569"/>
                 </a:solidFill>
                 <a:latin typeface="Trebuchet MS" pitchFamily="34" charset="0"/>
                 <a:ea typeface="Trebuchet MS" pitchFamily="34" charset="-122"/>
                 <a:cs typeface="Trebuchet MS" pitchFamily="34" charset="-120"/>
               </a:rPr>
-              <a:t>·</a:t>
-            </a:r>
-            <a:endParaRPr lang="en-US" sz="1600" dirty="0"/>
-          </a:p>
-        </p:txBody>
-      </p:sp>
-      <p:sp>
-        <p:nvSpPr>
-          <p:cNvPr id="31" name="Shape 29"/>
-          <p:cNvSpPr/>
-          <p:nvPr/>
-        </p:nvSpPr>
-        <p:spPr>
-          <a:xfrm>
-            <a:off x="4370832" y="3364992"/>
-            <a:ext cx="1645920" cy="475488"/>
-          </a:xfrm>
-          <a:prstGeom prst="rect">
-            <a:avLst>
-              <a:gd name="adj" fmla="val 9615"/>
-            </a:avLst>
-          </a:prstGeom>
-          <a:solidFill>
-            <a:srgbClr val="FFFFFF"/>
-          </a:solidFill>
-          <a:ln w="12700">
-            <a:solidFill>
-              <a:srgbClr val="0D9488"/>
-            </a:solidFill>
-            <a:prstDash val="solid"/>
-          </a:ln>
-        </p:spPr>
-      </p:sp>
-      <p:sp>
-        <p:nvSpPr>
-          <p:cNvPr id="32" name="Text 30"/>
-          <p:cNvSpPr/>
-          <p:nvPr/>
-        </p:nvSpPr>
-        <p:spPr>
-          <a:xfrm>
-            <a:off x="4370832" y="3364992"/>
-            <a:ext cx="1645920" cy="475488"/>
-          </a:xfrm>
-          <a:prstGeom prst="rect">
-            <a:avLst/>
-          </a:prstGeom>
-          <a:noFill/>
-          <a:ln/>
-        </p:spPr>
-        <p:txBody>
-          <a:bodyPr wrap="square" lIns="0" tIns="0" rIns="0" bIns="0" rtlCol="0" anchor="ctr"/>
-          <a:lstStyle/>
-          <a:p>
-            <a:pPr algn="ctr" indent="0" marL="0">
-              <a:buNone/>
-            </a:pPr>
-            <a:r>
-              <a:rPr lang="en-US" sz="1400" b="1" dirty="0">
-                <a:solidFill>
-                  <a:srgbClr val="0D9488"/>
-                </a:solidFill>
-                <a:latin typeface="Trebuchet MS" pitchFamily="34" charset="0"/>
-                <a:ea typeface="Trebuchet MS" pitchFamily="34" charset="-122"/>
-                <a:cs typeface="Trebuchet MS" pitchFamily="34" charset="-120"/>
-              </a:rPr>
-              <a:t>fic</a:t>
-            </a:r>
-            <a:endParaRPr lang="en-US" sz="1400" dirty="0"/>
-          </a:p>
-        </p:txBody>
-      </p:sp>
-      <p:sp>
-        <p:nvSpPr>
-          <p:cNvPr id="33" name="Text 31"/>
-          <p:cNvSpPr/>
-          <p:nvPr/>
-        </p:nvSpPr>
-        <p:spPr>
-          <a:xfrm>
-            <a:off x="6016752" y="3364992"/>
-            <a:ext cx="411480" cy="475488"/>
-          </a:xfrm>
-          <a:prstGeom prst="rect">
-            <a:avLst/>
-          </a:prstGeom>
-          <a:noFill/>
-          <a:ln/>
-        </p:spPr>
-        <p:txBody>
-          <a:bodyPr wrap="square" lIns="0" tIns="0" rIns="0" bIns="0" rtlCol="0" anchor="ctr"/>
-          <a:lstStyle/>
-          <a:p>
-            <a:pPr algn="ctr" indent="0" marL="0">
-              <a:buNone/>
-            </a:pPr>
-            <a:r>
-              <a:rPr lang="en-US" sz="1600" b="1" dirty="0">
-                <a:solidFill>
-                  <a:srgbClr val="0D9488"/>
-                </a:solidFill>
-                <a:latin typeface="Trebuchet MS" pitchFamily="34" charset="0"/>
-                <a:ea typeface="Trebuchet MS" pitchFamily="34" charset="-122"/>
-                <a:cs typeface="Trebuchet MS" pitchFamily="34" charset="-120"/>
-              </a:rPr>
-              <a:t>·</a:t>
-            </a:r>
-            <a:endParaRPr lang="en-US" sz="1600" dirty="0"/>
-          </a:p>
-        </p:txBody>
-      </p:sp>
-      <p:sp>
-        <p:nvSpPr>
-          <p:cNvPr id="34" name="Shape 32"/>
-          <p:cNvSpPr/>
-          <p:nvPr/>
-        </p:nvSpPr>
-        <p:spPr>
-          <a:xfrm>
-            <a:off x="6428232" y="3364992"/>
-            <a:ext cx="1645920" cy="475488"/>
-          </a:xfrm>
-          <a:prstGeom prst="rect">
-            <a:avLst>
-              <a:gd name="adj" fmla="val 9615"/>
-            </a:avLst>
-          </a:prstGeom>
-          <a:solidFill>
-            <a:srgbClr val="FFFFFF"/>
-          </a:solidFill>
-          <a:ln w="12700">
-            <a:solidFill>
-              <a:srgbClr val="0D9488"/>
-            </a:solidFill>
-            <a:prstDash val="solid"/>
-          </a:ln>
-        </p:spPr>
-      </p:sp>
-      <p:sp>
-        <p:nvSpPr>
-          <p:cNvPr id="35" name="Text 33"/>
-          <p:cNvSpPr/>
-          <p:nvPr/>
-        </p:nvSpPr>
-        <p:spPr>
-          <a:xfrm>
-            <a:off x="6428232" y="3364992"/>
-            <a:ext cx="1645920" cy="475488"/>
-          </a:xfrm>
-          <a:prstGeom prst="rect">
-            <a:avLst/>
-          </a:prstGeom>
-          <a:noFill/>
-          <a:ln/>
-        </p:spPr>
-        <p:txBody>
-          <a:bodyPr wrap="square" lIns="0" tIns="0" rIns="0" bIns="0" rtlCol="0" anchor="ctr"/>
-          <a:lstStyle/>
-          <a:p>
-            <a:pPr algn="ctr" indent="0" marL="0">
-              <a:buNone/>
-            </a:pPr>
-            <a:r>
-              <a:rPr lang="en-US" sz="1400" b="1" dirty="0">
-                <a:solidFill>
-                  <a:srgbClr val="0D9488"/>
-                </a:solidFill>
-                <a:latin typeface="Trebuchet MS" pitchFamily="34" charset="0"/>
-                <a:ea typeface="Trebuchet MS" pitchFamily="34" charset="-122"/>
-                <a:cs typeface="Trebuchet MS" pitchFamily="34" charset="-120"/>
-              </a:rPr>
-              <a:t>tion</a:t>
-            </a:r>
-            <a:endParaRPr lang="en-US" sz="1400" dirty="0"/>
-          </a:p>
-        </p:txBody>
-      </p:sp>
-      <p:sp>
-        <p:nvSpPr>
-          <p:cNvPr id="36" name="Shape 34"/>
-          <p:cNvSpPr/>
-          <p:nvPr/>
-        </p:nvSpPr>
-        <p:spPr>
-          <a:xfrm>
-            <a:off x="365760" y="4096512"/>
-            <a:ext cx="1371600" cy="804672"/>
+              <a:t>Phonemes</a:t>
+            </a:r>
+            <a:endParaRPr lang="en-US" sz="1100" dirty="0"/>
+          </a:p>
+        </p:txBody>
+      </p:sp>
+      <p:sp>
+        <p:nvSpPr>
+          <p:cNvPr id="32" name="Shape 30"/>
+          <p:cNvSpPr/>
+          <p:nvPr/>
+        </p:nvSpPr>
+        <p:spPr>
+          <a:xfrm>
+            <a:off x="1874520" y="4096512"/>
+            <a:ext cx="6903720" cy="804672"/>
           </a:xfrm>
           <a:prstGeom prst="rect">
             <a:avLst>
@@ -9573,85 +9310,19 @@
             </a:avLst>
           </a:prstGeom>
           <a:solidFill>
-            <a:srgbClr val="E2E8F0"/>
+            <a:srgbClr val="F8FAFC"/>
           </a:solidFill>
           <a:ln w="12700">
             <a:solidFill>
               <a:srgbClr val="E2E8F0"/>
             </a:solidFill>
-            <a:prstDash val="solid"/>
-          </a:ln>
-        </p:spPr>
-      </p:sp>
-      <p:sp>
-        <p:nvSpPr>
-          <p:cNvPr id="37" name="Text 35"/>
-          <p:cNvSpPr/>
-          <p:nvPr/>
-        </p:nvSpPr>
-        <p:spPr>
-          <a:xfrm>
-            <a:off x="365760" y="4096512"/>
-            <a:ext cx="1371600" cy="804672"/>
-          </a:xfrm>
-          <a:prstGeom prst="rect">
-            <a:avLst/>
-          </a:prstGeom>
-          <a:noFill/>
-          <a:ln/>
-        </p:spPr>
-        <p:txBody>
-          <a:bodyPr wrap="square" lIns="0" tIns="0" rIns="0" bIns="0" rtlCol="0" anchor="ctr"/>
-          <a:lstStyle/>
-          <a:p>
-            <a:pPr algn="ctr" indent="0" marL="0">
-              <a:buNone/>
-            </a:pPr>
-            <a:r>
-              <a:rPr lang="en-US" sz="1100" b="1" dirty="0">
-                <a:solidFill>
-                  <a:srgbClr val="475569"/>
-                </a:solidFill>
-                <a:latin typeface="Trebuchet MS" pitchFamily="34" charset="0"/>
-                <a:ea typeface="Trebuchet MS" pitchFamily="34" charset="-122"/>
-                <a:cs typeface="Trebuchet MS" pitchFamily="34" charset="-120"/>
-              </a:rPr>
-              <a:t>Phonemes</a:t>
-            </a:r>
-            <a:endParaRPr lang="en-US" sz="1100" dirty="0"/>
-          </a:p>
-        </p:txBody>
-      </p:sp>
-      <p:sp>
-        <p:nvSpPr>
-          <p:cNvPr id="38" name="Shape 36"/>
-          <p:cNvSpPr/>
-          <p:nvPr/>
-        </p:nvSpPr>
-        <p:spPr>
-          <a:xfrm>
-            <a:off x="1874520" y="4096512"/>
-            <a:ext cx="6903720" cy="804672"/>
-          </a:xfrm>
-          <a:prstGeom prst="rect">
-            <a:avLst>
-              <a:gd name="adj" fmla="val 6818"/>
-            </a:avLst>
-          </a:prstGeom>
-          <a:solidFill>
-            <a:srgbClr val="F8FAFC"/>
-          </a:solidFill>
-          <a:ln w="12700">
-            <a:solidFill>
-              <a:srgbClr val="E2E8F0"/>
-            </a:solidFill>
             <a:prstDash val="dash"/>
           </a:ln>
         </p:spPr>
       </p:sp>
       <p:sp>
         <p:nvSpPr>
-          <p:cNvPr id="39" name="Text 37"/>
+          <p:cNvPr id="33" name="Text 31"/>
           <p:cNvSpPr/>
           <p:nvPr/>
         </p:nvSpPr>
@@ -10113,7 +9784,7 @@
                 <a:ea typeface="Trebuchet MS" pitchFamily="34" charset="-122"/>
                 <a:cs typeface="Trebuchet MS" pitchFamily="34" charset="-120"/>
               </a:rPr>
-              <a:t>nonfiction</a:t>
+              <a:t>nonstop</a:t>
             </a:r>
             <a:endParaRPr lang="en-US" sz="2800" dirty="0"/>
           </a:p>
@@ -10193,7 +9864,7 @@
         </p:nvSpPr>
         <p:spPr>
           <a:xfrm>
-            <a:off x="2221992" y="2258568"/>
+            <a:off x="2938272" y="2258568"/>
             <a:ext cx="1828800" cy="292608"/>
           </a:xfrm>
           <a:prstGeom prst="rect">
@@ -10227,7 +9898,7 @@
         </p:nvSpPr>
         <p:spPr>
           <a:xfrm>
-            <a:off x="2221992" y="2258568"/>
+            <a:off x="2938272" y="2258568"/>
             <a:ext cx="1828800" cy="292608"/>
           </a:xfrm>
           <a:prstGeom prst="rect">
@@ -10266,7 +9937,7 @@
         </p:nvSpPr>
         <p:spPr>
           <a:xfrm>
-            <a:off x="2221992" y="2569464"/>
+            <a:off x="2938272" y="2569464"/>
             <a:ext cx="1828800" cy="201168"/>
           </a:xfrm>
           <a:prstGeom prst="rect">
@@ -10291,7 +9962,7 @@
                 <a:ea typeface="Calibri" pitchFamily="34" charset="-122"/>
                 <a:cs typeface="Calibri" pitchFamily="34" charset="-120"/>
               </a:rPr>
-              <a:t>not</a:t>
+              <a:t>not, without</a:t>
             </a:r>
             <a:endParaRPr lang="en-US" sz="850" dirty="0"/>
           </a:p>
@@ -10305,7 +9976,7 @@
         </p:nvSpPr>
         <p:spPr>
           <a:xfrm>
-            <a:off x="4370832" y="2258568"/>
+            <a:off x="5803392" y="2258568"/>
             <a:ext cx="1828800" cy="292608"/>
           </a:xfrm>
           <a:prstGeom prst="rect">
@@ -10339,7 +10010,7 @@
         </p:nvSpPr>
         <p:spPr>
           <a:xfrm>
-            <a:off x="4370832" y="2258568"/>
+            <a:off x="5803392" y="2258568"/>
             <a:ext cx="1828800" cy="292608"/>
           </a:xfrm>
           <a:prstGeom prst="rect">
@@ -10364,7 +10035,7 @@
                 <a:ea typeface="Trebuchet MS" pitchFamily="34" charset="-122"/>
                 <a:cs typeface="Trebuchet MS" pitchFamily="34" charset="-120"/>
               </a:rPr>
-              <a:t>fict</a:t>
+              <a:t>stop</a:t>
             </a:r>
             <a:endParaRPr lang="en-US" sz="1300" dirty="0"/>
           </a:p>
@@ -10378,7 +10049,7 @@
         </p:nvSpPr>
         <p:spPr>
           <a:xfrm>
-            <a:off x="4370832" y="2569464"/>
+            <a:off x="5803392" y="2569464"/>
             <a:ext cx="1828800" cy="201168"/>
           </a:xfrm>
           <a:prstGeom prst="rect">
@@ -10403,7 +10074,7 @@
                 <a:ea typeface="Calibri" pitchFamily="34" charset="-122"/>
                 <a:cs typeface="Calibri" pitchFamily="34" charset="-120"/>
               </a:rPr>
-              <a:t>made up, invented</a:t>
+              <a:t>to cease or pause</a:t>
             </a:r>
             <a:endParaRPr lang="en-US" sz="850" dirty="0"/>
           </a:p>
@@ -10417,30 +10088,23 @@
         </p:nvSpPr>
         <p:spPr>
           <a:xfrm>
-            <a:off x="6519672" y="2258568"/>
-            <a:ext cx="1828800" cy="292608"/>
+            <a:off x="365760" y="3273552"/>
+            <a:ext cx="1371600" cy="658368"/>
           </a:xfrm>
           <a:prstGeom prst="rect">
             <a:avLst>
-              <a:gd name="adj" fmla="val 25000"/>
+              <a:gd name="adj" fmla="val 8333"/>
             </a:avLst>
           </a:prstGeom>
           <a:solidFill>
-            <a:srgbClr val="FCE7F3"/>
-          </a:solidFill>
-          <a:ln w="19050">
-            <a:solidFill>
-              <a:srgbClr val="DB2777"/>
-            </a:solidFill>
-            <a:prstDash val="solid"/>
-          </a:ln>
-          <a:effectLst>
-            <a:outerShdw sx="100000" sy="100000" kx="0" ky="0" algn="bl" rotWithShape="0" blurRad="101600" dist="38100" dir="8100000">
-              <a:srgbClr val="000000">
-                <a:alpha val="12000"/>
-              </a:srgbClr>
-            </a:outerShdw>
-          </a:effectLst>
+            <a:srgbClr val="E2E8F0"/>
+          </a:solidFill>
+          <a:ln w="12700">
+            <a:solidFill>
+              <a:srgbClr val="E2E8F0"/>
+            </a:solidFill>
+            <a:prstDash val="solid"/>
+          </a:ln>
         </p:spPr>
       </p:sp>
       <p:sp>
@@ -10451,86 +10115,47 @@
         </p:nvSpPr>
         <p:spPr>
           <a:xfrm>
-            <a:off x="6519672" y="2258568"/>
-            <a:ext cx="1828800" cy="292608"/>
-          </a:xfrm>
-          <a:prstGeom prst="rect">
-            <a:avLst/>
-          </a:prstGeom>
-          <a:noFill/>
-          <a:ln/>
-        </p:spPr>
-        <p:txBody>
-          <a:bodyPr wrap="square" lIns="0" tIns="0" rIns="0" bIns="0" rtlCol="0" anchor="ctr"/>
-          <a:lstStyle/>
-          <a:p>
-            <a:pPr algn="ctr" indent="0" marL="0">
-              <a:buNone/>
-            </a:pPr>
-            <a:r>
-              <a:rPr lang="en-US" sz="1300" b="1" dirty="0">
-                <a:solidFill>
-                  <a:srgbClr val="9D174D"/>
+            <a:off x="365760" y="3273552"/>
+            <a:ext cx="1371600" cy="658368"/>
+          </a:xfrm>
+          <a:prstGeom prst="rect">
+            <a:avLst/>
+          </a:prstGeom>
+          <a:noFill/>
+          <a:ln/>
+        </p:spPr>
+        <p:txBody>
+          <a:bodyPr wrap="square" lIns="0" tIns="0" rIns="0" bIns="0" rtlCol="0" anchor="ctr"/>
+          <a:lstStyle/>
+          <a:p>
+            <a:pPr algn="ctr" indent="0" marL="0">
+              <a:buNone/>
+            </a:pPr>
+            <a:r>
+              <a:rPr lang="en-US" sz="1100" b="1" dirty="0">
+                <a:solidFill>
+                  <a:srgbClr val="475569"/>
                 </a:solidFill>
                 <a:latin typeface="Trebuchet MS" pitchFamily="34" charset="0"/>
                 <a:ea typeface="Trebuchet MS" pitchFamily="34" charset="-122"/>
                 <a:cs typeface="Trebuchet MS" pitchFamily="34" charset="-120"/>
               </a:rPr>
-              <a:t>ion</a:t>
-            </a:r>
-            <a:endParaRPr lang="en-US" sz="1300" dirty="0"/>
-          </a:p>
-        </p:txBody>
-      </p:sp>
-      <p:sp>
-        <p:nvSpPr>
-          <p:cNvPr id="24" name="Text 22"/>
-          <p:cNvSpPr/>
-          <p:nvPr/>
-        </p:nvSpPr>
-        <p:spPr>
-          <a:xfrm>
-            <a:off x="6519672" y="2569464"/>
-            <a:ext cx="1828800" cy="201168"/>
-          </a:xfrm>
-          <a:prstGeom prst="rect">
-            <a:avLst/>
-          </a:prstGeom>
-          <a:noFill/>
-          <a:ln/>
-        </p:spPr>
-        <p:txBody>
-          <a:bodyPr wrap="square" lIns="0" tIns="0" rIns="0" bIns="0" rtlCol="0" anchor="t"/>
-          <a:lstStyle/>
-          <a:p>
-            <a:pPr algn="ctr" indent="0" marL="0">
-              <a:buNone/>
-            </a:pPr>
-            <a:r>
-              <a:rPr lang="en-US" sz="850" dirty="0">
-                <a:solidFill>
-                  <a:srgbClr val="475569"/>
-                </a:solidFill>
-                <a:latin typeface="Calibri" pitchFamily="34" charset="0"/>
-                <a:ea typeface="Calibri" pitchFamily="34" charset="-122"/>
-                <a:cs typeface="Calibri" pitchFamily="34" charset="-120"/>
-              </a:rPr>
-              <a:t>result, state</a:t>
-            </a:r>
-            <a:endParaRPr lang="en-US" sz="850" dirty="0"/>
-          </a:p>
-        </p:txBody>
-      </p:sp>
-      <p:sp>
-        <p:nvSpPr>
-          <p:cNvPr id="25" name="Shape 23"/>
-          <p:cNvSpPr/>
-          <p:nvPr/>
-        </p:nvSpPr>
-        <p:spPr>
-          <a:xfrm>
-            <a:off x="365760" y="3273552"/>
-            <a:ext cx="1371600" cy="658368"/>
+              <a:t>Syllables</a:t>
+            </a:r>
+            <a:endParaRPr lang="en-US" sz="1100" dirty="0"/>
+          </a:p>
+        </p:txBody>
+      </p:sp>
+      <p:sp>
+        <p:nvSpPr>
+          <p:cNvPr id="24" name="Shape 22"/>
+          <p:cNvSpPr/>
+          <p:nvPr/>
+        </p:nvSpPr>
+        <p:spPr>
+          <a:xfrm>
+            <a:off x="1874520" y="3273552"/>
+            <a:ext cx="6903720" cy="658368"/>
           </a:xfrm>
           <a:prstGeom prst="rect">
             <a:avLst>
@@ -10538,11 +10163,38 @@
             </a:avLst>
           </a:prstGeom>
           <a:solidFill>
-            <a:srgbClr val="E2E8F0"/>
-          </a:solidFill>
-          <a:ln w="12700">
-            <a:solidFill>
-              <a:srgbClr val="E2E8F0"/>
+            <a:srgbClr val="CCFBF1"/>
+          </a:solidFill>
+          <a:ln w="12700">
+            <a:solidFill>
+              <a:srgbClr val="0D9488"/>
+            </a:solidFill>
+            <a:prstDash val="solid"/>
+          </a:ln>
+        </p:spPr>
+      </p:sp>
+      <p:sp>
+        <p:nvSpPr>
+          <p:cNvPr id="25" name="Shape 23"/>
+          <p:cNvSpPr/>
+          <p:nvPr/>
+        </p:nvSpPr>
+        <p:spPr>
+          <a:xfrm>
+            <a:off x="2999232" y="3364992"/>
+            <a:ext cx="1645920" cy="475488"/>
+          </a:xfrm>
+          <a:prstGeom prst="rect">
+            <a:avLst>
+              <a:gd name="adj" fmla="val 9615"/>
+            </a:avLst>
+          </a:prstGeom>
+          <a:solidFill>
+            <a:srgbClr val="FFFFFF"/>
+          </a:solidFill>
+          <a:ln w="12700">
+            <a:solidFill>
+              <a:srgbClr val="0D9488"/>
             </a:solidFill>
             <a:prstDash val="solid"/>
           </a:ln>
@@ -10556,32 +10208,203 @@
         </p:nvSpPr>
         <p:spPr>
           <a:xfrm>
-            <a:off x="365760" y="3273552"/>
-            <a:ext cx="1371600" cy="658368"/>
-          </a:xfrm>
-          <a:prstGeom prst="rect">
-            <a:avLst/>
-          </a:prstGeom>
-          <a:noFill/>
-          <a:ln/>
-        </p:spPr>
-        <p:txBody>
-          <a:bodyPr wrap="square" lIns="0" tIns="0" rIns="0" bIns="0" rtlCol="0" anchor="ctr"/>
-          <a:lstStyle/>
-          <a:p>
-            <a:pPr algn="ctr" indent="0" marL="0">
-              <a:buNone/>
-            </a:pPr>
-            <a:r>
-              <a:rPr lang="en-US" sz="1100" b="1" dirty="0">
-                <a:solidFill>
-                  <a:srgbClr val="475569"/>
+            <a:off x="2999232" y="3364992"/>
+            <a:ext cx="1645920" cy="475488"/>
+          </a:xfrm>
+          <a:prstGeom prst="rect">
+            <a:avLst/>
+          </a:prstGeom>
+          <a:noFill/>
+          <a:ln/>
+        </p:spPr>
+        <p:txBody>
+          <a:bodyPr wrap="square" lIns="0" tIns="0" rIns="0" bIns="0" rtlCol="0" anchor="ctr"/>
+          <a:lstStyle/>
+          <a:p>
+            <a:pPr algn="ctr" indent="0" marL="0">
+              <a:buNone/>
+            </a:pPr>
+            <a:r>
+              <a:rPr lang="en-US" sz="1400" b="1" dirty="0">
+                <a:solidFill>
+                  <a:srgbClr val="0D9488"/>
                 </a:solidFill>
                 <a:latin typeface="Trebuchet MS" pitchFamily="34" charset="0"/>
                 <a:ea typeface="Trebuchet MS" pitchFamily="34" charset="-122"/>
                 <a:cs typeface="Trebuchet MS" pitchFamily="34" charset="-120"/>
               </a:rPr>
-              <a:t>Syllables</a:t>
+              <a:t>non</a:t>
+            </a:r>
+            <a:endParaRPr lang="en-US" sz="1400" dirty="0"/>
+          </a:p>
+        </p:txBody>
+      </p:sp>
+      <p:sp>
+        <p:nvSpPr>
+          <p:cNvPr id="27" name="Text 25"/>
+          <p:cNvSpPr/>
+          <p:nvPr/>
+        </p:nvSpPr>
+        <p:spPr>
+          <a:xfrm>
+            <a:off x="4645152" y="3364992"/>
+            <a:ext cx="1097280" cy="475488"/>
+          </a:xfrm>
+          <a:prstGeom prst="rect">
+            <a:avLst/>
+          </a:prstGeom>
+          <a:noFill/>
+          <a:ln/>
+        </p:spPr>
+        <p:txBody>
+          <a:bodyPr wrap="square" lIns="0" tIns="0" rIns="0" bIns="0" rtlCol="0" anchor="ctr"/>
+          <a:lstStyle/>
+          <a:p>
+            <a:pPr algn="ctr" indent="0" marL="0">
+              <a:buNone/>
+            </a:pPr>
+            <a:r>
+              <a:rPr lang="en-US" sz="1600" b="1" dirty="0">
+                <a:solidFill>
+                  <a:srgbClr val="0D9488"/>
+                </a:solidFill>
+                <a:latin typeface="Trebuchet MS" pitchFamily="34" charset="0"/>
+                <a:ea typeface="Trebuchet MS" pitchFamily="34" charset="-122"/>
+                <a:cs typeface="Trebuchet MS" pitchFamily="34" charset="-120"/>
+              </a:rPr>
+              <a:t>·</a:t>
+            </a:r>
+            <a:endParaRPr lang="en-US" sz="1600" dirty="0"/>
+          </a:p>
+        </p:txBody>
+      </p:sp>
+      <p:sp>
+        <p:nvSpPr>
+          <p:cNvPr id="28" name="Shape 26"/>
+          <p:cNvSpPr/>
+          <p:nvPr/>
+        </p:nvSpPr>
+        <p:spPr>
+          <a:xfrm>
+            <a:off x="5742432" y="3364992"/>
+            <a:ext cx="1645920" cy="475488"/>
+          </a:xfrm>
+          <a:prstGeom prst="rect">
+            <a:avLst>
+              <a:gd name="adj" fmla="val 9615"/>
+            </a:avLst>
+          </a:prstGeom>
+          <a:solidFill>
+            <a:srgbClr val="FFFFFF"/>
+          </a:solidFill>
+          <a:ln w="12700">
+            <a:solidFill>
+              <a:srgbClr val="0D9488"/>
+            </a:solidFill>
+            <a:prstDash val="solid"/>
+          </a:ln>
+        </p:spPr>
+      </p:sp>
+      <p:sp>
+        <p:nvSpPr>
+          <p:cNvPr id="29" name="Text 27"/>
+          <p:cNvSpPr/>
+          <p:nvPr/>
+        </p:nvSpPr>
+        <p:spPr>
+          <a:xfrm>
+            <a:off x="5742432" y="3364992"/>
+            <a:ext cx="1645920" cy="475488"/>
+          </a:xfrm>
+          <a:prstGeom prst="rect">
+            <a:avLst/>
+          </a:prstGeom>
+          <a:noFill/>
+          <a:ln/>
+        </p:spPr>
+        <p:txBody>
+          <a:bodyPr wrap="square" lIns="0" tIns="0" rIns="0" bIns="0" rtlCol="0" anchor="ctr"/>
+          <a:lstStyle/>
+          <a:p>
+            <a:pPr algn="ctr" indent="0" marL="0">
+              <a:buNone/>
+            </a:pPr>
+            <a:r>
+              <a:rPr lang="en-US" sz="1400" b="1" dirty="0">
+                <a:solidFill>
+                  <a:srgbClr val="0D9488"/>
+                </a:solidFill>
+                <a:latin typeface="Trebuchet MS" pitchFamily="34" charset="0"/>
+                <a:ea typeface="Trebuchet MS" pitchFamily="34" charset="-122"/>
+                <a:cs typeface="Trebuchet MS" pitchFamily="34" charset="-120"/>
+              </a:rPr>
+              <a:t>stop</a:t>
+            </a:r>
+            <a:endParaRPr lang="en-US" sz="1400" dirty="0"/>
+          </a:p>
+        </p:txBody>
+      </p:sp>
+      <p:sp>
+        <p:nvSpPr>
+          <p:cNvPr id="30" name="Shape 28"/>
+          <p:cNvSpPr/>
+          <p:nvPr/>
+        </p:nvSpPr>
+        <p:spPr>
+          <a:xfrm>
+            <a:off x="365760" y="4096512"/>
+            <a:ext cx="1371600" cy="804672"/>
+          </a:xfrm>
+          <a:prstGeom prst="rect">
+            <a:avLst>
+              <a:gd name="adj" fmla="val 6818"/>
+            </a:avLst>
+          </a:prstGeom>
+          <a:solidFill>
+            <a:srgbClr val="E2E8F0"/>
+          </a:solidFill>
+          <a:ln w="12700">
+            <a:solidFill>
+              <a:srgbClr val="E2E8F0"/>
+            </a:solidFill>
+            <a:prstDash val="solid"/>
+          </a:ln>
+        </p:spPr>
+      </p:sp>
+      <p:sp>
+        <p:nvSpPr>
+          <p:cNvPr id="31" name="Text 29"/>
+          <p:cNvSpPr/>
+          <p:nvPr/>
+        </p:nvSpPr>
+        <p:spPr>
+          <a:xfrm>
+            <a:off x="365760" y="4096512"/>
+            <a:ext cx="1371600" cy="804672"/>
+          </a:xfrm>
+          <a:prstGeom prst="rect">
+            <a:avLst/>
+          </a:prstGeom>
+          <a:noFill/>
+          <a:ln/>
+        </p:spPr>
+        <p:txBody>
+          <a:bodyPr wrap="square" lIns="0" tIns="0" rIns="0" bIns="0" rtlCol="0" anchor="ctr"/>
+          <a:lstStyle/>
+          <a:p>
+            <a:pPr algn="ctr" indent="0" marL="0">
+              <a:buNone/>
+            </a:pPr>
+            <a:r>
+              <a:rPr lang="en-US" sz="1100" b="1" dirty="0">
+                <a:solidFill>
+                  <a:srgbClr val="475569"/>
+                </a:solidFill>
+                <a:latin typeface="Trebuchet MS" pitchFamily="34" charset="0"/>
+                <a:ea typeface="Trebuchet MS" pitchFamily="34" charset="-122"/>
+                <a:cs typeface="Trebuchet MS" pitchFamily="34" charset="-120"/>
+              </a:rPr>
+              <a:t>Phonemes</a:t>
             </a:r>
             <a:endParaRPr lang="en-US" sz="1100" dirty="0"/>
           </a:p>
@@ -10589,13 +10412,13 @@
       </p:sp>
       <p:sp>
         <p:nvSpPr>
-          <p:cNvPr id="27" name="Shape 25"/>
-          <p:cNvSpPr/>
-          <p:nvPr/>
-        </p:nvSpPr>
-        <p:spPr>
-          <a:xfrm>
-            <a:off x="1874520" y="3273552"/>
+          <p:cNvPr id="32" name="Shape 30"/>
+          <p:cNvSpPr/>
+          <p:nvPr/>
+        </p:nvSpPr>
+        <p:spPr>
+          <a:xfrm>
+            <a:off x="1874520" y="4096512"/>
             <a:ext cx="6903720" cy="658368"/>
           </a:xfrm>
           <a:prstGeom prst="rect">
@@ -10604,30 +10427,30 @@
             </a:avLst>
           </a:prstGeom>
           <a:solidFill>
-            <a:srgbClr val="CCFBF1"/>
-          </a:solidFill>
-          <a:ln w="12700">
-            <a:solidFill>
-              <a:srgbClr val="0D9488"/>
-            </a:solidFill>
-            <a:prstDash val="solid"/>
-          </a:ln>
-        </p:spPr>
-      </p:sp>
-      <p:sp>
-        <p:nvSpPr>
-          <p:cNvPr id="28" name="Shape 26"/>
-          <p:cNvSpPr/>
-          <p:nvPr/>
-        </p:nvSpPr>
-        <p:spPr>
-          <a:xfrm>
-            <a:off x="2313432" y="3364992"/>
-            <a:ext cx="1645920" cy="475488"/>
+            <a:srgbClr val="FCE7F3"/>
+          </a:solidFill>
+          <a:ln w="12700">
+            <a:solidFill>
+              <a:srgbClr val="DB2777"/>
+            </a:solidFill>
+            <a:prstDash val="solid"/>
+          </a:ln>
+        </p:spPr>
+      </p:sp>
+      <p:sp>
+        <p:nvSpPr>
+          <p:cNvPr id="33" name="Shape 31"/>
+          <p:cNvSpPr/>
+          <p:nvPr/>
+        </p:nvSpPr>
+        <p:spPr>
+          <a:xfrm>
+            <a:off x="2124837" y="4169664"/>
+            <a:ext cx="685800" cy="475488"/>
           </a:xfrm>
           <a:prstGeom prst="rect">
             <a:avLst>
-              <a:gd name="adj" fmla="val 9615"/>
+              <a:gd name="adj" fmla="val 7692"/>
             </a:avLst>
           </a:prstGeom>
           <a:solidFill>
@@ -10635,104 +10458,131 @@
           </a:solidFill>
           <a:ln w="12700">
             <a:solidFill>
-              <a:srgbClr val="0D9488"/>
-            </a:solidFill>
-            <a:prstDash val="solid"/>
-          </a:ln>
-        </p:spPr>
-      </p:sp>
-      <p:sp>
-        <p:nvSpPr>
-          <p:cNvPr id="29" name="Text 27"/>
-          <p:cNvSpPr/>
-          <p:nvPr/>
-        </p:nvSpPr>
-        <p:spPr>
-          <a:xfrm>
-            <a:off x="2313432" y="3364992"/>
-            <a:ext cx="1645920" cy="475488"/>
-          </a:xfrm>
-          <a:prstGeom prst="rect">
-            <a:avLst/>
-          </a:prstGeom>
-          <a:noFill/>
-          <a:ln/>
-        </p:spPr>
-        <p:txBody>
-          <a:bodyPr wrap="square" lIns="0" tIns="0" rIns="0" bIns="0" rtlCol="0" anchor="ctr"/>
-          <a:lstStyle/>
-          <a:p>
-            <a:pPr algn="ctr" indent="0" marL="0">
-              <a:buNone/>
-            </a:pPr>
-            <a:r>
-              <a:rPr lang="en-US" sz="1400" b="1" dirty="0">
-                <a:solidFill>
-                  <a:srgbClr val="0D9488"/>
+              <a:srgbClr val="DB2777"/>
+            </a:solidFill>
+            <a:prstDash val="solid"/>
+          </a:ln>
+        </p:spPr>
+      </p:sp>
+      <p:sp>
+        <p:nvSpPr>
+          <p:cNvPr id="34" name="Text 32"/>
+          <p:cNvSpPr/>
+          <p:nvPr/>
+        </p:nvSpPr>
+        <p:spPr>
+          <a:xfrm>
+            <a:off x="2124837" y="4169664"/>
+            <a:ext cx="685800" cy="475488"/>
+          </a:xfrm>
+          <a:prstGeom prst="rect">
+            <a:avLst/>
+          </a:prstGeom>
+          <a:noFill/>
+          <a:ln/>
+        </p:spPr>
+        <p:txBody>
+          <a:bodyPr wrap="square" lIns="0" tIns="0" rIns="0" bIns="0" rtlCol="0" anchor="ctr"/>
+          <a:lstStyle/>
+          <a:p>
+            <a:pPr algn="ctr" indent="0" marL="0">
+              <a:buNone/>
+            </a:pPr>
+            <a:r>
+              <a:rPr lang="en-US" sz="900" b="1" dirty="0">
+                <a:solidFill>
+                  <a:srgbClr val="9D174D"/>
                 </a:solidFill>
                 <a:latin typeface="Trebuchet MS" pitchFamily="34" charset="0"/>
                 <a:ea typeface="Trebuchet MS" pitchFamily="34" charset="-122"/>
                 <a:cs typeface="Trebuchet MS" pitchFamily="34" charset="-120"/>
               </a:rPr>
-              <a:t>non</a:t>
-            </a:r>
-            <a:endParaRPr lang="en-US" sz="1400" dirty="0"/>
-          </a:p>
-        </p:txBody>
-      </p:sp>
-      <p:sp>
-        <p:nvSpPr>
-          <p:cNvPr id="30" name="Text 28"/>
-          <p:cNvSpPr/>
-          <p:nvPr/>
-        </p:nvSpPr>
-        <p:spPr>
-          <a:xfrm>
-            <a:off x="3959352" y="3364992"/>
-            <a:ext cx="411480" cy="475488"/>
-          </a:xfrm>
-          <a:prstGeom prst="rect">
-            <a:avLst/>
-          </a:prstGeom>
-          <a:noFill/>
-          <a:ln/>
-        </p:spPr>
-        <p:txBody>
-          <a:bodyPr wrap="square" lIns="0" tIns="0" rIns="0" bIns="0" rtlCol="0" anchor="ctr"/>
-          <a:lstStyle/>
-          <a:p>
-            <a:pPr algn="ctr" indent="0" marL="0">
-              <a:buNone/>
-            </a:pPr>
-            <a:r>
-              <a:rPr lang="en-US" sz="1600" b="1" dirty="0">
-                <a:solidFill>
-                  <a:srgbClr val="0D9488"/>
+              <a:t>n</a:t>
+            </a:r>
+            <a:endParaRPr lang="en-US" sz="900" dirty="0"/>
+          </a:p>
+        </p:txBody>
+      </p:sp>
+      <p:sp>
+        <p:nvSpPr>
+          <p:cNvPr id="35" name="Shape 33"/>
+          <p:cNvSpPr/>
+          <p:nvPr/>
+        </p:nvSpPr>
+        <p:spPr>
+          <a:xfrm>
+            <a:off x="3033522" y="4169664"/>
+            <a:ext cx="685800" cy="475488"/>
+          </a:xfrm>
+          <a:prstGeom prst="rect">
+            <a:avLst>
+              <a:gd name="adj" fmla="val 7692"/>
+            </a:avLst>
+          </a:prstGeom>
+          <a:solidFill>
+            <a:srgbClr val="FFFFFF"/>
+          </a:solidFill>
+          <a:ln w="12700">
+            <a:solidFill>
+              <a:srgbClr val="DB2777"/>
+            </a:solidFill>
+            <a:prstDash val="solid"/>
+          </a:ln>
+        </p:spPr>
+      </p:sp>
+      <p:sp>
+        <p:nvSpPr>
+          <p:cNvPr id="36" name="Text 34"/>
+          <p:cNvSpPr/>
+          <p:nvPr/>
+        </p:nvSpPr>
+        <p:spPr>
+          <a:xfrm>
+            <a:off x="3033522" y="4169664"/>
+            <a:ext cx="685800" cy="475488"/>
+          </a:xfrm>
+          <a:prstGeom prst="rect">
+            <a:avLst/>
+          </a:prstGeom>
+          <a:noFill/>
+          <a:ln/>
+        </p:spPr>
+        <p:txBody>
+          <a:bodyPr wrap="square" lIns="0" tIns="0" rIns="0" bIns="0" rtlCol="0" anchor="ctr"/>
+          <a:lstStyle/>
+          <a:p>
+            <a:pPr algn="ctr" indent="0" marL="0">
+              <a:buNone/>
+            </a:pPr>
+            <a:r>
+              <a:rPr lang="en-US" sz="900" b="1" dirty="0">
+                <a:solidFill>
+                  <a:srgbClr val="9D174D"/>
                 </a:solidFill>
                 <a:latin typeface="Trebuchet MS" pitchFamily="34" charset="0"/>
                 <a:ea typeface="Trebuchet MS" pitchFamily="34" charset="-122"/>
                 <a:cs typeface="Trebuchet MS" pitchFamily="34" charset="-120"/>
               </a:rPr>
-              <a:t>·</a:t>
-            </a:r>
-            <a:endParaRPr lang="en-US" sz="1600" dirty="0"/>
-          </a:p>
-        </p:txBody>
-      </p:sp>
-      <p:sp>
-        <p:nvSpPr>
-          <p:cNvPr id="31" name="Shape 29"/>
-          <p:cNvSpPr/>
-          <p:nvPr/>
-        </p:nvSpPr>
-        <p:spPr>
-          <a:xfrm>
-            <a:off x="4370832" y="3364992"/>
-            <a:ext cx="1645920" cy="475488"/>
+              <a:t>o</a:t>
+            </a:r>
+            <a:endParaRPr lang="en-US" sz="900" dirty="0"/>
+          </a:p>
+        </p:txBody>
+      </p:sp>
+      <p:sp>
+        <p:nvSpPr>
+          <p:cNvPr id="37" name="Shape 35"/>
+          <p:cNvSpPr/>
+          <p:nvPr/>
+        </p:nvSpPr>
+        <p:spPr>
+          <a:xfrm>
+            <a:off x="3942207" y="4169664"/>
+            <a:ext cx="685800" cy="475488"/>
           </a:xfrm>
           <a:prstGeom prst="rect">
             <a:avLst>
-              <a:gd name="adj" fmla="val 9615"/>
+              <a:gd name="adj" fmla="val 7692"/>
             </a:avLst>
           </a:prstGeom>
           <a:solidFill>
@@ -10740,104 +10590,131 @@
           </a:solidFill>
           <a:ln w="12700">
             <a:solidFill>
-              <a:srgbClr val="0D9488"/>
-            </a:solidFill>
-            <a:prstDash val="solid"/>
-          </a:ln>
-        </p:spPr>
-      </p:sp>
-      <p:sp>
-        <p:nvSpPr>
-          <p:cNvPr id="32" name="Text 30"/>
-          <p:cNvSpPr/>
-          <p:nvPr/>
-        </p:nvSpPr>
-        <p:spPr>
-          <a:xfrm>
-            <a:off x="4370832" y="3364992"/>
-            <a:ext cx="1645920" cy="475488"/>
-          </a:xfrm>
-          <a:prstGeom prst="rect">
-            <a:avLst/>
-          </a:prstGeom>
-          <a:noFill/>
-          <a:ln/>
-        </p:spPr>
-        <p:txBody>
-          <a:bodyPr wrap="square" lIns="0" tIns="0" rIns="0" bIns="0" rtlCol="0" anchor="ctr"/>
-          <a:lstStyle/>
-          <a:p>
-            <a:pPr algn="ctr" indent="0" marL="0">
-              <a:buNone/>
-            </a:pPr>
-            <a:r>
-              <a:rPr lang="en-US" sz="1400" b="1" dirty="0">
-                <a:solidFill>
-                  <a:srgbClr val="0D9488"/>
+              <a:srgbClr val="DB2777"/>
+            </a:solidFill>
+            <a:prstDash val="solid"/>
+          </a:ln>
+        </p:spPr>
+      </p:sp>
+      <p:sp>
+        <p:nvSpPr>
+          <p:cNvPr id="38" name="Text 36"/>
+          <p:cNvSpPr/>
+          <p:nvPr/>
+        </p:nvSpPr>
+        <p:spPr>
+          <a:xfrm>
+            <a:off x="3942207" y="4169664"/>
+            <a:ext cx="685800" cy="475488"/>
+          </a:xfrm>
+          <a:prstGeom prst="rect">
+            <a:avLst/>
+          </a:prstGeom>
+          <a:noFill/>
+          <a:ln/>
+        </p:spPr>
+        <p:txBody>
+          <a:bodyPr wrap="square" lIns="0" tIns="0" rIns="0" bIns="0" rtlCol="0" anchor="ctr"/>
+          <a:lstStyle/>
+          <a:p>
+            <a:pPr algn="ctr" indent="0" marL="0">
+              <a:buNone/>
+            </a:pPr>
+            <a:r>
+              <a:rPr lang="en-US" sz="900" b="1" dirty="0">
+                <a:solidFill>
+                  <a:srgbClr val="9D174D"/>
                 </a:solidFill>
                 <a:latin typeface="Trebuchet MS" pitchFamily="34" charset="0"/>
                 <a:ea typeface="Trebuchet MS" pitchFamily="34" charset="-122"/>
                 <a:cs typeface="Trebuchet MS" pitchFamily="34" charset="-120"/>
               </a:rPr>
-              <a:t>fic</a:t>
-            </a:r>
-            <a:endParaRPr lang="en-US" sz="1400" dirty="0"/>
-          </a:p>
-        </p:txBody>
-      </p:sp>
-      <p:sp>
-        <p:nvSpPr>
-          <p:cNvPr id="33" name="Text 31"/>
-          <p:cNvSpPr/>
-          <p:nvPr/>
-        </p:nvSpPr>
-        <p:spPr>
-          <a:xfrm>
-            <a:off x="6016752" y="3364992"/>
-            <a:ext cx="411480" cy="475488"/>
-          </a:xfrm>
-          <a:prstGeom prst="rect">
-            <a:avLst/>
-          </a:prstGeom>
-          <a:noFill/>
-          <a:ln/>
-        </p:spPr>
-        <p:txBody>
-          <a:bodyPr wrap="square" lIns="0" tIns="0" rIns="0" bIns="0" rtlCol="0" anchor="ctr"/>
-          <a:lstStyle/>
-          <a:p>
-            <a:pPr algn="ctr" indent="0" marL="0">
-              <a:buNone/>
-            </a:pPr>
-            <a:r>
-              <a:rPr lang="en-US" sz="1600" b="1" dirty="0">
-                <a:solidFill>
-                  <a:srgbClr val="0D9488"/>
+              <a:t>n</a:t>
+            </a:r>
+            <a:endParaRPr lang="en-US" sz="900" dirty="0"/>
+          </a:p>
+        </p:txBody>
+      </p:sp>
+      <p:sp>
+        <p:nvSpPr>
+          <p:cNvPr id="39" name="Shape 37"/>
+          <p:cNvSpPr/>
+          <p:nvPr/>
+        </p:nvSpPr>
+        <p:spPr>
+          <a:xfrm>
+            <a:off x="4850892" y="4169664"/>
+            <a:ext cx="685800" cy="475488"/>
+          </a:xfrm>
+          <a:prstGeom prst="rect">
+            <a:avLst>
+              <a:gd name="adj" fmla="val 7692"/>
+            </a:avLst>
+          </a:prstGeom>
+          <a:solidFill>
+            <a:srgbClr val="FFFFFF"/>
+          </a:solidFill>
+          <a:ln w="12700">
+            <a:solidFill>
+              <a:srgbClr val="DB2777"/>
+            </a:solidFill>
+            <a:prstDash val="solid"/>
+          </a:ln>
+        </p:spPr>
+      </p:sp>
+      <p:sp>
+        <p:nvSpPr>
+          <p:cNvPr id="40" name="Text 38"/>
+          <p:cNvSpPr/>
+          <p:nvPr/>
+        </p:nvSpPr>
+        <p:spPr>
+          <a:xfrm>
+            <a:off x="4850892" y="4169664"/>
+            <a:ext cx="685800" cy="475488"/>
+          </a:xfrm>
+          <a:prstGeom prst="rect">
+            <a:avLst/>
+          </a:prstGeom>
+          <a:noFill/>
+          <a:ln/>
+        </p:spPr>
+        <p:txBody>
+          <a:bodyPr wrap="square" lIns="0" tIns="0" rIns="0" bIns="0" rtlCol="0" anchor="ctr"/>
+          <a:lstStyle/>
+          <a:p>
+            <a:pPr algn="ctr" indent="0" marL="0">
+              <a:buNone/>
+            </a:pPr>
+            <a:r>
+              <a:rPr lang="en-US" sz="900" b="1" dirty="0">
+                <a:solidFill>
+                  <a:srgbClr val="9D174D"/>
                 </a:solidFill>
                 <a:latin typeface="Trebuchet MS" pitchFamily="34" charset="0"/>
                 <a:ea typeface="Trebuchet MS" pitchFamily="34" charset="-122"/>
                 <a:cs typeface="Trebuchet MS" pitchFamily="34" charset="-120"/>
               </a:rPr>
-              <a:t>·</a:t>
-            </a:r>
-            <a:endParaRPr lang="en-US" sz="1600" dirty="0"/>
-          </a:p>
-        </p:txBody>
-      </p:sp>
-      <p:sp>
-        <p:nvSpPr>
-          <p:cNvPr id="34" name="Shape 32"/>
-          <p:cNvSpPr/>
-          <p:nvPr/>
-        </p:nvSpPr>
-        <p:spPr>
-          <a:xfrm>
-            <a:off x="6428232" y="3364992"/>
-            <a:ext cx="1645920" cy="475488"/>
+              <a:t>s</a:t>
+            </a:r>
+            <a:endParaRPr lang="en-US" sz="900" dirty="0"/>
+          </a:p>
+        </p:txBody>
+      </p:sp>
+      <p:sp>
+        <p:nvSpPr>
+          <p:cNvPr id="41" name="Shape 39"/>
+          <p:cNvSpPr/>
+          <p:nvPr/>
+        </p:nvSpPr>
+        <p:spPr>
+          <a:xfrm>
+            <a:off x="5759577" y="4169664"/>
+            <a:ext cx="685800" cy="475488"/>
           </a:xfrm>
           <a:prstGeom prst="rect">
             <a:avLst>
-              <a:gd name="adj" fmla="val 9615"/>
+              <a:gd name="adj" fmla="val 7692"/>
             </a:avLst>
           </a:prstGeom>
           <a:solidFill>
@@ -10845,135 +10722,135 @@
           </a:solidFill>
           <a:ln w="12700">
             <a:solidFill>
-              <a:srgbClr val="0D9488"/>
-            </a:solidFill>
-            <a:prstDash val="solid"/>
-          </a:ln>
-        </p:spPr>
-      </p:sp>
-      <p:sp>
-        <p:nvSpPr>
-          <p:cNvPr id="35" name="Text 33"/>
-          <p:cNvSpPr/>
-          <p:nvPr/>
-        </p:nvSpPr>
-        <p:spPr>
-          <a:xfrm>
-            <a:off x="6428232" y="3364992"/>
-            <a:ext cx="1645920" cy="475488"/>
-          </a:xfrm>
-          <a:prstGeom prst="rect">
-            <a:avLst/>
-          </a:prstGeom>
-          <a:noFill/>
-          <a:ln/>
-        </p:spPr>
-        <p:txBody>
-          <a:bodyPr wrap="square" lIns="0" tIns="0" rIns="0" bIns="0" rtlCol="0" anchor="ctr"/>
-          <a:lstStyle/>
-          <a:p>
-            <a:pPr algn="ctr" indent="0" marL="0">
-              <a:buNone/>
-            </a:pPr>
-            <a:r>
-              <a:rPr lang="en-US" sz="1400" b="1" dirty="0">
-                <a:solidFill>
-                  <a:srgbClr val="0D9488"/>
+              <a:srgbClr val="DB2777"/>
+            </a:solidFill>
+            <a:prstDash val="solid"/>
+          </a:ln>
+        </p:spPr>
+      </p:sp>
+      <p:sp>
+        <p:nvSpPr>
+          <p:cNvPr id="42" name="Text 40"/>
+          <p:cNvSpPr/>
+          <p:nvPr/>
+        </p:nvSpPr>
+        <p:spPr>
+          <a:xfrm>
+            <a:off x="5759577" y="4169664"/>
+            <a:ext cx="685800" cy="475488"/>
+          </a:xfrm>
+          <a:prstGeom prst="rect">
+            <a:avLst/>
+          </a:prstGeom>
+          <a:noFill/>
+          <a:ln/>
+        </p:spPr>
+        <p:txBody>
+          <a:bodyPr wrap="square" lIns="0" tIns="0" rIns="0" bIns="0" rtlCol="0" anchor="ctr"/>
+          <a:lstStyle/>
+          <a:p>
+            <a:pPr algn="ctr" indent="0" marL="0">
+              <a:buNone/>
+            </a:pPr>
+            <a:r>
+              <a:rPr lang="en-US" sz="900" b="1" dirty="0">
+                <a:solidFill>
+                  <a:srgbClr val="9D174D"/>
                 </a:solidFill>
                 <a:latin typeface="Trebuchet MS" pitchFamily="34" charset="0"/>
                 <a:ea typeface="Trebuchet MS" pitchFamily="34" charset="-122"/>
                 <a:cs typeface="Trebuchet MS" pitchFamily="34" charset="-120"/>
               </a:rPr>
-              <a:t>tion</a:t>
-            </a:r>
-            <a:endParaRPr lang="en-US" sz="1400" dirty="0"/>
-          </a:p>
-        </p:txBody>
-      </p:sp>
-      <p:sp>
-        <p:nvSpPr>
-          <p:cNvPr id="36" name="Shape 34"/>
-          <p:cNvSpPr/>
-          <p:nvPr/>
-        </p:nvSpPr>
-        <p:spPr>
-          <a:xfrm>
-            <a:off x="365760" y="4096512"/>
-            <a:ext cx="1371600" cy="804672"/>
+              <a:t>t</a:t>
+            </a:r>
+            <a:endParaRPr lang="en-US" sz="900" dirty="0"/>
+          </a:p>
+        </p:txBody>
+      </p:sp>
+      <p:sp>
+        <p:nvSpPr>
+          <p:cNvPr id="43" name="Shape 41"/>
+          <p:cNvSpPr/>
+          <p:nvPr/>
+        </p:nvSpPr>
+        <p:spPr>
+          <a:xfrm>
+            <a:off x="6668262" y="4169664"/>
+            <a:ext cx="685800" cy="475488"/>
           </a:xfrm>
           <a:prstGeom prst="rect">
             <a:avLst>
-              <a:gd name="adj" fmla="val 6818"/>
+              <a:gd name="adj" fmla="val 7692"/>
             </a:avLst>
           </a:prstGeom>
           <a:solidFill>
-            <a:srgbClr val="E2E8F0"/>
-          </a:solidFill>
-          <a:ln w="12700">
-            <a:solidFill>
-              <a:srgbClr val="E2E8F0"/>
-            </a:solidFill>
-            <a:prstDash val="solid"/>
-          </a:ln>
-        </p:spPr>
-      </p:sp>
-      <p:sp>
-        <p:nvSpPr>
-          <p:cNvPr id="37" name="Text 35"/>
-          <p:cNvSpPr/>
-          <p:nvPr/>
-        </p:nvSpPr>
-        <p:spPr>
-          <a:xfrm>
-            <a:off x="365760" y="4096512"/>
-            <a:ext cx="1371600" cy="804672"/>
-          </a:xfrm>
-          <a:prstGeom prst="rect">
-            <a:avLst/>
-          </a:prstGeom>
-          <a:noFill/>
-          <a:ln/>
-        </p:spPr>
-        <p:txBody>
-          <a:bodyPr wrap="square" lIns="0" tIns="0" rIns="0" bIns="0" rtlCol="0" anchor="ctr"/>
-          <a:lstStyle/>
-          <a:p>
-            <a:pPr algn="ctr" indent="0" marL="0">
-              <a:buNone/>
-            </a:pPr>
-            <a:r>
-              <a:rPr lang="en-US" sz="1100" b="1" dirty="0">
-                <a:solidFill>
-                  <a:srgbClr val="475569"/>
+            <a:srgbClr val="FFFFFF"/>
+          </a:solidFill>
+          <a:ln w="12700">
+            <a:solidFill>
+              <a:srgbClr val="DB2777"/>
+            </a:solidFill>
+            <a:prstDash val="solid"/>
+          </a:ln>
+        </p:spPr>
+      </p:sp>
+      <p:sp>
+        <p:nvSpPr>
+          <p:cNvPr id="44" name="Text 42"/>
+          <p:cNvSpPr/>
+          <p:nvPr/>
+        </p:nvSpPr>
+        <p:spPr>
+          <a:xfrm>
+            <a:off x="6668262" y="4169664"/>
+            <a:ext cx="685800" cy="475488"/>
+          </a:xfrm>
+          <a:prstGeom prst="rect">
+            <a:avLst/>
+          </a:prstGeom>
+          <a:noFill/>
+          <a:ln/>
+        </p:spPr>
+        <p:txBody>
+          <a:bodyPr wrap="square" lIns="0" tIns="0" rIns="0" bIns="0" rtlCol="0" anchor="ctr"/>
+          <a:lstStyle/>
+          <a:p>
+            <a:pPr algn="ctr" indent="0" marL="0">
+              <a:buNone/>
+            </a:pPr>
+            <a:r>
+              <a:rPr lang="en-US" sz="900" b="1" dirty="0">
+                <a:solidFill>
+                  <a:srgbClr val="9D174D"/>
                 </a:solidFill>
                 <a:latin typeface="Trebuchet MS" pitchFamily="34" charset="0"/>
                 <a:ea typeface="Trebuchet MS" pitchFamily="34" charset="-122"/>
                 <a:cs typeface="Trebuchet MS" pitchFamily="34" charset="-120"/>
               </a:rPr>
-              <a:t>Phonemes</a:t>
-            </a:r>
-            <a:endParaRPr lang="en-US" sz="1100" dirty="0"/>
-          </a:p>
-        </p:txBody>
-      </p:sp>
-      <p:sp>
-        <p:nvSpPr>
-          <p:cNvPr id="38" name="Shape 36"/>
-          <p:cNvSpPr/>
-          <p:nvPr/>
-        </p:nvSpPr>
-        <p:spPr>
-          <a:xfrm>
-            <a:off x="1874520" y="4096512"/>
-            <a:ext cx="6903720" cy="804672"/>
+              <a:t>o</a:t>
+            </a:r>
+            <a:endParaRPr lang="en-US" sz="900" dirty="0"/>
+          </a:p>
+        </p:txBody>
+      </p:sp>
+      <p:sp>
+        <p:nvSpPr>
+          <p:cNvPr id="45" name="Shape 43"/>
+          <p:cNvSpPr/>
+          <p:nvPr/>
+        </p:nvSpPr>
+        <p:spPr>
+          <a:xfrm>
+            <a:off x="7576947" y="4169664"/>
+            <a:ext cx="685800" cy="475488"/>
           </a:xfrm>
           <a:prstGeom prst="rect">
             <a:avLst>
-              <a:gd name="adj" fmla="val 6818"/>
+              <a:gd name="adj" fmla="val 7692"/>
             </a:avLst>
           </a:prstGeom>
           <a:solidFill>
-            <a:srgbClr val="FCE7F3"/>
+            <a:srgbClr val="FFFFFF"/>
           </a:solidFill>
           <a:ln w="12700">
             <a:solidFill>
@@ -10985,41 +10862,14 @@
       </p:sp>
       <p:sp>
         <p:nvSpPr>
-          <p:cNvPr id="39" name="Shape 37"/>
-          <p:cNvSpPr/>
-          <p:nvPr/>
-        </p:nvSpPr>
-        <p:spPr>
-          <a:xfrm>
-            <a:off x="2023872" y="4169664"/>
-            <a:ext cx="685800" cy="384048"/>
-          </a:xfrm>
-          <a:prstGeom prst="rect">
-            <a:avLst>
-              <a:gd name="adj" fmla="val 9524"/>
-            </a:avLst>
-          </a:prstGeom>
-          <a:solidFill>
-            <a:srgbClr val="FFFFFF"/>
-          </a:solidFill>
-          <a:ln w="12700">
-            <a:solidFill>
-              <a:srgbClr val="DB2777"/>
-            </a:solidFill>
-            <a:prstDash val="solid"/>
-          </a:ln>
-        </p:spPr>
-      </p:sp>
-      <p:sp>
-        <p:nvSpPr>
-          <p:cNvPr id="40" name="Text 38"/>
-          <p:cNvSpPr/>
-          <p:nvPr/>
-        </p:nvSpPr>
-        <p:spPr>
-          <a:xfrm>
-            <a:off x="2023872" y="4169664"/>
-            <a:ext cx="685800" cy="384048"/>
+          <p:cNvPr id="46" name="Text 44"/>
+          <p:cNvSpPr/>
+          <p:nvPr/>
+        </p:nvSpPr>
+        <p:spPr>
+          <a:xfrm>
+            <a:off x="7576947" y="4169664"/>
+            <a:ext cx="685800" cy="475488"/>
           </a:xfrm>
           <a:prstGeom prst="rect">
             <a:avLst/>
@@ -11043,510 +10893,9 @@
                 <a:ea typeface="Trebuchet MS" pitchFamily="34" charset="-122"/>
                 <a:cs typeface="Trebuchet MS" pitchFamily="34" charset="-120"/>
               </a:rPr>
-              <a:t>n</a:t>
+              <a:t>p</a:t>
             </a:r>
             <a:endParaRPr lang="en-US" sz="900" dirty="0"/>
-          </a:p>
-        </p:txBody>
-      </p:sp>
-      <p:sp>
-        <p:nvSpPr>
-          <p:cNvPr id="41" name="Shape 39"/>
-          <p:cNvSpPr/>
-          <p:nvPr/>
-        </p:nvSpPr>
-        <p:spPr>
-          <a:xfrm>
-            <a:off x="2831592" y="4169664"/>
-            <a:ext cx="685800" cy="384048"/>
-          </a:xfrm>
-          <a:prstGeom prst="rect">
-            <a:avLst>
-              <a:gd name="adj" fmla="val 9524"/>
-            </a:avLst>
-          </a:prstGeom>
-          <a:solidFill>
-            <a:srgbClr val="FFFFFF"/>
-          </a:solidFill>
-          <a:ln w="12700">
-            <a:solidFill>
-              <a:srgbClr val="DB2777"/>
-            </a:solidFill>
-            <a:prstDash val="solid"/>
-          </a:ln>
-        </p:spPr>
-      </p:sp>
-      <p:sp>
-        <p:nvSpPr>
-          <p:cNvPr id="42" name="Text 40"/>
-          <p:cNvSpPr/>
-          <p:nvPr/>
-        </p:nvSpPr>
-        <p:spPr>
-          <a:xfrm>
-            <a:off x="2831592" y="4169664"/>
-            <a:ext cx="685800" cy="384048"/>
-          </a:xfrm>
-          <a:prstGeom prst="rect">
-            <a:avLst/>
-          </a:prstGeom>
-          <a:noFill/>
-          <a:ln/>
-        </p:spPr>
-        <p:txBody>
-          <a:bodyPr wrap="square" lIns="0" tIns="0" rIns="0" bIns="0" rtlCol="0" anchor="ctr"/>
-          <a:lstStyle/>
-          <a:p>
-            <a:pPr algn="ctr" indent="0" marL="0">
-              <a:buNone/>
-            </a:pPr>
-            <a:r>
-              <a:rPr lang="en-US" sz="900" b="1" dirty="0">
-                <a:solidFill>
-                  <a:srgbClr val="9D174D"/>
-                </a:solidFill>
-                <a:latin typeface="Trebuchet MS" pitchFamily="34" charset="0"/>
-                <a:ea typeface="Trebuchet MS" pitchFamily="34" charset="-122"/>
-                <a:cs typeface="Trebuchet MS" pitchFamily="34" charset="-120"/>
-              </a:rPr>
-              <a:t>o</a:t>
-            </a:r>
-            <a:endParaRPr lang="en-US" sz="900" dirty="0"/>
-          </a:p>
-        </p:txBody>
-      </p:sp>
-      <p:sp>
-        <p:nvSpPr>
-          <p:cNvPr id="43" name="Shape 41"/>
-          <p:cNvSpPr/>
-          <p:nvPr/>
-        </p:nvSpPr>
-        <p:spPr>
-          <a:xfrm>
-            <a:off x="3639312" y="4169664"/>
-            <a:ext cx="685800" cy="384048"/>
-          </a:xfrm>
-          <a:prstGeom prst="rect">
-            <a:avLst>
-              <a:gd name="adj" fmla="val 9524"/>
-            </a:avLst>
-          </a:prstGeom>
-          <a:solidFill>
-            <a:srgbClr val="FFFFFF"/>
-          </a:solidFill>
-          <a:ln w="12700">
-            <a:solidFill>
-              <a:srgbClr val="DB2777"/>
-            </a:solidFill>
-            <a:prstDash val="solid"/>
-          </a:ln>
-        </p:spPr>
-      </p:sp>
-      <p:sp>
-        <p:nvSpPr>
-          <p:cNvPr id="44" name="Text 42"/>
-          <p:cNvSpPr/>
-          <p:nvPr/>
-        </p:nvSpPr>
-        <p:spPr>
-          <a:xfrm>
-            <a:off x="3639312" y="4169664"/>
-            <a:ext cx="685800" cy="384048"/>
-          </a:xfrm>
-          <a:prstGeom prst="rect">
-            <a:avLst/>
-          </a:prstGeom>
-          <a:noFill/>
-          <a:ln/>
-        </p:spPr>
-        <p:txBody>
-          <a:bodyPr wrap="square" lIns="0" tIns="0" rIns="0" bIns="0" rtlCol="0" anchor="ctr"/>
-          <a:lstStyle/>
-          <a:p>
-            <a:pPr algn="ctr" indent="0" marL="0">
-              <a:buNone/>
-            </a:pPr>
-            <a:r>
-              <a:rPr lang="en-US" sz="900" b="1" dirty="0">
-                <a:solidFill>
-                  <a:srgbClr val="9D174D"/>
-                </a:solidFill>
-                <a:latin typeface="Trebuchet MS" pitchFamily="34" charset="0"/>
-                <a:ea typeface="Trebuchet MS" pitchFamily="34" charset="-122"/>
-                <a:cs typeface="Trebuchet MS" pitchFamily="34" charset="-120"/>
-              </a:rPr>
-              <a:t>n</a:t>
-            </a:r>
-            <a:endParaRPr lang="en-US" sz="900" dirty="0"/>
-          </a:p>
-        </p:txBody>
-      </p:sp>
-      <p:sp>
-        <p:nvSpPr>
-          <p:cNvPr id="45" name="Shape 43"/>
-          <p:cNvSpPr/>
-          <p:nvPr/>
-        </p:nvSpPr>
-        <p:spPr>
-          <a:xfrm>
-            <a:off x="4447032" y="4169664"/>
-            <a:ext cx="685800" cy="384048"/>
-          </a:xfrm>
-          <a:prstGeom prst="rect">
-            <a:avLst>
-              <a:gd name="adj" fmla="val 9524"/>
-            </a:avLst>
-          </a:prstGeom>
-          <a:solidFill>
-            <a:srgbClr val="FFFFFF"/>
-          </a:solidFill>
-          <a:ln w="12700">
-            <a:solidFill>
-              <a:srgbClr val="DB2777"/>
-            </a:solidFill>
-            <a:prstDash val="solid"/>
-          </a:ln>
-        </p:spPr>
-      </p:sp>
-      <p:sp>
-        <p:nvSpPr>
-          <p:cNvPr id="46" name="Text 44"/>
-          <p:cNvSpPr/>
-          <p:nvPr/>
-        </p:nvSpPr>
-        <p:spPr>
-          <a:xfrm>
-            <a:off x="4447032" y="4169664"/>
-            <a:ext cx="685800" cy="384048"/>
-          </a:xfrm>
-          <a:prstGeom prst="rect">
-            <a:avLst/>
-          </a:prstGeom>
-          <a:noFill/>
-          <a:ln/>
-        </p:spPr>
-        <p:txBody>
-          <a:bodyPr wrap="square" lIns="0" tIns="0" rIns="0" bIns="0" rtlCol="0" anchor="ctr"/>
-          <a:lstStyle/>
-          <a:p>
-            <a:pPr algn="ctr" indent="0" marL="0">
-              <a:buNone/>
-            </a:pPr>
-            <a:r>
-              <a:rPr lang="en-US" sz="900" b="1" dirty="0">
-                <a:solidFill>
-                  <a:srgbClr val="9D174D"/>
-                </a:solidFill>
-                <a:latin typeface="Trebuchet MS" pitchFamily="34" charset="0"/>
-                <a:ea typeface="Trebuchet MS" pitchFamily="34" charset="-122"/>
-                <a:cs typeface="Trebuchet MS" pitchFamily="34" charset="-120"/>
-              </a:rPr>
-              <a:t>f</a:t>
-            </a:r>
-            <a:endParaRPr lang="en-US" sz="900" dirty="0"/>
-          </a:p>
-        </p:txBody>
-      </p:sp>
-      <p:sp>
-        <p:nvSpPr>
-          <p:cNvPr id="47" name="Shape 45"/>
-          <p:cNvSpPr/>
-          <p:nvPr/>
-        </p:nvSpPr>
-        <p:spPr>
-          <a:xfrm>
-            <a:off x="5254752" y="4169664"/>
-            <a:ext cx="685800" cy="384048"/>
-          </a:xfrm>
-          <a:prstGeom prst="rect">
-            <a:avLst>
-              <a:gd name="adj" fmla="val 9524"/>
-            </a:avLst>
-          </a:prstGeom>
-          <a:solidFill>
-            <a:srgbClr val="FFFFFF"/>
-          </a:solidFill>
-          <a:ln w="12700">
-            <a:solidFill>
-              <a:srgbClr val="DB2777"/>
-            </a:solidFill>
-            <a:prstDash val="solid"/>
-          </a:ln>
-        </p:spPr>
-      </p:sp>
-      <p:sp>
-        <p:nvSpPr>
-          <p:cNvPr id="48" name="Text 46"/>
-          <p:cNvSpPr/>
-          <p:nvPr/>
-        </p:nvSpPr>
-        <p:spPr>
-          <a:xfrm>
-            <a:off x="5254752" y="4169664"/>
-            <a:ext cx="685800" cy="384048"/>
-          </a:xfrm>
-          <a:prstGeom prst="rect">
-            <a:avLst/>
-          </a:prstGeom>
-          <a:noFill/>
-          <a:ln/>
-        </p:spPr>
-        <p:txBody>
-          <a:bodyPr wrap="square" lIns="0" tIns="0" rIns="0" bIns="0" rtlCol="0" anchor="ctr"/>
-          <a:lstStyle/>
-          <a:p>
-            <a:pPr algn="ctr" indent="0" marL="0">
-              <a:buNone/>
-            </a:pPr>
-            <a:r>
-              <a:rPr lang="en-US" sz="900" b="1" dirty="0">
-                <a:solidFill>
-                  <a:srgbClr val="9D174D"/>
-                </a:solidFill>
-                <a:latin typeface="Trebuchet MS" pitchFamily="34" charset="0"/>
-                <a:ea typeface="Trebuchet MS" pitchFamily="34" charset="-122"/>
-                <a:cs typeface="Trebuchet MS" pitchFamily="34" charset="-120"/>
-              </a:rPr>
-              <a:t>i</a:t>
-            </a:r>
-            <a:endParaRPr lang="en-US" sz="900" dirty="0"/>
-          </a:p>
-        </p:txBody>
-      </p:sp>
-      <p:sp>
-        <p:nvSpPr>
-          <p:cNvPr id="49" name="Shape 47"/>
-          <p:cNvSpPr/>
-          <p:nvPr/>
-        </p:nvSpPr>
-        <p:spPr>
-          <a:xfrm>
-            <a:off x="6062472" y="4169664"/>
-            <a:ext cx="685800" cy="384048"/>
-          </a:xfrm>
-          <a:prstGeom prst="rect">
-            <a:avLst>
-              <a:gd name="adj" fmla="val 9524"/>
-            </a:avLst>
-          </a:prstGeom>
-          <a:solidFill>
-            <a:srgbClr val="FFFFFF"/>
-          </a:solidFill>
-          <a:ln w="12700">
-            <a:solidFill>
-              <a:srgbClr val="DB2777"/>
-            </a:solidFill>
-            <a:prstDash val="solid"/>
-          </a:ln>
-        </p:spPr>
-      </p:sp>
-      <p:sp>
-        <p:nvSpPr>
-          <p:cNvPr id="50" name="Text 48"/>
-          <p:cNvSpPr/>
-          <p:nvPr/>
-        </p:nvSpPr>
-        <p:spPr>
-          <a:xfrm>
-            <a:off x="6062472" y="4169664"/>
-            <a:ext cx="685800" cy="384048"/>
-          </a:xfrm>
-          <a:prstGeom prst="rect">
-            <a:avLst/>
-          </a:prstGeom>
-          <a:noFill/>
-          <a:ln/>
-        </p:spPr>
-        <p:txBody>
-          <a:bodyPr wrap="square" lIns="0" tIns="0" rIns="0" bIns="0" rtlCol="0" anchor="ctr"/>
-          <a:lstStyle/>
-          <a:p>
-            <a:pPr algn="ctr" indent="0" marL="0">
-              <a:buNone/>
-            </a:pPr>
-            <a:r>
-              <a:rPr lang="en-US" sz="900" b="1" dirty="0">
-                <a:solidFill>
-                  <a:srgbClr val="9D174D"/>
-                </a:solidFill>
-                <a:latin typeface="Trebuchet MS" pitchFamily="34" charset="0"/>
-                <a:ea typeface="Trebuchet MS" pitchFamily="34" charset="-122"/>
-                <a:cs typeface="Trebuchet MS" pitchFamily="34" charset="-120"/>
-              </a:rPr>
-              <a:t>c</a:t>
-            </a:r>
-            <a:endParaRPr lang="en-US" sz="900" dirty="0"/>
-          </a:p>
-        </p:txBody>
-      </p:sp>
-      <p:sp>
-        <p:nvSpPr>
-          <p:cNvPr id="51" name="Shape 49"/>
-          <p:cNvSpPr/>
-          <p:nvPr/>
-        </p:nvSpPr>
-        <p:spPr>
-          <a:xfrm>
-            <a:off x="6870192" y="4169664"/>
-            <a:ext cx="685800" cy="384048"/>
-          </a:xfrm>
-          <a:prstGeom prst="rect">
-            <a:avLst>
-              <a:gd name="adj" fmla="val 9524"/>
-            </a:avLst>
-          </a:prstGeom>
-          <a:solidFill>
-            <a:srgbClr val="FFFFFF"/>
-          </a:solidFill>
-          <a:ln w="12700">
-            <a:solidFill>
-              <a:srgbClr val="DB2777"/>
-            </a:solidFill>
-            <a:prstDash val="solid"/>
-          </a:ln>
-        </p:spPr>
-      </p:sp>
-      <p:sp>
-        <p:nvSpPr>
-          <p:cNvPr id="52" name="Text 50"/>
-          <p:cNvSpPr/>
-          <p:nvPr/>
-        </p:nvSpPr>
-        <p:spPr>
-          <a:xfrm>
-            <a:off x="6870192" y="4169664"/>
-            <a:ext cx="685800" cy="384048"/>
-          </a:xfrm>
-          <a:prstGeom prst="rect">
-            <a:avLst/>
-          </a:prstGeom>
-          <a:noFill/>
-          <a:ln/>
-        </p:spPr>
-        <p:txBody>
-          <a:bodyPr wrap="square" lIns="0" tIns="0" rIns="0" bIns="0" rtlCol="0" anchor="ctr"/>
-          <a:lstStyle/>
-          <a:p>
-            <a:pPr algn="ctr" indent="0" marL="0">
-              <a:buNone/>
-            </a:pPr>
-            <a:r>
-              <a:rPr lang="en-US" sz="900" b="1" dirty="0">
-                <a:solidFill>
-                  <a:srgbClr val="9D174D"/>
-                </a:solidFill>
-                <a:latin typeface="Trebuchet MS" pitchFamily="34" charset="0"/>
-                <a:ea typeface="Trebuchet MS" pitchFamily="34" charset="-122"/>
-                <a:cs typeface="Trebuchet MS" pitchFamily="34" charset="-120"/>
-              </a:rPr>
-              <a:t>t</a:t>
-            </a:r>
-            <a:endParaRPr lang="en-US" sz="900" dirty="0"/>
-          </a:p>
-        </p:txBody>
-      </p:sp>
-      <p:sp>
-        <p:nvSpPr>
-          <p:cNvPr id="53" name="Shape 51"/>
-          <p:cNvSpPr/>
-          <p:nvPr/>
-        </p:nvSpPr>
-        <p:spPr>
-          <a:xfrm>
-            <a:off x="7677912" y="4169664"/>
-            <a:ext cx="685800" cy="384048"/>
-          </a:xfrm>
-          <a:prstGeom prst="rect">
-            <a:avLst>
-              <a:gd name="adj" fmla="val 9524"/>
-            </a:avLst>
-          </a:prstGeom>
-          <a:solidFill>
-            <a:srgbClr val="FFFFFF"/>
-          </a:solidFill>
-          <a:ln w="12700">
-            <a:solidFill>
-              <a:srgbClr val="DB2777"/>
-            </a:solidFill>
-            <a:prstDash val="solid"/>
-          </a:ln>
-        </p:spPr>
-      </p:sp>
-      <p:sp>
-        <p:nvSpPr>
-          <p:cNvPr id="54" name="Text 52"/>
-          <p:cNvSpPr/>
-          <p:nvPr/>
-        </p:nvSpPr>
-        <p:spPr>
-          <a:xfrm>
-            <a:off x="7677912" y="4169664"/>
-            <a:ext cx="685800" cy="384048"/>
-          </a:xfrm>
-          <a:prstGeom prst="rect">
-            <a:avLst/>
-          </a:prstGeom>
-          <a:noFill/>
-          <a:ln/>
-        </p:spPr>
-        <p:txBody>
-          <a:bodyPr wrap="square" lIns="0" tIns="0" rIns="0" bIns="0" rtlCol="0" anchor="ctr"/>
-          <a:lstStyle/>
-          <a:p>
-            <a:pPr algn="ctr" indent="0" marL="0">
-              <a:buNone/>
-            </a:pPr>
-            <a:r>
-              <a:rPr lang="en-US" sz="900" b="1" dirty="0">
-                <a:solidFill>
-                  <a:srgbClr val="9D174D"/>
-                </a:solidFill>
-                <a:latin typeface="Trebuchet MS" pitchFamily="34" charset="0"/>
-                <a:ea typeface="Trebuchet MS" pitchFamily="34" charset="-122"/>
-                <a:cs typeface="Trebuchet MS" pitchFamily="34" charset="-120"/>
-              </a:rPr>
-              <a:t>ion</a:t>
-            </a:r>
-            <a:endParaRPr lang="en-US" sz="900" dirty="0"/>
-          </a:p>
-        </p:txBody>
-      </p:sp>
-      <p:sp>
-        <p:nvSpPr>
-          <p:cNvPr id="55" name="Text 53"/>
-          <p:cNvSpPr/>
-          <p:nvPr/>
-        </p:nvSpPr>
-        <p:spPr>
-          <a:xfrm>
-            <a:off x="7677912" y="4572000"/>
-            <a:ext cx="685800" cy="219456"/>
-          </a:xfrm>
-          <a:prstGeom prst="rect">
-            <a:avLst/>
-          </a:prstGeom>
-          <a:noFill/>
-          <a:ln/>
-        </p:spPr>
-        <p:txBody>
-          <a:bodyPr wrap="square" lIns="0" tIns="0" rIns="0" bIns="0" rtlCol="0" anchor="t"/>
-          <a:lstStyle/>
-          <a:p>
-            <a:pPr algn="ctr" indent="0" marL="0">
-              <a:buNone/>
-            </a:pPr>
-            <a:r>
-              <a:rPr lang="en-US" sz="750" i="1" dirty="0">
-                <a:solidFill>
-                  <a:srgbClr val="94A3B8"/>
-                </a:solidFill>
-                <a:latin typeface="Calibri" pitchFamily="34" charset="0"/>
-                <a:ea typeface="Calibri" pitchFamily="34" charset="-122"/>
-                <a:cs typeface="Calibri" pitchFamily="34" charset="-120"/>
-              </a:rPr>
-              <a:t>/shun/</a:t>
-            </a:r>
-            <a:endParaRPr lang="en-US" sz="750" dirty="0"/>
           </a:p>
         </p:txBody>
       </p:sp>
@@ -11975,7 +11324,7 @@
                 <a:ea typeface="Trebuchet MS" pitchFamily="34" charset="-122"/>
                 <a:cs typeface="Trebuchet MS" pitchFamily="34" charset="-120"/>
               </a:rPr>
-              <a:t>nonliving</a:t>
+              <a:t>nonverbal</a:t>
             </a:r>
             <a:endParaRPr lang="en-US" sz="2800" dirty="0"/>
           </a:p>
@@ -12802,7 +12151,7 @@
                 <a:ea typeface="Trebuchet MS" pitchFamily="34" charset="-122"/>
                 <a:cs typeface="Trebuchet MS" pitchFamily="34" charset="-120"/>
               </a:rPr>
-              <a:t>nonliving</a:t>
+              <a:t>nonverbal</a:t>
             </a:r>
             <a:endParaRPr lang="en-US" sz="2800" dirty="0"/>
           </a:p>
@@ -12980,7 +12329,7 @@
                 <a:ea typeface="Calibri" pitchFamily="34" charset="-122"/>
                 <a:cs typeface="Calibri" pitchFamily="34" charset="-120"/>
               </a:rPr>
-              <a:t>not</a:t>
+              <a:t>not, without</a:t>
             </a:r>
             <a:endParaRPr lang="en-US" sz="850" dirty="0"/>
           </a:p>
@@ -13053,7 +12402,7 @@
                 <a:ea typeface="Trebuchet MS" pitchFamily="34" charset="-122"/>
                 <a:cs typeface="Trebuchet MS" pitchFamily="34" charset="-120"/>
               </a:rPr>
-              <a:t>live</a:t>
+              <a:t>verb</a:t>
             </a:r>
             <a:endParaRPr lang="en-US" sz="1300" dirty="0"/>
           </a:p>
@@ -13092,7 +12441,7 @@
                 <a:ea typeface="Calibri" pitchFamily="34" charset="-122"/>
                 <a:cs typeface="Calibri" pitchFamily="34" charset="-120"/>
               </a:rPr>
-              <a:t>be alive</a:t>
+              <a:t>word, speech</a:t>
             </a:r>
             <a:endParaRPr lang="en-US" sz="850" dirty="0"/>
           </a:p>
@@ -13165,7 +12514,7 @@
                 <a:ea typeface="Trebuchet MS" pitchFamily="34" charset="-122"/>
                 <a:cs typeface="Trebuchet MS" pitchFamily="34" charset="-120"/>
               </a:rPr>
-              <a:t>ing</a:t>
+              <a:t>al</a:t>
             </a:r>
             <a:endParaRPr lang="en-US" sz="1300" dirty="0"/>
           </a:p>
@@ -13204,7 +12553,7 @@
                 <a:ea typeface="Calibri" pitchFamily="34" charset="-122"/>
                 <a:cs typeface="Calibri" pitchFamily="34" charset="-120"/>
               </a:rPr>
-              <a:t>ongoing state</a:t>
+              <a:t>relating to</a:t>
             </a:r>
             <a:endParaRPr lang="en-US" sz="850" dirty="0"/>
           </a:p>
@@ -13212,57 +12561,150 @@
       </p:sp>
       <p:sp>
         <p:nvSpPr>
-          <p:cNvPr id="25" name="Text 23"/>
-          <p:cNvSpPr/>
-          <p:nvPr/>
-        </p:nvSpPr>
-        <p:spPr>
-          <a:xfrm>
-            <a:off x="6519672" y="2752344"/>
-            <a:ext cx="1828800" cy="182880"/>
-          </a:xfrm>
-          <a:prstGeom prst="rect">
-            <a:avLst/>
-          </a:prstGeom>
-          <a:noFill/>
-          <a:ln/>
-        </p:spPr>
-        <p:txBody>
-          <a:bodyPr wrap="square" lIns="0" tIns="0" rIns="0" bIns="0" rtlCol="0" anchor="t"/>
-          <a:lstStyle/>
-          <a:p>
-            <a:pPr algn="ctr" indent="0" marL="0">
-              <a:buNone/>
-            </a:pPr>
-            <a:r>
-              <a:rPr lang="en-US" sz="700" i="1" dirty="0">
-                <a:solidFill>
-                  <a:srgbClr val="94A3B8"/>
+          <p:cNvPr id="25" name="Shape 23"/>
+          <p:cNvSpPr/>
+          <p:nvPr/>
+        </p:nvSpPr>
+        <p:spPr>
+          <a:xfrm>
+            <a:off x="365760" y="3273552"/>
+            <a:ext cx="1371600" cy="658368"/>
+          </a:xfrm>
+          <a:prstGeom prst="rect">
+            <a:avLst>
+              <a:gd name="adj" fmla="val 8333"/>
+            </a:avLst>
+          </a:prstGeom>
+          <a:solidFill>
+            <a:srgbClr val="E2E8F0"/>
+          </a:solidFill>
+          <a:ln w="12700">
+            <a:solidFill>
+              <a:srgbClr val="E2E8F0"/>
+            </a:solidFill>
+            <a:prstDash val="solid"/>
+          </a:ln>
+        </p:spPr>
+      </p:sp>
+      <p:sp>
+        <p:nvSpPr>
+          <p:cNvPr id="26" name="Text 24"/>
+          <p:cNvSpPr/>
+          <p:nvPr/>
+        </p:nvSpPr>
+        <p:spPr>
+          <a:xfrm>
+            <a:off x="365760" y="3273552"/>
+            <a:ext cx="1371600" cy="658368"/>
+          </a:xfrm>
+          <a:prstGeom prst="rect">
+            <a:avLst/>
+          </a:prstGeom>
+          <a:noFill/>
+          <a:ln/>
+        </p:spPr>
+        <p:txBody>
+          <a:bodyPr wrap="square" lIns="0" tIns="0" rIns="0" bIns="0" rtlCol="0" anchor="ctr"/>
+          <a:lstStyle/>
+          <a:p>
+            <a:pPr algn="ctr" indent="0" marL="0">
+              <a:buNone/>
+            </a:pPr>
+            <a:r>
+              <a:rPr lang="en-US" sz="1100" b="1" dirty="0">
+                <a:solidFill>
+                  <a:srgbClr val="475569"/>
+                </a:solidFill>
+                <a:latin typeface="Trebuchet MS" pitchFamily="34" charset="0"/>
+                <a:ea typeface="Trebuchet MS" pitchFamily="34" charset="-122"/>
+                <a:cs typeface="Trebuchet MS" pitchFamily="34" charset="-120"/>
+              </a:rPr>
+              <a:t>Syllables</a:t>
+            </a:r>
+            <a:endParaRPr lang="en-US" sz="1100" dirty="0"/>
+          </a:p>
+        </p:txBody>
+      </p:sp>
+      <p:sp>
+        <p:nvSpPr>
+          <p:cNvPr id="27" name="Shape 25"/>
+          <p:cNvSpPr/>
+          <p:nvPr/>
+        </p:nvSpPr>
+        <p:spPr>
+          <a:xfrm>
+            <a:off x="1874520" y="3273552"/>
+            <a:ext cx="6903720" cy="658368"/>
+          </a:xfrm>
+          <a:prstGeom prst="rect">
+            <a:avLst>
+              <a:gd name="adj" fmla="val 8333"/>
+            </a:avLst>
+          </a:prstGeom>
+          <a:solidFill>
+            <a:srgbClr val="F8FAFC"/>
+          </a:solidFill>
+          <a:ln w="12700">
+            <a:solidFill>
+              <a:srgbClr val="E2E8F0"/>
+            </a:solidFill>
+            <a:prstDash val="dash"/>
+          </a:ln>
+        </p:spPr>
+      </p:sp>
+      <p:sp>
+        <p:nvSpPr>
+          <p:cNvPr id="28" name="Text 26"/>
+          <p:cNvSpPr/>
+          <p:nvPr/>
+        </p:nvSpPr>
+        <p:spPr>
+          <a:xfrm>
+            <a:off x="1874520" y="3273552"/>
+            <a:ext cx="6903720" cy="658368"/>
+          </a:xfrm>
+          <a:prstGeom prst="rect">
+            <a:avLst/>
+          </a:prstGeom>
+          <a:noFill/>
+          <a:ln/>
+        </p:spPr>
+        <p:txBody>
+          <a:bodyPr wrap="square" rtlCol="0" anchor="ctr"/>
+          <a:lstStyle/>
+          <a:p>
+            <a:pPr algn="ctr" indent="0" marL="0">
+              <a:buNone/>
+            </a:pPr>
+            <a:r>
+              <a:rPr lang="en-US" sz="1100" i="1" dirty="0">
+                <a:solidFill>
+                  <a:srgbClr val="CBD5E1"/>
                 </a:solidFill>
                 <a:latin typeface="Calibri" pitchFamily="34" charset="0"/>
                 <a:ea typeface="Calibri" pitchFamily="34" charset="-122"/>
                 <a:cs typeface="Calibri" pitchFamily="34" charset="-120"/>
               </a:rPr>
-              <a:t>'e' dropped before vowel suffix</a:t>
-            </a:r>
-            <a:endParaRPr lang="en-US" sz="700" dirty="0"/>
-          </a:p>
-        </p:txBody>
-      </p:sp>
-      <p:sp>
-        <p:nvSpPr>
-          <p:cNvPr id="26" name="Shape 24"/>
-          <p:cNvSpPr/>
-          <p:nvPr/>
-        </p:nvSpPr>
-        <p:spPr>
-          <a:xfrm>
-            <a:off x="365760" y="3273552"/>
-            <a:ext cx="1371600" cy="658368"/>
+              <a:t>Write here...</a:t>
+            </a:r>
+            <a:endParaRPr lang="en-US" sz="1100" dirty="0"/>
+          </a:p>
+        </p:txBody>
+      </p:sp>
+      <p:sp>
+        <p:nvSpPr>
+          <p:cNvPr id="29" name="Shape 27"/>
+          <p:cNvSpPr/>
+          <p:nvPr/>
+        </p:nvSpPr>
+        <p:spPr>
+          <a:xfrm>
+            <a:off x="365760" y="4096512"/>
+            <a:ext cx="1371600" cy="804672"/>
           </a:xfrm>
           <a:prstGeom prst="rect">
             <a:avLst>
-              <a:gd name="adj" fmla="val 8333"/>
+              <a:gd name="adj" fmla="val 6818"/>
             </a:avLst>
           </a:prstGeom>
           <a:solidFill>
@@ -13278,14 +12720,14 @@
       </p:sp>
       <p:sp>
         <p:nvSpPr>
-          <p:cNvPr id="27" name="Text 25"/>
-          <p:cNvSpPr/>
-          <p:nvPr/>
-        </p:nvSpPr>
-        <p:spPr>
-          <a:xfrm>
-            <a:off x="365760" y="3273552"/>
-            <a:ext cx="1371600" cy="658368"/>
+          <p:cNvPr id="30" name="Text 28"/>
+          <p:cNvSpPr/>
+          <p:nvPr/>
+        </p:nvSpPr>
+        <p:spPr>
+          <a:xfrm>
+            <a:off x="365760" y="4096512"/>
+            <a:ext cx="1371600" cy="804672"/>
           </a:xfrm>
           <a:prstGeom prst="rect">
             <a:avLst/>
@@ -13309,7 +12751,7 @@
                 <a:ea typeface="Trebuchet MS" pitchFamily="34" charset="-122"/>
                 <a:cs typeface="Trebuchet MS" pitchFamily="34" charset="-120"/>
               </a:rPr>
-              <a:t>Syllables</a:t>
+              <a:t>Phonemes</a:t>
             </a:r>
             <a:endParaRPr lang="en-US" sz="1100" dirty="0"/>
           </a:p>
@@ -13317,80 +12759,14 @@
       </p:sp>
       <p:sp>
         <p:nvSpPr>
-          <p:cNvPr id="28" name="Shape 26"/>
-          <p:cNvSpPr/>
-          <p:nvPr/>
-        </p:nvSpPr>
-        <p:spPr>
-          <a:xfrm>
-            <a:off x="1874520" y="3273552"/>
-            <a:ext cx="6903720" cy="658368"/>
-          </a:xfrm>
-          <a:prstGeom prst="rect">
-            <a:avLst>
-              <a:gd name="adj" fmla="val 8333"/>
-            </a:avLst>
-          </a:prstGeom>
-          <a:solidFill>
-            <a:srgbClr val="F8FAFC"/>
-          </a:solidFill>
-          <a:ln w="12700">
-            <a:solidFill>
-              <a:srgbClr val="E2E8F0"/>
-            </a:solidFill>
-            <a:prstDash val="dash"/>
-          </a:ln>
-        </p:spPr>
-      </p:sp>
-      <p:sp>
-        <p:nvSpPr>
-          <p:cNvPr id="29" name="Text 27"/>
-          <p:cNvSpPr/>
-          <p:nvPr/>
-        </p:nvSpPr>
-        <p:spPr>
-          <a:xfrm>
-            <a:off x="1874520" y="3273552"/>
-            <a:ext cx="6903720" cy="658368"/>
-          </a:xfrm>
-          <a:prstGeom prst="rect">
-            <a:avLst/>
-          </a:prstGeom>
-          <a:noFill/>
-          <a:ln/>
-        </p:spPr>
-        <p:txBody>
-          <a:bodyPr wrap="square" rtlCol="0" anchor="ctr"/>
-          <a:lstStyle/>
-          <a:p>
-            <a:pPr algn="ctr" indent="0" marL="0">
-              <a:buNone/>
-            </a:pPr>
-            <a:r>
-              <a:rPr lang="en-US" sz="1100" i="1" dirty="0">
-                <a:solidFill>
-                  <a:srgbClr val="CBD5E1"/>
-                </a:solidFill>
-                <a:latin typeface="Calibri" pitchFamily="34" charset="0"/>
-                <a:ea typeface="Calibri" pitchFamily="34" charset="-122"/>
-                <a:cs typeface="Calibri" pitchFamily="34" charset="-120"/>
-              </a:rPr>
-              <a:t>Write here...</a:t>
-            </a:r>
-            <a:endParaRPr lang="en-US" sz="1100" dirty="0"/>
-          </a:p>
-        </p:txBody>
-      </p:sp>
-      <p:sp>
-        <p:nvSpPr>
-          <p:cNvPr id="30" name="Shape 28"/>
-          <p:cNvSpPr/>
-          <p:nvPr/>
-        </p:nvSpPr>
-        <p:spPr>
-          <a:xfrm>
-            <a:off x="365760" y="4096512"/>
-            <a:ext cx="1371600" cy="804672"/>
+          <p:cNvPr id="31" name="Shape 29"/>
+          <p:cNvSpPr/>
+          <p:nvPr/>
+        </p:nvSpPr>
+        <p:spPr>
+          <a:xfrm>
+            <a:off x="1874520" y="4096512"/>
+            <a:ext cx="6903720" cy="804672"/>
           </a:xfrm>
           <a:prstGeom prst="rect">
             <a:avLst>
@@ -13398,85 +12774,19 @@
             </a:avLst>
           </a:prstGeom>
           <a:solidFill>
-            <a:srgbClr val="E2E8F0"/>
+            <a:srgbClr val="F8FAFC"/>
           </a:solidFill>
           <a:ln w="12700">
             <a:solidFill>
               <a:srgbClr val="E2E8F0"/>
             </a:solidFill>
-            <a:prstDash val="solid"/>
-          </a:ln>
-        </p:spPr>
-      </p:sp>
-      <p:sp>
-        <p:nvSpPr>
-          <p:cNvPr id="31" name="Text 29"/>
-          <p:cNvSpPr/>
-          <p:nvPr/>
-        </p:nvSpPr>
-        <p:spPr>
-          <a:xfrm>
-            <a:off x="365760" y="4096512"/>
-            <a:ext cx="1371600" cy="804672"/>
-          </a:xfrm>
-          <a:prstGeom prst="rect">
-            <a:avLst/>
-          </a:prstGeom>
-          <a:noFill/>
-          <a:ln/>
-        </p:spPr>
-        <p:txBody>
-          <a:bodyPr wrap="square" lIns="0" tIns="0" rIns="0" bIns="0" rtlCol="0" anchor="ctr"/>
-          <a:lstStyle/>
-          <a:p>
-            <a:pPr algn="ctr" indent="0" marL="0">
-              <a:buNone/>
-            </a:pPr>
-            <a:r>
-              <a:rPr lang="en-US" sz="1100" b="1" dirty="0">
-                <a:solidFill>
-                  <a:srgbClr val="475569"/>
-                </a:solidFill>
-                <a:latin typeface="Trebuchet MS" pitchFamily="34" charset="0"/>
-                <a:ea typeface="Trebuchet MS" pitchFamily="34" charset="-122"/>
-                <a:cs typeface="Trebuchet MS" pitchFamily="34" charset="-120"/>
-              </a:rPr>
-              <a:t>Phonemes</a:t>
-            </a:r>
-            <a:endParaRPr lang="en-US" sz="1100" dirty="0"/>
-          </a:p>
-        </p:txBody>
-      </p:sp>
-      <p:sp>
-        <p:nvSpPr>
-          <p:cNvPr id="32" name="Shape 30"/>
-          <p:cNvSpPr/>
-          <p:nvPr/>
-        </p:nvSpPr>
-        <p:spPr>
-          <a:xfrm>
-            <a:off x="1874520" y="4096512"/>
-            <a:ext cx="6903720" cy="804672"/>
-          </a:xfrm>
-          <a:prstGeom prst="rect">
-            <a:avLst>
-              <a:gd name="adj" fmla="val 6818"/>
-            </a:avLst>
-          </a:prstGeom>
-          <a:solidFill>
-            <a:srgbClr val="F8FAFC"/>
-          </a:solidFill>
-          <a:ln w="12700">
-            <a:solidFill>
-              <a:srgbClr val="E2E8F0"/>
-            </a:solidFill>
             <a:prstDash val="dash"/>
           </a:ln>
         </p:spPr>
       </p:sp>
       <p:sp>
         <p:nvSpPr>
-          <p:cNvPr id="33" name="Text 31"/>
+          <p:cNvPr id="32" name="Text 30"/>
           <p:cNvSpPr/>
           <p:nvPr/>
         </p:nvSpPr>
@@ -13938,7 +13248,7 @@
                 <a:ea typeface="Trebuchet MS" pitchFamily="34" charset="-122"/>
                 <a:cs typeface="Trebuchet MS" pitchFamily="34" charset="-120"/>
               </a:rPr>
-              <a:t>nonliving</a:t>
+              <a:t>nonverbal</a:t>
             </a:r>
             <a:endParaRPr lang="en-US" sz="2800" dirty="0"/>
           </a:p>
@@ -14116,7 +13426,7 @@
                 <a:ea typeface="Calibri" pitchFamily="34" charset="-122"/>
                 <a:cs typeface="Calibri" pitchFamily="34" charset="-120"/>
               </a:rPr>
-              <a:t>not</a:t>
+              <a:t>not, without</a:t>
             </a:r>
             <a:endParaRPr lang="en-US" sz="850" dirty="0"/>
           </a:p>
@@ -14189,7 +13499,7 @@
                 <a:ea typeface="Trebuchet MS" pitchFamily="34" charset="-122"/>
                 <a:cs typeface="Trebuchet MS" pitchFamily="34" charset="-120"/>
               </a:rPr>
-              <a:t>live</a:t>
+              <a:t>verb</a:t>
             </a:r>
             <a:endParaRPr lang="en-US" sz="1300" dirty="0"/>
           </a:p>
@@ -14228,7 +13538,7 @@
                 <a:ea typeface="Calibri" pitchFamily="34" charset="-122"/>
                 <a:cs typeface="Calibri" pitchFamily="34" charset="-120"/>
               </a:rPr>
-              <a:t>be alive</a:t>
+              <a:t>word, speech</a:t>
             </a:r>
             <a:endParaRPr lang="en-US" sz="850" dirty="0"/>
           </a:p>
@@ -14301,7 +13611,7 @@
                 <a:ea typeface="Trebuchet MS" pitchFamily="34" charset="-122"/>
                 <a:cs typeface="Trebuchet MS" pitchFamily="34" charset="-120"/>
               </a:rPr>
-              <a:t>ing</a:t>
+              <a:t>al</a:t>
             </a:r>
             <a:endParaRPr lang="en-US" sz="1300" dirty="0"/>
           </a:p>
@@ -14340,7 +13650,7 @@
                 <a:ea typeface="Calibri" pitchFamily="34" charset="-122"/>
                 <a:cs typeface="Calibri" pitchFamily="34" charset="-120"/>
               </a:rPr>
-              <a:t>ongoing state</a:t>
+              <a:t>relating to</a:t>
             </a:r>
             <a:endParaRPr lang="en-US" sz="850" dirty="0"/>
           </a:p>
@@ -14348,46 +13658,7 @@
       </p:sp>
       <p:sp>
         <p:nvSpPr>
-          <p:cNvPr id="25" name="Text 23"/>
-          <p:cNvSpPr/>
-          <p:nvPr/>
-        </p:nvSpPr>
-        <p:spPr>
-          <a:xfrm>
-            <a:off x="6519672" y="2752344"/>
-            <a:ext cx="1828800" cy="182880"/>
-          </a:xfrm>
-          <a:prstGeom prst="rect">
-            <a:avLst/>
-          </a:prstGeom>
-          <a:noFill/>
-          <a:ln/>
-        </p:spPr>
-        <p:txBody>
-          <a:bodyPr wrap="square" lIns="0" tIns="0" rIns="0" bIns="0" rtlCol="0" anchor="t"/>
-          <a:lstStyle/>
-          <a:p>
-            <a:pPr algn="ctr" indent="0" marL="0">
-              <a:buNone/>
-            </a:pPr>
-            <a:r>
-              <a:rPr lang="en-US" sz="700" i="1" dirty="0">
-                <a:solidFill>
-                  <a:srgbClr val="94A3B8"/>
-                </a:solidFill>
-                <a:latin typeface="Calibri" pitchFamily="34" charset="0"/>
-                <a:ea typeface="Calibri" pitchFamily="34" charset="-122"/>
-                <a:cs typeface="Calibri" pitchFamily="34" charset="-120"/>
-              </a:rPr>
-              <a:t>'e' dropped before vowel suffix</a:t>
-            </a:r>
-            <a:endParaRPr lang="en-US" sz="700" dirty="0"/>
-          </a:p>
-        </p:txBody>
-      </p:sp>
-      <p:sp>
-        <p:nvSpPr>
-          <p:cNvPr id="26" name="Shape 24"/>
+          <p:cNvPr id="25" name="Shape 23"/>
           <p:cNvSpPr/>
           <p:nvPr/>
         </p:nvSpPr>
@@ -14414,7 +13685,7 @@
       </p:sp>
       <p:sp>
         <p:nvSpPr>
-          <p:cNvPr id="27" name="Text 25"/>
+          <p:cNvPr id="26" name="Text 24"/>
           <p:cNvSpPr/>
           <p:nvPr/>
         </p:nvSpPr>
@@ -14453,7 +13724,7 @@
       </p:sp>
       <p:sp>
         <p:nvSpPr>
-          <p:cNvPr id="28" name="Shape 26"/>
+          <p:cNvPr id="27" name="Shape 25"/>
           <p:cNvSpPr/>
           <p:nvPr/>
         </p:nvSpPr>
@@ -14480,7 +13751,7 @@
       </p:sp>
       <p:sp>
         <p:nvSpPr>
-          <p:cNvPr id="29" name="Shape 27"/>
+          <p:cNvPr id="28" name="Shape 26"/>
           <p:cNvSpPr/>
           <p:nvPr/>
         </p:nvSpPr>
@@ -14507,7 +13778,7 @@
       </p:sp>
       <p:sp>
         <p:nvSpPr>
-          <p:cNvPr id="30" name="Text 28"/>
+          <p:cNvPr id="29" name="Text 27"/>
           <p:cNvSpPr/>
           <p:nvPr/>
         </p:nvSpPr>
@@ -14546,7 +13817,7 @@
       </p:sp>
       <p:sp>
         <p:nvSpPr>
-          <p:cNvPr id="31" name="Text 29"/>
+          <p:cNvPr id="30" name="Text 28"/>
           <p:cNvSpPr/>
           <p:nvPr/>
         </p:nvSpPr>
@@ -14585,7 +13856,7 @@
       </p:sp>
       <p:sp>
         <p:nvSpPr>
-          <p:cNvPr id="32" name="Shape 30"/>
+          <p:cNvPr id="31" name="Shape 29"/>
           <p:cNvSpPr/>
           <p:nvPr/>
         </p:nvSpPr>
@@ -14612,7 +13883,7 @@
       </p:sp>
       <p:sp>
         <p:nvSpPr>
-          <p:cNvPr id="33" name="Text 31"/>
+          <p:cNvPr id="32" name="Text 30"/>
           <p:cNvSpPr/>
           <p:nvPr/>
         </p:nvSpPr>
@@ -14643,7 +13914,7 @@
                 <a:ea typeface="Trebuchet MS" pitchFamily="34" charset="-122"/>
                 <a:cs typeface="Trebuchet MS" pitchFamily="34" charset="-120"/>
               </a:rPr>
-              <a:t>liv</a:t>
+              <a:t>ver</a:t>
             </a:r>
             <a:endParaRPr lang="en-US" sz="1400" dirty="0"/>
           </a:p>
@@ -14651,7 +13922,7 @@
       </p:sp>
       <p:sp>
         <p:nvSpPr>
-          <p:cNvPr id="34" name="Text 32"/>
+          <p:cNvPr id="33" name="Text 31"/>
           <p:cNvSpPr/>
           <p:nvPr/>
         </p:nvSpPr>
@@ -14690,7 +13961,7 @@
       </p:sp>
       <p:sp>
         <p:nvSpPr>
-          <p:cNvPr id="35" name="Shape 33"/>
+          <p:cNvPr id="34" name="Shape 32"/>
           <p:cNvSpPr/>
           <p:nvPr/>
         </p:nvSpPr>
@@ -14717,7 +13988,7 @@
       </p:sp>
       <p:sp>
         <p:nvSpPr>
-          <p:cNvPr id="36" name="Text 34"/>
+          <p:cNvPr id="35" name="Text 33"/>
           <p:cNvSpPr/>
           <p:nvPr/>
         </p:nvSpPr>
@@ -14748,7 +14019,7 @@
                 <a:ea typeface="Trebuchet MS" pitchFamily="34" charset="-122"/>
                 <a:cs typeface="Trebuchet MS" pitchFamily="34" charset="-120"/>
               </a:rPr>
-              <a:t>ing</a:t>
+              <a:t>bal</a:t>
             </a:r>
             <a:endParaRPr lang="en-US" sz="1400" dirty="0"/>
           </a:p>
@@ -14756,7 +14027,7 @@
       </p:sp>
       <p:sp>
         <p:nvSpPr>
-          <p:cNvPr id="37" name="Shape 35"/>
+          <p:cNvPr id="36" name="Shape 34"/>
           <p:cNvSpPr/>
           <p:nvPr/>
         </p:nvSpPr>
@@ -14783,7 +14054,7 @@
       </p:sp>
       <p:sp>
         <p:nvSpPr>
-          <p:cNvPr id="38" name="Text 36"/>
+          <p:cNvPr id="37" name="Text 35"/>
           <p:cNvSpPr/>
           <p:nvPr/>
         </p:nvSpPr>
@@ -14822,7 +14093,7 @@
       </p:sp>
       <p:sp>
         <p:nvSpPr>
-          <p:cNvPr id="39" name="Shape 37"/>
+          <p:cNvPr id="38" name="Shape 36"/>
           <p:cNvSpPr/>
           <p:nvPr/>
         </p:nvSpPr>
@@ -14849,7 +14120,7 @@
       </p:sp>
       <p:sp>
         <p:nvSpPr>
-          <p:cNvPr id="40" name="Text 38"/>
+          <p:cNvPr id="39" name="Text 37"/>
           <p:cNvSpPr/>
           <p:nvPr/>
         </p:nvSpPr>
@@ -15576,7 +14847,7 @@
                 <a:ea typeface="Trebuchet MS" pitchFamily="34" charset="-122"/>
                 <a:cs typeface="Trebuchet MS" pitchFamily="34" charset="-120"/>
               </a:rPr>
-              <a:t>nonliving</a:t>
+              <a:t>nonverbal</a:t>
             </a:r>
             <a:endParaRPr lang="en-US" sz="2800" dirty="0"/>
           </a:p>
@@ -15754,7 +15025,7 @@
                 <a:ea typeface="Calibri" pitchFamily="34" charset="-122"/>
                 <a:cs typeface="Calibri" pitchFamily="34" charset="-120"/>
               </a:rPr>
-              <a:t>not</a:t>
+              <a:t>not, without</a:t>
             </a:r>
             <a:endParaRPr lang="en-US" sz="850" dirty="0"/>
           </a:p>
@@ -15827,7 +15098,7 @@
                 <a:ea typeface="Trebuchet MS" pitchFamily="34" charset="-122"/>
                 <a:cs typeface="Trebuchet MS" pitchFamily="34" charset="-120"/>
               </a:rPr>
-              <a:t>live</a:t>
+              <a:t>verb</a:t>
             </a:r>
             <a:endParaRPr lang="en-US" sz="1300" dirty="0"/>
           </a:p>
@@ -15866,7 +15137,7 @@
                 <a:ea typeface="Calibri" pitchFamily="34" charset="-122"/>
                 <a:cs typeface="Calibri" pitchFamily="34" charset="-120"/>
               </a:rPr>
-              <a:t>be alive</a:t>
+              <a:t>word, speech</a:t>
             </a:r>
             <a:endParaRPr lang="en-US" sz="850" dirty="0"/>
           </a:p>
@@ -15939,7 +15210,7 @@
                 <a:ea typeface="Trebuchet MS" pitchFamily="34" charset="-122"/>
                 <a:cs typeface="Trebuchet MS" pitchFamily="34" charset="-120"/>
               </a:rPr>
-              <a:t>ing</a:t>
+              <a:t>al</a:t>
             </a:r>
             <a:endParaRPr lang="en-US" sz="1300" dirty="0"/>
           </a:p>
@@ -15978,7 +15249,7 @@
                 <a:ea typeface="Calibri" pitchFamily="34" charset="-122"/>
                 <a:cs typeface="Calibri" pitchFamily="34" charset="-120"/>
               </a:rPr>
-              <a:t>ongoing state</a:t>
+              <a:t>relating to</a:t>
             </a:r>
             <a:endParaRPr lang="en-US" sz="850" dirty="0"/>
           </a:p>
@@ -15986,46 +15257,7 @@
       </p:sp>
       <p:sp>
         <p:nvSpPr>
-          <p:cNvPr id="25" name="Text 23"/>
-          <p:cNvSpPr/>
-          <p:nvPr/>
-        </p:nvSpPr>
-        <p:spPr>
-          <a:xfrm>
-            <a:off x="6519672" y="2752344"/>
-            <a:ext cx="1828800" cy="182880"/>
-          </a:xfrm>
-          <a:prstGeom prst="rect">
-            <a:avLst/>
-          </a:prstGeom>
-          <a:noFill/>
-          <a:ln/>
-        </p:spPr>
-        <p:txBody>
-          <a:bodyPr wrap="square" lIns="0" tIns="0" rIns="0" bIns="0" rtlCol="0" anchor="t"/>
-          <a:lstStyle/>
-          <a:p>
-            <a:pPr algn="ctr" indent="0" marL="0">
-              <a:buNone/>
-            </a:pPr>
-            <a:r>
-              <a:rPr lang="en-US" sz="700" i="1" dirty="0">
-                <a:solidFill>
-                  <a:srgbClr val="94A3B8"/>
-                </a:solidFill>
-                <a:latin typeface="Calibri" pitchFamily="34" charset="0"/>
-                <a:ea typeface="Calibri" pitchFamily="34" charset="-122"/>
-                <a:cs typeface="Calibri" pitchFamily="34" charset="-120"/>
-              </a:rPr>
-              <a:t>'e' dropped before vowel suffix</a:t>
-            </a:r>
-            <a:endParaRPr lang="en-US" sz="700" dirty="0"/>
-          </a:p>
-        </p:txBody>
-      </p:sp>
-      <p:sp>
-        <p:nvSpPr>
-          <p:cNvPr id="26" name="Shape 24"/>
+          <p:cNvPr id="25" name="Shape 23"/>
           <p:cNvSpPr/>
           <p:nvPr/>
         </p:nvSpPr>
@@ -16052,7 +15284,7 @@
       </p:sp>
       <p:sp>
         <p:nvSpPr>
-          <p:cNvPr id="27" name="Text 25"/>
+          <p:cNvPr id="26" name="Text 24"/>
           <p:cNvSpPr/>
           <p:nvPr/>
         </p:nvSpPr>
@@ -16091,7 +15323,7 @@
       </p:sp>
       <p:sp>
         <p:nvSpPr>
-          <p:cNvPr id="28" name="Shape 26"/>
+          <p:cNvPr id="27" name="Shape 25"/>
           <p:cNvSpPr/>
           <p:nvPr/>
         </p:nvSpPr>
@@ -16118,7 +15350,7 @@
       </p:sp>
       <p:sp>
         <p:nvSpPr>
-          <p:cNvPr id="29" name="Shape 27"/>
+          <p:cNvPr id="28" name="Shape 26"/>
           <p:cNvSpPr/>
           <p:nvPr/>
         </p:nvSpPr>
@@ -16145,7 +15377,7 @@
       </p:sp>
       <p:sp>
         <p:nvSpPr>
-          <p:cNvPr id="30" name="Text 28"/>
+          <p:cNvPr id="29" name="Text 27"/>
           <p:cNvSpPr/>
           <p:nvPr/>
         </p:nvSpPr>
@@ -16184,7 +15416,7 @@
       </p:sp>
       <p:sp>
         <p:nvSpPr>
-          <p:cNvPr id="31" name="Text 29"/>
+          <p:cNvPr id="30" name="Text 28"/>
           <p:cNvSpPr/>
           <p:nvPr/>
         </p:nvSpPr>
@@ -16223,7 +15455,7 @@
       </p:sp>
       <p:sp>
         <p:nvSpPr>
-          <p:cNvPr id="32" name="Shape 30"/>
+          <p:cNvPr id="31" name="Shape 29"/>
           <p:cNvSpPr/>
           <p:nvPr/>
         </p:nvSpPr>
@@ -16250,7 +15482,7 @@
       </p:sp>
       <p:sp>
         <p:nvSpPr>
-          <p:cNvPr id="33" name="Text 31"/>
+          <p:cNvPr id="32" name="Text 30"/>
           <p:cNvSpPr/>
           <p:nvPr/>
         </p:nvSpPr>
@@ -16281,7 +15513,7 @@
                 <a:ea typeface="Trebuchet MS" pitchFamily="34" charset="-122"/>
                 <a:cs typeface="Trebuchet MS" pitchFamily="34" charset="-120"/>
               </a:rPr>
-              <a:t>liv</a:t>
+              <a:t>ver</a:t>
             </a:r>
             <a:endParaRPr lang="en-US" sz="1400" dirty="0"/>
           </a:p>
@@ -16289,7 +15521,7 @@
       </p:sp>
       <p:sp>
         <p:nvSpPr>
-          <p:cNvPr id="34" name="Text 32"/>
+          <p:cNvPr id="33" name="Text 31"/>
           <p:cNvSpPr/>
           <p:nvPr/>
         </p:nvSpPr>
@@ -16328,7 +15560,7 @@
       </p:sp>
       <p:sp>
         <p:nvSpPr>
-          <p:cNvPr id="35" name="Shape 33"/>
+          <p:cNvPr id="34" name="Shape 32"/>
           <p:cNvSpPr/>
           <p:nvPr/>
         </p:nvSpPr>
@@ -16355,7 +15587,7 @@
       </p:sp>
       <p:sp>
         <p:nvSpPr>
-          <p:cNvPr id="36" name="Text 34"/>
+          <p:cNvPr id="35" name="Text 33"/>
           <p:cNvSpPr/>
           <p:nvPr/>
         </p:nvSpPr>
@@ -16386,7 +15618,7 @@
                 <a:ea typeface="Trebuchet MS" pitchFamily="34" charset="-122"/>
                 <a:cs typeface="Trebuchet MS" pitchFamily="34" charset="-120"/>
               </a:rPr>
-              <a:t>ing</a:t>
+              <a:t>bal</a:t>
             </a:r>
             <a:endParaRPr lang="en-US" sz="1400" dirty="0"/>
           </a:p>
@@ -16394,7 +15626,7 @@
       </p:sp>
       <p:sp>
         <p:nvSpPr>
-          <p:cNvPr id="37" name="Shape 35"/>
+          <p:cNvPr id="36" name="Shape 34"/>
           <p:cNvSpPr/>
           <p:nvPr/>
         </p:nvSpPr>
@@ -16421,7 +15653,7 @@
       </p:sp>
       <p:sp>
         <p:nvSpPr>
-          <p:cNvPr id="38" name="Text 36"/>
+          <p:cNvPr id="37" name="Text 35"/>
           <p:cNvSpPr/>
           <p:nvPr/>
         </p:nvSpPr>
@@ -16460,7 +15692,7 @@
       </p:sp>
       <p:sp>
         <p:nvSpPr>
-          <p:cNvPr id="39" name="Shape 37"/>
+          <p:cNvPr id="38" name="Shape 36"/>
           <p:cNvSpPr/>
           <p:nvPr/>
         </p:nvSpPr>
@@ -16487,7 +15719,7 @@
       </p:sp>
       <p:sp>
         <p:nvSpPr>
-          <p:cNvPr id="40" name="Shape 38"/>
+          <p:cNvPr id="39" name="Shape 37"/>
           <p:cNvSpPr/>
           <p:nvPr/>
         </p:nvSpPr>
@@ -16514,7 +15746,7 @@
       </p:sp>
       <p:sp>
         <p:nvSpPr>
-          <p:cNvPr id="41" name="Text 39"/>
+          <p:cNvPr id="40" name="Text 38"/>
           <p:cNvSpPr/>
           <p:nvPr/>
         </p:nvSpPr>
@@ -16553,7 +15785,7 @@
       </p:sp>
       <p:sp>
         <p:nvSpPr>
-          <p:cNvPr id="42" name="Shape 40"/>
+          <p:cNvPr id="41" name="Shape 39"/>
           <p:cNvSpPr/>
           <p:nvPr/>
         </p:nvSpPr>
@@ -16580,7 +15812,7 @@
       </p:sp>
       <p:sp>
         <p:nvSpPr>
-          <p:cNvPr id="43" name="Text 41"/>
+          <p:cNvPr id="42" name="Text 40"/>
           <p:cNvSpPr/>
           <p:nvPr/>
         </p:nvSpPr>
@@ -16619,7 +15851,7 @@
       </p:sp>
       <p:sp>
         <p:nvSpPr>
-          <p:cNvPr id="44" name="Shape 42"/>
+          <p:cNvPr id="43" name="Shape 41"/>
           <p:cNvSpPr/>
           <p:nvPr/>
         </p:nvSpPr>
@@ -16646,7 +15878,7 @@
       </p:sp>
       <p:sp>
         <p:nvSpPr>
-          <p:cNvPr id="45" name="Text 43"/>
+          <p:cNvPr id="44" name="Text 42"/>
           <p:cNvSpPr/>
           <p:nvPr/>
         </p:nvSpPr>
@@ -16685,7 +15917,7 @@
       </p:sp>
       <p:sp>
         <p:nvSpPr>
-          <p:cNvPr id="46" name="Shape 44"/>
+          <p:cNvPr id="45" name="Shape 43"/>
           <p:cNvSpPr/>
           <p:nvPr/>
         </p:nvSpPr>
@@ -16712,7 +15944,7 @@
       </p:sp>
       <p:sp>
         <p:nvSpPr>
-          <p:cNvPr id="47" name="Text 45"/>
+          <p:cNvPr id="46" name="Text 44"/>
           <p:cNvSpPr/>
           <p:nvPr/>
         </p:nvSpPr>
@@ -16743,7 +15975,7 @@
                 <a:ea typeface="Trebuchet MS" pitchFamily="34" charset="-122"/>
                 <a:cs typeface="Trebuchet MS" pitchFamily="34" charset="-120"/>
               </a:rPr>
-              <a:t>l</a:t>
+              <a:t>v</a:t>
             </a:r>
             <a:endParaRPr lang="en-US" sz="900" dirty="0"/>
           </a:p>
@@ -16751,7 +15983,7 @@
       </p:sp>
       <p:sp>
         <p:nvSpPr>
-          <p:cNvPr id="48" name="Shape 46"/>
+          <p:cNvPr id="47" name="Shape 45"/>
           <p:cNvSpPr/>
           <p:nvPr/>
         </p:nvSpPr>
@@ -16778,7 +16010,7 @@
       </p:sp>
       <p:sp>
         <p:nvSpPr>
-          <p:cNvPr id="49" name="Text 47"/>
+          <p:cNvPr id="48" name="Text 46"/>
           <p:cNvSpPr/>
           <p:nvPr/>
         </p:nvSpPr>
@@ -16809,7 +16041,7 @@
                 <a:ea typeface="Trebuchet MS" pitchFamily="34" charset="-122"/>
                 <a:cs typeface="Trebuchet MS" pitchFamily="34" charset="-120"/>
               </a:rPr>
-              <a:t>i</a:t>
+              <a:t>er</a:t>
             </a:r>
             <a:endParaRPr lang="en-US" sz="900" dirty="0"/>
           </a:p>
@@ -16817,7 +16049,7 @@
       </p:sp>
       <p:sp>
         <p:nvSpPr>
-          <p:cNvPr id="50" name="Shape 48"/>
+          <p:cNvPr id="49" name="Shape 47"/>
           <p:cNvSpPr/>
           <p:nvPr/>
         </p:nvSpPr>
@@ -16844,7 +16076,7 @@
       </p:sp>
       <p:sp>
         <p:nvSpPr>
-          <p:cNvPr id="51" name="Text 49"/>
+          <p:cNvPr id="50" name="Text 48"/>
           <p:cNvSpPr/>
           <p:nvPr/>
         </p:nvSpPr>
@@ -16875,7 +16107,7 @@
                 <a:ea typeface="Trebuchet MS" pitchFamily="34" charset="-122"/>
                 <a:cs typeface="Trebuchet MS" pitchFamily="34" charset="-120"/>
               </a:rPr>
-              <a:t>v</a:t>
+              <a:t>b</a:t>
             </a:r>
             <a:endParaRPr lang="en-US" sz="900" dirty="0"/>
           </a:p>
@@ -16883,7 +16115,7 @@
       </p:sp>
       <p:sp>
         <p:nvSpPr>
-          <p:cNvPr id="52" name="Shape 50"/>
+          <p:cNvPr id="51" name="Shape 49"/>
           <p:cNvSpPr/>
           <p:nvPr/>
         </p:nvSpPr>
@@ -16910,7 +16142,7 @@
       </p:sp>
       <p:sp>
         <p:nvSpPr>
-          <p:cNvPr id="53" name="Text 51"/>
+          <p:cNvPr id="52" name="Text 50"/>
           <p:cNvSpPr/>
           <p:nvPr/>
         </p:nvSpPr>
@@ -16941,7 +16173,7 @@
                 <a:ea typeface="Trebuchet MS" pitchFamily="34" charset="-122"/>
                 <a:cs typeface="Trebuchet MS" pitchFamily="34" charset="-120"/>
               </a:rPr>
-              <a:t>ing</a:t>
+              <a:t>al</a:t>
             </a:r>
             <a:endParaRPr lang="en-US" sz="900" dirty="0"/>
           </a:p>
@@ -18298,7 +17530,7 @@
                 <a:ea typeface="Calibri" pitchFamily="34" charset="-122"/>
                 <a:cs typeface="Calibri" pitchFamily="34" charset="-120"/>
               </a:rPr>
-              <a:t> organisation held a </a:t>
+              <a:t> group promoted </a:t>
             </a:r>
             <a:pPr algn="l" indent="0" marL="0">
               <a:buNone/>
@@ -18315,7 +17547,7 @@
                 <a:ea typeface="Calibri" pitchFamily="34" charset="-122"/>
                 <a:cs typeface="Calibri" pitchFamily="34" charset="-120"/>
               </a:rPr>
-              <a:t>nonstop</a:t>
+              <a:t>nonviolent</a:t>
             </a:r>
             <a:pPr algn="l" indent="0" marL="0">
               <a:buNone/>
@@ -18329,7 +17561,7 @@
                 <a:ea typeface="Calibri" pitchFamily="34" charset="-122"/>
                 <a:cs typeface="Calibri" pitchFamily="34" charset="-120"/>
               </a:rPr>
-              <a:t>, </a:t>
+              <a:t> protest, and their </a:t>
             </a:r>
             <a:pPr algn="l" indent="0" marL="0">
               <a:buNone/>
@@ -18346,7 +17578,7 @@
                 <a:ea typeface="Calibri" pitchFamily="34" charset="-122"/>
                 <a:cs typeface="Calibri" pitchFamily="34" charset="-120"/>
               </a:rPr>
-              <a:t>nonviolent</a:t>
+              <a:t>nonfiction</a:t>
             </a:r>
             <a:pPr algn="l" indent="0" marL="0">
               <a:buNone/>
@@ -18360,7 +17592,7 @@
                 <a:ea typeface="Calibri" pitchFamily="34" charset="-122"/>
                 <a:cs typeface="Calibri" pitchFamily="34" charset="-120"/>
               </a:rPr>
-              <a:t> rally to raise money for the community.</a:t>
+              <a:t> book explained why peace matters.</a:t>
             </a:r>
             <a:endParaRPr lang="en-US" sz="1800" dirty="0"/>
           </a:p>
@@ -18643,7 +17875,7 @@
                 <a:ea typeface="Trebuchet MS" pitchFamily="34" charset="-122"/>
                 <a:cs typeface="Trebuchet MS" pitchFamily="34" charset="-120"/>
               </a:rPr>
-              <a:t>nonstop</a:t>
+              <a:t>nonviolent</a:t>
             </a:r>
             <a:endParaRPr lang="en-US" sz="1400" dirty="0"/>
           </a:p>
@@ -18771,7 +18003,7 @@
                 <a:ea typeface="Trebuchet MS" pitchFamily="34" charset="-122"/>
                 <a:cs typeface="Trebuchet MS" pitchFamily="34" charset="-120"/>
               </a:rPr>
-              <a:t>nonviolent</a:t>
+              <a:t>nonfiction</a:t>
             </a:r>
             <a:endParaRPr lang="en-US" sz="1400" dirty="0"/>
           </a:p>
@@ -20246,7 +19478,7 @@
                 <a:ea typeface="Calibri" pitchFamily="34" charset="-122"/>
                 <a:cs typeface="Calibri" pitchFamily="34" charset="-120"/>
               </a:rPr>
-              <a:t>not</a:t>
+              <a:t>not, without</a:t>
             </a:r>
             <a:endParaRPr lang="en-US" sz="850" dirty="0"/>
           </a:p>
@@ -21231,7 +20463,7 @@
                 <a:ea typeface="Calibri" pitchFamily="34" charset="-122"/>
                 <a:cs typeface="Calibri" pitchFamily="34" charset="-120"/>
               </a:rPr>
-              <a:t>not</a:t>
+              <a:t>not, without</a:t>
             </a:r>
             <a:endParaRPr lang="en-US" sz="850" dirty="0"/>
           </a:p>
@@ -22453,7 +21685,7 @@
                 <a:ea typeface="Calibri" pitchFamily="34" charset="-122"/>
                 <a:cs typeface="Calibri" pitchFamily="34" charset="-120"/>
               </a:rPr>
-              <a:t>not</a:t>
+              <a:t>not, without</a:t>
             </a:r>
             <a:endParaRPr lang="en-US" sz="850" dirty="0"/>
           </a:p>
@@ -24052,7 +23284,7 @@
                 <a:ea typeface="Trebuchet MS" pitchFamily="34" charset="-122"/>
                 <a:cs typeface="Trebuchet MS" pitchFamily="34" charset="-120"/>
               </a:rPr>
-              <a:t>nonstop</a:t>
+              <a:t>nonviolent</a:t>
             </a:r>
             <a:endParaRPr lang="en-US" sz="2800" dirty="0"/>
           </a:p>
@@ -24879,7 +24111,7 @@
                 <a:ea typeface="Trebuchet MS" pitchFamily="34" charset="-122"/>
                 <a:cs typeface="Trebuchet MS" pitchFamily="34" charset="-120"/>
               </a:rPr>
-              <a:t>nonstop</a:t>
+              <a:t>nonviolent</a:t>
             </a:r>
             <a:endParaRPr lang="en-US" sz="2800" dirty="0"/>
           </a:p>
@@ -24959,7 +24191,7 @@
         </p:nvSpPr>
         <p:spPr>
           <a:xfrm>
-            <a:off x="2938272" y="2258568"/>
+            <a:off x="2221992" y="2258568"/>
             <a:ext cx="1828800" cy="292608"/>
           </a:xfrm>
           <a:prstGeom prst="rect">
@@ -24993,7 +24225,7 @@
         </p:nvSpPr>
         <p:spPr>
           <a:xfrm>
-            <a:off x="2938272" y="2258568"/>
+            <a:off x="2221992" y="2258568"/>
             <a:ext cx="1828800" cy="292608"/>
           </a:xfrm>
           <a:prstGeom prst="rect">
@@ -25032,7 +24264,7 @@
         </p:nvSpPr>
         <p:spPr>
           <a:xfrm>
-            <a:off x="2938272" y="2569464"/>
+            <a:off x="2221992" y="2569464"/>
             <a:ext cx="1828800" cy="201168"/>
           </a:xfrm>
           <a:prstGeom prst="rect">
@@ -25057,7 +24289,7 @@
                 <a:ea typeface="Calibri" pitchFamily="34" charset="-122"/>
                 <a:cs typeface="Calibri" pitchFamily="34" charset="-120"/>
               </a:rPr>
-              <a:t>not</a:t>
+              <a:t>not, without</a:t>
             </a:r>
             <a:endParaRPr lang="en-US" sz="850" dirty="0"/>
           </a:p>
@@ -25071,7 +24303,7 @@
         </p:nvSpPr>
         <p:spPr>
           <a:xfrm>
-            <a:off x="5803392" y="2258568"/>
+            <a:off x="4370832" y="2258568"/>
             <a:ext cx="1828800" cy="292608"/>
           </a:xfrm>
           <a:prstGeom prst="rect">
@@ -25105,7 +24337,7 @@
         </p:nvSpPr>
         <p:spPr>
           <a:xfrm>
-            <a:off x="5803392" y="2258568"/>
+            <a:off x="4370832" y="2258568"/>
             <a:ext cx="1828800" cy="292608"/>
           </a:xfrm>
           <a:prstGeom prst="rect">
@@ -25130,7 +24362,7 @@
                 <a:ea typeface="Trebuchet MS" pitchFamily="34" charset="-122"/>
                 <a:cs typeface="Trebuchet MS" pitchFamily="34" charset="-120"/>
               </a:rPr>
-              <a:t>stop</a:t>
+              <a:t>viol</a:t>
             </a:r>
             <a:endParaRPr lang="en-US" sz="1300" dirty="0"/>
           </a:p>
@@ -25144,7 +24376,7 @@
         </p:nvSpPr>
         <p:spPr>
           <a:xfrm>
-            <a:off x="5803392" y="2569464"/>
+            <a:off x="4370832" y="2569464"/>
             <a:ext cx="1828800" cy="201168"/>
           </a:xfrm>
           <a:prstGeom prst="rect">
@@ -25169,7 +24401,7 @@
                 <a:ea typeface="Calibri" pitchFamily="34" charset="-122"/>
                 <a:cs typeface="Calibri" pitchFamily="34" charset="-120"/>
               </a:rPr>
-              <a:t>cease, halt</a:t>
+              <a:t>force, harm</a:t>
             </a:r>
             <a:endParaRPr lang="en-US" sz="850" dirty="0"/>
           </a:p>
@@ -25178,6 +24410,118 @@
       <p:sp>
         <p:nvSpPr>
           <p:cNvPr id="22" name="Shape 20"/>
+          <p:cNvSpPr/>
+          <p:nvPr/>
+        </p:nvSpPr>
+        <p:spPr>
+          <a:xfrm>
+            <a:off x="6519672" y="2258568"/>
+            <a:ext cx="1828800" cy="292608"/>
+          </a:xfrm>
+          <a:prstGeom prst="rect">
+            <a:avLst>
+              <a:gd name="adj" fmla="val 25000"/>
+            </a:avLst>
+          </a:prstGeom>
+          <a:solidFill>
+            <a:srgbClr val="FCE7F3"/>
+          </a:solidFill>
+          <a:ln w="19050">
+            <a:solidFill>
+              <a:srgbClr val="DB2777"/>
+            </a:solidFill>
+            <a:prstDash val="solid"/>
+          </a:ln>
+          <a:effectLst>
+            <a:outerShdw sx="100000" sy="100000" kx="0" ky="0" algn="bl" rotWithShape="0" blurRad="101600" dist="38100" dir="8100000">
+              <a:srgbClr val="000000">
+                <a:alpha val="12000"/>
+              </a:srgbClr>
+            </a:outerShdw>
+          </a:effectLst>
+        </p:spPr>
+      </p:sp>
+      <p:sp>
+        <p:nvSpPr>
+          <p:cNvPr id="23" name="Text 21"/>
+          <p:cNvSpPr/>
+          <p:nvPr/>
+        </p:nvSpPr>
+        <p:spPr>
+          <a:xfrm>
+            <a:off x="6519672" y="2258568"/>
+            <a:ext cx="1828800" cy="292608"/>
+          </a:xfrm>
+          <a:prstGeom prst="rect">
+            <a:avLst/>
+          </a:prstGeom>
+          <a:noFill/>
+          <a:ln/>
+        </p:spPr>
+        <p:txBody>
+          <a:bodyPr wrap="square" lIns="0" tIns="0" rIns="0" bIns="0" rtlCol="0" anchor="ctr"/>
+          <a:lstStyle/>
+          <a:p>
+            <a:pPr algn="ctr" indent="0" marL="0">
+              <a:buNone/>
+            </a:pPr>
+            <a:r>
+              <a:rPr lang="en-US" sz="1300" b="1" dirty="0">
+                <a:solidFill>
+                  <a:srgbClr val="9D174D"/>
+                </a:solidFill>
+                <a:latin typeface="Trebuchet MS" pitchFamily="34" charset="0"/>
+                <a:ea typeface="Trebuchet MS" pitchFamily="34" charset="-122"/>
+                <a:cs typeface="Trebuchet MS" pitchFamily="34" charset="-120"/>
+              </a:rPr>
+              <a:t>ent</a:t>
+            </a:r>
+            <a:endParaRPr lang="en-US" sz="1300" dirty="0"/>
+          </a:p>
+        </p:txBody>
+      </p:sp>
+      <p:sp>
+        <p:nvSpPr>
+          <p:cNvPr id="24" name="Text 22"/>
+          <p:cNvSpPr/>
+          <p:nvPr/>
+        </p:nvSpPr>
+        <p:spPr>
+          <a:xfrm>
+            <a:off x="6519672" y="2569464"/>
+            <a:ext cx="1828800" cy="201168"/>
+          </a:xfrm>
+          <a:prstGeom prst="rect">
+            <a:avLst/>
+          </a:prstGeom>
+          <a:noFill/>
+          <a:ln/>
+        </p:spPr>
+        <p:txBody>
+          <a:bodyPr wrap="square" lIns="0" tIns="0" rIns="0" bIns="0" rtlCol="0" anchor="t"/>
+          <a:lstStyle/>
+          <a:p>
+            <a:pPr algn="ctr" indent="0" marL="0">
+              <a:buNone/>
+            </a:pPr>
+            <a:r>
+              <a:rPr lang="en-US" sz="850" dirty="0">
+                <a:solidFill>
+                  <a:srgbClr val="475569"/>
+                </a:solidFill>
+                <a:latin typeface="Calibri" pitchFamily="34" charset="0"/>
+                <a:ea typeface="Calibri" pitchFamily="34" charset="-122"/>
+                <a:cs typeface="Calibri" pitchFamily="34" charset="-120"/>
+              </a:rPr>
+              <a:t>having a quality</a:t>
+            </a:r>
+            <a:endParaRPr lang="en-US" sz="850" dirty="0"/>
+          </a:p>
+        </p:txBody>
+      </p:sp>
+      <p:sp>
+        <p:nvSpPr>
+          <p:cNvPr id="25" name="Shape 23"/>
           <p:cNvSpPr/>
           <p:nvPr/>
         </p:nvSpPr>
@@ -25204,7 +24548,7 @@
       </p:sp>
       <p:sp>
         <p:nvSpPr>
-          <p:cNvPr id="23" name="Text 21"/>
+          <p:cNvPr id="26" name="Text 24"/>
           <p:cNvSpPr/>
           <p:nvPr/>
         </p:nvSpPr>
@@ -25243,7 +24587,7 @@
       </p:sp>
       <p:sp>
         <p:nvSpPr>
-          <p:cNvPr id="24" name="Shape 22"/>
+          <p:cNvPr id="27" name="Shape 25"/>
           <p:cNvSpPr/>
           <p:nvPr/>
         </p:nvSpPr>
@@ -25270,7 +24614,7 @@
       </p:sp>
       <p:sp>
         <p:nvSpPr>
-          <p:cNvPr id="25" name="Text 23"/>
+          <p:cNvPr id="28" name="Text 26"/>
           <p:cNvSpPr/>
           <p:nvPr/>
         </p:nvSpPr>
@@ -25309,7 +24653,7 @@
       </p:sp>
       <p:sp>
         <p:nvSpPr>
-          <p:cNvPr id="26" name="Shape 24"/>
+          <p:cNvPr id="29" name="Shape 27"/>
           <p:cNvSpPr/>
           <p:nvPr/>
         </p:nvSpPr>
@@ -25336,7 +24680,7 @@
       </p:sp>
       <p:sp>
         <p:nvSpPr>
-          <p:cNvPr id="27" name="Text 25"/>
+          <p:cNvPr id="30" name="Text 28"/>
           <p:cNvSpPr/>
           <p:nvPr/>
         </p:nvSpPr>
@@ -25375,7 +24719,7 @@
       </p:sp>
       <p:sp>
         <p:nvSpPr>
-          <p:cNvPr id="28" name="Shape 26"/>
+          <p:cNvPr id="31" name="Shape 29"/>
           <p:cNvSpPr/>
           <p:nvPr/>
         </p:nvSpPr>
@@ -25402,7 +24746,7 @@
       </p:sp>
       <p:sp>
         <p:nvSpPr>
-          <p:cNvPr id="29" name="Text 27"/>
+          <p:cNvPr id="32" name="Text 30"/>
           <p:cNvSpPr/>
           <p:nvPr/>
         </p:nvSpPr>
@@ -26583,7 +25927,7 @@
                 <a:ea typeface="Trebuchet MS" pitchFamily="34" charset="-122"/>
                 <a:cs typeface="Trebuchet MS" pitchFamily="34" charset="-120"/>
               </a:rPr>
-              <a:t>nonstop</a:t>
+              <a:t>nonviolent</a:t>
             </a:r>
             <a:endParaRPr lang="en-US" sz="2800" dirty="0"/>
           </a:p>
@@ -26663,7 +26007,7 @@
         </p:nvSpPr>
         <p:spPr>
           <a:xfrm>
-            <a:off x="2938272" y="2258568"/>
+            <a:off x="2221992" y="2258568"/>
             <a:ext cx="1828800" cy="292608"/>
           </a:xfrm>
           <a:prstGeom prst="rect">
@@ -26697,7 +26041,7 @@
         </p:nvSpPr>
         <p:spPr>
           <a:xfrm>
-            <a:off x="2938272" y="2258568"/>
+            <a:off x="2221992" y="2258568"/>
             <a:ext cx="1828800" cy="292608"/>
           </a:xfrm>
           <a:prstGeom prst="rect">
@@ -26736,7 +26080,7 @@
         </p:nvSpPr>
         <p:spPr>
           <a:xfrm>
-            <a:off x="2938272" y="2569464"/>
+            <a:off x="2221992" y="2569464"/>
             <a:ext cx="1828800" cy="201168"/>
           </a:xfrm>
           <a:prstGeom prst="rect">
@@ -26761,7 +26105,7 @@
                 <a:ea typeface="Calibri" pitchFamily="34" charset="-122"/>
                 <a:cs typeface="Calibri" pitchFamily="34" charset="-120"/>
               </a:rPr>
-              <a:t>not</a:t>
+              <a:t>not, without</a:t>
             </a:r>
             <a:endParaRPr lang="en-US" sz="850" dirty="0"/>
           </a:p>
@@ -26775,7 +26119,7 @@
         </p:nvSpPr>
         <p:spPr>
           <a:xfrm>
-            <a:off x="5803392" y="2258568"/>
+            <a:off x="4370832" y="2258568"/>
             <a:ext cx="1828800" cy="292608"/>
           </a:xfrm>
           <a:prstGeom prst="rect">
@@ -26809,7 +26153,7 @@
         </p:nvSpPr>
         <p:spPr>
           <a:xfrm>
-            <a:off x="5803392" y="2258568"/>
+            <a:off x="4370832" y="2258568"/>
             <a:ext cx="1828800" cy="292608"/>
           </a:xfrm>
           <a:prstGeom prst="rect">
@@ -26834,7 +26178,7 @@
                 <a:ea typeface="Trebuchet MS" pitchFamily="34" charset="-122"/>
                 <a:cs typeface="Trebuchet MS" pitchFamily="34" charset="-120"/>
               </a:rPr>
-              <a:t>stop</a:t>
+              <a:t>viol</a:t>
             </a:r>
             <a:endParaRPr lang="en-US" sz="1300" dirty="0"/>
           </a:p>
@@ -26848,7 +26192,7 @@
         </p:nvSpPr>
         <p:spPr>
           <a:xfrm>
-            <a:off x="5803392" y="2569464"/>
+            <a:off x="4370832" y="2569464"/>
             <a:ext cx="1828800" cy="201168"/>
           </a:xfrm>
           <a:prstGeom prst="rect">
@@ -26873,7 +26217,7 @@
                 <a:ea typeface="Calibri" pitchFamily="34" charset="-122"/>
                 <a:cs typeface="Calibri" pitchFamily="34" charset="-120"/>
               </a:rPr>
-              <a:t>cease, halt</a:t>
+              <a:t>force, harm</a:t>
             </a:r>
             <a:endParaRPr lang="en-US" sz="850" dirty="0"/>
           </a:p>
@@ -26882,6 +26226,118 @@
       <p:sp>
         <p:nvSpPr>
           <p:cNvPr id="22" name="Shape 20"/>
+          <p:cNvSpPr/>
+          <p:nvPr/>
+        </p:nvSpPr>
+        <p:spPr>
+          <a:xfrm>
+            <a:off x="6519672" y="2258568"/>
+            <a:ext cx="1828800" cy="292608"/>
+          </a:xfrm>
+          <a:prstGeom prst="rect">
+            <a:avLst>
+              <a:gd name="adj" fmla="val 25000"/>
+            </a:avLst>
+          </a:prstGeom>
+          <a:solidFill>
+            <a:srgbClr val="FCE7F3"/>
+          </a:solidFill>
+          <a:ln w="19050">
+            <a:solidFill>
+              <a:srgbClr val="DB2777"/>
+            </a:solidFill>
+            <a:prstDash val="solid"/>
+          </a:ln>
+          <a:effectLst>
+            <a:outerShdw sx="100000" sy="100000" kx="0" ky="0" algn="bl" rotWithShape="0" blurRad="101600" dist="38100" dir="8100000">
+              <a:srgbClr val="000000">
+                <a:alpha val="12000"/>
+              </a:srgbClr>
+            </a:outerShdw>
+          </a:effectLst>
+        </p:spPr>
+      </p:sp>
+      <p:sp>
+        <p:nvSpPr>
+          <p:cNvPr id="23" name="Text 21"/>
+          <p:cNvSpPr/>
+          <p:nvPr/>
+        </p:nvSpPr>
+        <p:spPr>
+          <a:xfrm>
+            <a:off x="6519672" y="2258568"/>
+            <a:ext cx="1828800" cy="292608"/>
+          </a:xfrm>
+          <a:prstGeom prst="rect">
+            <a:avLst/>
+          </a:prstGeom>
+          <a:noFill/>
+          <a:ln/>
+        </p:spPr>
+        <p:txBody>
+          <a:bodyPr wrap="square" lIns="0" tIns="0" rIns="0" bIns="0" rtlCol="0" anchor="ctr"/>
+          <a:lstStyle/>
+          <a:p>
+            <a:pPr algn="ctr" indent="0" marL="0">
+              <a:buNone/>
+            </a:pPr>
+            <a:r>
+              <a:rPr lang="en-US" sz="1300" b="1" dirty="0">
+                <a:solidFill>
+                  <a:srgbClr val="9D174D"/>
+                </a:solidFill>
+                <a:latin typeface="Trebuchet MS" pitchFamily="34" charset="0"/>
+                <a:ea typeface="Trebuchet MS" pitchFamily="34" charset="-122"/>
+                <a:cs typeface="Trebuchet MS" pitchFamily="34" charset="-120"/>
+              </a:rPr>
+              <a:t>ent</a:t>
+            </a:r>
+            <a:endParaRPr lang="en-US" sz="1300" dirty="0"/>
+          </a:p>
+        </p:txBody>
+      </p:sp>
+      <p:sp>
+        <p:nvSpPr>
+          <p:cNvPr id="24" name="Text 22"/>
+          <p:cNvSpPr/>
+          <p:nvPr/>
+        </p:nvSpPr>
+        <p:spPr>
+          <a:xfrm>
+            <a:off x="6519672" y="2569464"/>
+            <a:ext cx="1828800" cy="201168"/>
+          </a:xfrm>
+          <a:prstGeom prst="rect">
+            <a:avLst/>
+          </a:prstGeom>
+          <a:noFill/>
+          <a:ln/>
+        </p:spPr>
+        <p:txBody>
+          <a:bodyPr wrap="square" lIns="0" tIns="0" rIns="0" bIns="0" rtlCol="0" anchor="t"/>
+          <a:lstStyle/>
+          <a:p>
+            <a:pPr algn="ctr" indent="0" marL="0">
+              <a:buNone/>
+            </a:pPr>
+            <a:r>
+              <a:rPr lang="en-US" sz="850" dirty="0">
+                <a:solidFill>
+                  <a:srgbClr val="475569"/>
+                </a:solidFill>
+                <a:latin typeface="Calibri" pitchFamily="34" charset="0"/>
+                <a:ea typeface="Calibri" pitchFamily="34" charset="-122"/>
+                <a:cs typeface="Calibri" pitchFamily="34" charset="-120"/>
+              </a:rPr>
+              <a:t>having a quality</a:t>
+            </a:r>
+            <a:endParaRPr lang="en-US" sz="850" dirty="0"/>
+          </a:p>
+        </p:txBody>
+      </p:sp>
+      <p:sp>
+        <p:nvSpPr>
+          <p:cNvPr id="25" name="Shape 23"/>
           <p:cNvSpPr/>
           <p:nvPr/>
         </p:nvSpPr>
@@ -26908,7 +26364,7 @@
       </p:sp>
       <p:sp>
         <p:nvSpPr>
-          <p:cNvPr id="23" name="Text 21"/>
+          <p:cNvPr id="26" name="Text 24"/>
           <p:cNvSpPr/>
           <p:nvPr/>
         </p:nvSpPr>
@@ -26947,7 +26403,7 @@
       </p:sp>
       <p:sp>
         <p:nvSpPr>
-          <p:cNvPr id="24" name="Shape 22"/>
+          <p:cNvPr id="27" name="Shape 25"/>
           <p:cNvSpPr/>
           <p:nvPr/>
         </p:nvSpPr>
@@ -26974,14 +26430,14 @@
       </p:sp>
       <p:sp>
         <p:nvSpPr>
-          <p:cNvPr id="25" name="Shape 23"/>
-          <p:cNvSpPr/>
-          <p:nvPr/>
-        </p:nvSpPr>
-        <p:spPr>
-          <a:xfrm>
-            <a:off x="2999232" y="3364992"/>
-            <a:ext cx="1645920" cy="475488"/>
+          <p:cNvPr id="28" name="Shape 26"/>
+          <p:cNvSpPr/>
+          <p:nvPr/>
+        </p:nvSpPr>
+        <p:spPr>
+          <a:xfrm>
+            <a:off x="1975104" y="3364992"/>
+            <a:ext cx="1554480" cy="475488"/>
           </a:xfrm>
           <a:prstGeom prst="rect">
             <a:avLst>
@@ -27001,14 +26457,14 @@
       </p:sp>
       <p:sp>
         <p:nvSpPr>
-          <p:cNvPr id="26" name="Text 24"/>
-          <p:cNvSpPr/>
-          <p:nvPr/>
-        </p:nvSpPr>
-        <p:spPr>
-          <a:xfrm>
-            <a:off x="2999232" y="3364992"/>
-            <a:ext cx="1645920" cy="475488"/>
+          <p:cNvPr id="29" name="Text 27"/>
+          <p:cNvSpPr/>
+          <p:nvPr/>
+        </p:nvSpPr>
+        <p:spPr>
+          <a:xfrm>
+            <a:off x="1975104" y="3364992"/>
+            <a:ext cx="1554480" cy="475488"/>
           </a:xfrm>
           <a:prstGeom prst="rect">
             <a:avLst/>
@@ -27040,14 +26496,14 @@
       </p:sp>
       <p:sp>
         <p:nvSpPr>
-          <p:cNvPr id="27" name="Text 25"/>
-          <p:cNvSpPr/>
-          <p:nvPr/>
-        </p:nvSpPr>
-        <p:spPr>
-          <a:xfrm>
-            <a:off x="4645152" y="3364992"/>
-            <a:ext cx="1097280" cy="475488"/>
+          <p:cNvPr id="30" name="Text 28"/>
+          <p:cNvSpPr/>
+          <p:nvPr/>
+        </p:nvSpPr>
+        <p:spPr>
+          <a:xfrm>
+            <a:off x="3529584" y="3364992"/>
+            <a:ext cx="73152" cy="475488"/>
           </a:xfrm>
           <a:prstGeom prst="rect">
             <a:avLst/>
@@ -27079,14 +26535,14 @@
       </p:sp>
       <p:sp>
         <p:nvSpPr>
-          <p:cNvPr id="28" name="Shape 26"/>
-          <p:cNvSpPr/>
-          <p:nvPr/>
-        </p:nvSpPr>
-        <p:spPr>
-          <a:xfrm>
-            <a:off x="5742432" y="3364992"/>
-            <a:ext cx="1645920" cy="475488"/>
+          <p:cNvPr id="31" name="Shape 29"/>
+          <p:cNvSpPr/>
+          <p:nvPr/>
+        </p:nvSpPr>
+        <p:spPr>
+          <a:xfrm>
+            <a:off x="3602736" y="3364992"/>
+            <a:ext cx="1554480" cy="475488"/>
           </a:xfrm>
           <a:prstGeom prst="rect">
             <a:avLst>
@@ -27106,14 +26562,14 @@
       </p:sp>
       <p:sp>
         <p:nvSpPr>
-          <p:cNvPr id="29" name="Text 27"/>
-          <p:cNvSpPr/>
-          <p:nvPr/>
-        </p:nvSpPr>
-        <p:spPr>
-          <a:xfrm>
-            <a:off x="5742432" y="3364992"/>
-            <a:ext cx="1645920" cy="475488"/>
+          <p:cNvPr id="32" name="Text 30"/>
+          <p:cNvSpPr/>
+          <p:nvPr/>
+        </p:nvSpPr>
+        <p:spPr>
+          <a:xfrm>
+            <a:off x="3602736" y="3364992"/>
+            <a:ext cx="1554480" cy="475488"/>
           </a:xfrm>
           <a:prstGeom prst="rect">
             <a:avLst/>
@@ -27137,7 +26593,7 @@
                 <a:ea typeface="Trebuchet MS" pitchFamily="34" charset="-122"/>
                 <a:cs typeface="Trebuchet MS" pitchFamily="34" charset="-120"/>
               </a:rPr>
-              <a:t>stop</a:t>
+              <a:t>vi</a:t>
             </a:r>
             <a:endParaRPr lang="en-US" sz="1400" dirty="0"/>
           </a:p>
@@ -27145,7 +26601,217 @@
       </p:sp>
       <p:sp>
         <p:nvSpPr>
-          <p:cNvPr id="30" name="Shape 28"/>
+          <p:cNvPr id="33" name="Text 31"/>
+          <p:cNvSpPr/>
+          <p:nvPr/>
+        </p:nvSpPr>
+        <p:spPr>
+          <a:xfrm>
+            <a:off x="5157216" y="3364992"/>
+            <a:ext cx="73152" cy="475488"/>
+          </a:xfrm>
+          <a:prstGeom prst="rect">
+            <a:avLst/>
+          </a:prstGeom>
+          <a:noFill/>
+          <a:ln/>
+        </p:spPr>
+        <p:txBody>
+          <a:bodyPr wrap="square" lIns="0" tIns="0" rIns="0" bIns="0" rtlCol="0" anchor="ctr"/>
+          <a:lstStyle/>
+          <a:p>
+            <a:pPr algn="ctr" indent="0" marL="0">
+              <a:buNone/>
+            </a:pPr>
+            <a:r>
+              <a:rPr lang="en-US" sz="1600" b="1" dirty="0">
+                <a:solidFill>
+                  <a:srgbClr val="0D9488"/>
+                </a:solidFill>
+                <a:latin typeface="Trebuchet MS" pitchFamily="34" charset="0"/>
+                <a:ea typeface="Trebuchet MS" pitchFamily="34" charset="-122"/>
+                <a:cs typeface="Trebuchet MS" pitchFamily="34" charset="-120"/>
+              </a:rPr>
+              <a:t>·</a:t>
+            </a:r>
+            <a:endParaRPr lang="en-US" sz="1600" dirty="0"/>
+          </a:p>
+        </p:txBody>
+      </p:sp>
+      <p:sp>
+        <p:nvSpPr>
+          <p:cNvPr id="34" name="Shape 32"/>
+          <p:cNvSpPr/>
+          <p:nvPr/>
+        </p:nvSpPr>
+        <p:spPr>
+          <a:xfrm>
+            <a:off x="5230368" y="3364992"/>
+            <a:ext cx="1554480" cy="475488"/>
+          </a:xfrm>
+          <a:prstGeom prst="rect">
+            <a:avLst>
+              <a:gd name="adj" fmla="val 9615"/>
+            </a:avLst>
+          </a:prstGeom>
+          <a:solidFill>
+            <a:srgbClr val="FFFFFF"/>
+          </a:solidFill>
+          <a:ln w="12700">
+            <a:solidFill>
+              <a:srgbClr val="0D9488"/>
+            </a:solidFill>
+            <a:prstDash val="solid"/>
+          </a:ln>
+        </p:spPr>
+      </p:sp>
+      <p:sp>
+        <p:nvSpPr>
+          <p:cNvPr id="35" name="Text 33"/>
+          <p:cNvSpPr/>
+          <p:nvPr/>
+        </p:nvSpPr>
+        <p:spPr>
+          <a:xfrm>
+            <a:off x="5230368" y="3364992"/>
+            <a:ext cx="1554480" cy="475488"/>
+          </a:xfrm>
+          <a:prstGeom prst="rect">
+            <a:avLst/>
+          </a:prstGeom>
+          <a:noFill/>
+          <a:ln/>
+        </p:spPr>
+        <p:txBody>
+          <a:bodyPr wrap="square" lIns="0" tIns="0" rIns="0" bIns="0" rtlCol="0" anchor="ctr"/>
+          <a:lstStyle/>
+          <a:p>
+            <a:pPr algn="ctr" indent="0" marL="0">
+              <a:buNone/>
+            </a:pPr>
+            <a:r>
+              <a:rPr lang="en-US" sz="1400" b="1" dirty="0">
+                <a:solidFill>
+                  <a:srgbClr val="0D9488"/>
+                </a:solidFill>
+                <a:latin typeface="Trebuchet MS" pitchFamily="34" charset="0"/>
+                <a:ea typeface="Trebuchet MS" pitchFamily="34" charset="-122"/>
+                <a:cs typeface="Trebuchet MS" pitchFamily="34" charset="-120"/>
+              </a:rPr>
+              <a:t>o</a:t>
+            </a:r>
+            <a:endParaRPr lang="en-US" sz="1400" dirty="0"/>
+          </a:p>
+        </p:txBody>
+      </p:sp>
+      <p:sp>
+        <p:nvSpPr>
+          <p:cNvPr id="36" name="Text 34"/>
+          <p:cNvSpPr/>
+          <p:nvPr/>
+        </p:nvSpPr>
+        <p:spPr>
+          <a:xfrm>
+            <a:off x="6784848" y="3364992"/>
+            <a:ext cx="73152" cy="475488"/>
+          </a:xfrm>
+          <a:prstGeom prst="rect">
+            <a:avLst/>
+          </a:prstGeom>
+          <a:noFill/>
+          <a:ln/>
+        </p:spPr>
+        <p:txBody>
+          <a:bodyPr wrap="square" lIns="0" tIns="0" rIns="0" bIns="0" rtlCol="0" anchor="ctr"/>
+          <a:lstStyle/>
+          <a:p>
+            <a:pPr algn="ctr" indent="0" marL="0">
+              <a:buNone/>
+            </a:pPr>
+            <a:r>
+              <a:rPr lang="en-US" sz="1600" b="1" dirty="0">
+                <a:solidFill>
+                  <a:srgbClr val="0D9488"/>
+                </a:solidFill>
+                <a:latin typeface="Trebuchet MS" pitchFamily="34" charset="0"/>
+                <a:ea typeface="Trebuchet MS" pitchFamily="34" charset="-122"/>
+                <a:cs typeface="Trebuchet MS" pitchFamily="34" charset="-120"/>
+              </a:rPr>
+              <a:t>·</a:t>
+            </a:r>
+            <a:endParaRPr lang="en-US" sz="1600" dirty="0"/>
+          </a:p>
+        </p:txBody>
+      </p:sp>
+      <p:sp>
+        <p:nvSpPr>
+          <p:cNvPr id="37" name="Shape 35"/>
+          <p:cNvSpPr/>
+          <p:nvPr/>
+        </p:nvSpPr>
+        <p:spPr>
+          <a:xfrm>
+            <a:off x="6858000" y="3364992"/>
+            <a:ext cx="1554480" cy="475488"/>
+          </a:xfrm>
+          <a:prstGeom prst="rect">
+            <a:avLst>
+              <a:gd name="adj" fmla="val 9615"/>
+            </a:avLst>
+          </a:prstGeom>
+          <a:solidFill>
+            <a:srgbClr val="FFFFFF"/>
+          </a:solidFill>
+          <a:ln w="12700">
+            <a:solidFill>
+              <a:srgbClr val="0D9488"/>
+            </a:solidFill>
+            <a:prstDash val="solid"/>
+          </a:ln>
+        </p:spPr>
+      </p:sp>
+      <p:sp>
+        <p:nvSpPr>
+          <p:cNvPr id="38" name="Text 36"/>
+          <p:cNvSpPr/>
+          <p:nvPr/>
+        </p:nvSpPr>
+        <p:spPr>
+          <a:xfrm>
+            <a:off x="6858000" y="3364992"/>
+            <a:ext cx="1554480" cy="475488"/>
+          </a:xfrm>
+          <a:prstGeom prst="rect">
+            <a:avLst/>
+          </a:prstGeom>
+          <a:noFill/>
+          <a:ln/>
+        </p:spPr>
+        <p:txBody>
+          <a:bodyPr wrap="square" lIns="0" tIns="0" rIns="0" bIns="0" rtlCol="0" anchor="ctr"/>
+          <a:lstStyle/>
+          <a:p>
+            <a:pPr algn="ctr" indent="0" marL="0">
+              <a:buNone/>
+            </a:pPr>
+            <a:r>
+              <a:rPr lang="en-US" sz="1400" b="1" dirty="0">
+                <a:solidFill>
+                  <a:srgbClr val="0D9488"/>
+                </a:solidFill>
+                <a:latin typeface="Trebuchet MS" pitchFamily="34" charset="0"/>
+                <a:ea typeface="Trebuchet MS" pitchFamily="34" charset="-122"/>
+                <a:cs typeface="Trebuchet MS" pitchFamily="34" charset="-120"/>
+              </a:rPr>
+              <a:t>lent</a:t>
+            </a:r>
+            <a:endParaRPr lang="en-US" sz="1400" dirty="0"/>
+          </a:p>
+        </p:txBody>
+      </p:sp>
+      <p:sp>
+        <p:nvSpPr>
+          <p:cNvPr id="39" name="Shape 37"/>
           <p:cNvSpPr/>
           <p:nvPr/>
         </p:nvSpPr>
@@ -27172,7 +26838,7 @@
       </p:sp>
       <p:sp>
         <p:nvSpPr>
-          <p:cNvPr id="31" name="Text 29"/>
+          <p:cNvPr id="40" name="Text 38"/>
           <p:cNvSpPr/>
           <p:nvPr/>
         </p:nvSpPr>
@@ -27211,7 +26877,7 @@
       </p:sp>
       <p:sp>
         <p:nvSpPr>
-          <p:cNvPr id="32" name="Shape 30"/>
+          <p:cNvPr id="41" name="Shape 39"/>
           <p:cNvSpPr/>
           <p:nvPr/>
         </p:nvSpPr>
@@ -27238,7 +26904,7 @@
       </p:sp>
       <p:sp>
         <p:nvSpPr>
-          <p:cNvPr id="33" name="Text 31"/>
+          <p:cNvPr id="42" name="Text 40"/>
           <p:cNvSpPr/>
           <p:nvPr/>
         </p:nvSpPr>
@@ -27700,7 +27366,7 @@
                 <a:ea typeface="Trebuchet MS" pitchFamily="34" charset="-122"/>
                 <a:cs typeface="Trebuchet MS" pitchFamily="34" charset="-120"/>
               </a:rPr>
-              <a:t>nonstop</a:t>
+              <a:t>nonviolent</a:t>
             </a:r>
             <a:endParaRPr lang="en-US" sz="2800" dirty="0"/>
           </a:p>
@@ -27780,7 +27446,7 @@
         </p:nvSpPr>
         <p:spPr>
           <a:xfrm>
-            <a:off x="2938272" y="2258568"/>
+            <a:off x="2221992" y="2258568"/>
             <a:ext cx="1828800" cy="292608"/>
           </a:xfrm>
           <a:prstGeom prst="rect">
@@ -27814,7 +27480,7 @@
         </p:nvSpPr>
         <p:spPr>
           <a:xfrm>
-            <a:off x="2938272" y="2258568"/>
+            <a:off x="2221992" y="2258568"/>
             <a:ext cx="1828800" cy="292608"/>
           </a:xfrm>
           <a:prstGeom prst="rect">
@@ -27853,7 +27519,7 @@
         </p:nvSpPr>
         <p:spPr>
           <a:xfrm>
-            <a:off x="2938272" y="2569464"/>
+            <a:off x="2221992" y="2569464"/>
             <a:ext cx="1828800" cy="201168"/>
           </a:xfrm>
           <a:prstGeom prst="rect">
@@ -27878,7 +27544,7 @@
                 <a:ea typeface="Calibri" pitchFamily="34" charset="-122"/>
                 <a:cs typeface="Calibri" pitchFamily="34" charset="-120"/>
               </a:rPr>
-              <a:t>not</a:t>
+              <a:t>not, without</a:t>
             </a:r>
             <a:endParaRPr lang="en-US" sz="850" dirty="0"/>
           </a:p>
@@ -27892,7 +27558,7 @@
         </p:nvSpPr>
         <p:spPr>
           <a:xfrm>
-            <a:off x="5803392" y="2258568"/>
+            <a:off x="4370832" y="2258568"/>
             <a:ext cx="1828800" cy="292608"/>
           </a:xfrm>
           <a:prstGeom prst="rect">
@@ -27926,7 +27592,7 @@
         </p:nvSpPr>
         <p:spPr>
           <a:xfrm>
-            <a:off x="5803392" y="2258568"/>
+            <a:off x="4370832" y="2258568"/>
             <a:ext cx="1828800" cy="292608"/>
           </a:xfrm>
           <a:prstGeom prst="rect">
@@ -27951,7 +27617,7 @@
                 <a:ea typeface="Trebuchet MS" pitchFamily="34" charset="-122"/>
                 <a:cs typeface="Trebuchet MS" pitchFamily="34" charset="-120"/>
               </a:rPr>
-              <a:t>stop</a:t>
+              <a:t>viol</a:t>
             </a:r>
             <a:endParaRPr lang="en-US" sz="1300" dirty="0"/>
           </a:p>
@@ -27965,7 +27631,7 @@
         </p:nvSpPr>
         <p:spPr>
           <a:xfrm>
-            <a:off x="5803392" y="2569464"/>
+            <a:off x="4370832" y="2569464"/>
             <a:ext cx="1828800" cy="201168"/>
           </a:xfrm>
           <a:prstGeom prst="rect">
@@ -27990,7 +27656,7 @@
                 <a:ea typeface="Calibri" pitchFamily="34" charset="-122"/>
                 <a:cs typeface="Calibri" pitchFamily="34" charset="-120"/>
               </a:rPr>
-              <a:t>cease, halt</a:t>
+              <a:t>force, harm</a:t>
             </a:r>
             <a:endParaRPr lang="en-US" sz="850" dirty="0"/>
           </a:p>
@@ -27999,6 +27665,118 @@
       <p:sp>
         <p:nvSpPr>
           <p:cNvPr id="22" name="Shape 20"/>
+          <p:cNvSpPr/>
+          <p:nvPr/>
+        </p:nvSpPr>
+        <p:spPr>
+          <a:xfrm>
+            <a:off x="6519672" y="2258568"/>
+            <a:ext cx="1828800" cy="292608"/>
+          </a:xfrm>
+          <a:prstGeom prst="rect">
+            <a:avLst>
+              <a:gd name="adj" fmla="val 25000"/>
+            </a:avLst>
+          </a:prstGeom>
+          <a:solidFill>
+            <a:srgbClr val="FCE7F3"/>
+          </a:solidFill>
+          <a:ln w="19050">
+            <a:solidFill>
+              <a:srgbClr val="DB2777"/>
+            </a:solidFill>
+            <a:prstDash val="solid"/>
+          </a:ln>
+          <a:effectLst>
+            <a:outerShdw sx="100000" sy="100000" kx="0" ky="0" algn="bl" rotWithShape="0" blurRad="101600" dist="38100" dir="8100000">
+              <a:srgbClr val="000000">
+                <a:alpha val="12000"/>
+              </a:srgbClr>
+            </a:outerShdw>
+          </a:effectLst>
+        </p:spPr>
+      </p:sp>
+      <p:sp>
+        <p:nvSpPr>
+          <p:cNvPr id="23" name="Text 21"/>
+          <p:cNvSpPr/>
+          <p:nvPr/>
+        </p:nvSpPr>
+        <p:spPr>
+          <a:xfrm>
+            <a:off x="6519672" y="2258568"/>
+            <a:ext cx="1828800" cy="292608"/>
+          </a:xfrm>
+          <a:prstGeom prst="rect">
+            <a:avLst/>
+          </a:prstGeom>
+          <a:noFill/>
+          <a:ln/>
+        </p:spPr>
+        <p:txBody>
+          <a:bodyPr wrap="square" lIns="0" tIns="0" rIns="0" bIns="0" rtlCol="0" anchor="ctr"/>
+          <a:lstStyle/>
+          <a:p>
+            <a:pPr algn="ctr" indent="0" marL="0">
+              <a:buNone/>
+            </a:pPr>
+            <a:r>
+              <a:rPr lang="en-US" sz="1300" b="1" dirty="0">
+                <a:solidFill>
+                  <a:srgbClr val="9D174D"/>
+                </a:solidFill>
+                <a:latin typeface="Trebuchet MS" pitchFamily="34" charset="0"/>
+                <a:ea typeface="Trebuchet MS" pitchFamily="34" charset="-122"/>
+                <a:cs typeface="Trebuchet MS" pitchFamily="34" charset="-120"/>
+              </a:rPr>
+              <a:t>ent</a:t>
+            </a:r>
+            <a:endParaRPr lang="en-US" sz="1300" dirty="0"/>
+          </a:p>
+        </p:txBody>
+      </p:sp>
+      <p:sp>
+        <p:nvSpPr>
+          <p:cNvPr id="24" name="Text 22"/>
+          <p:cNvSpPr/>
+          <p:nvPr/>
+        </p:nvSpPr>
+        <p:spPr>
+          <a:xfrm>
+            <a:off x="6519672" y="2569464"/>
+            <a:ext cx="1828800" cy="201168"/>
+          </a:xfrm>
+          <a:prstGeom prst="rect">
+            <a:avLst/>
+          </a:prstGeom>
+          <a:noFill/>
+          <a:ln/>
+        </p:spPr>
+        <p:txBody>
+          <a:bodyPr wrap="square" lIns="0" tIns="0" rIns="0" bIns="0" rtlCol="0" anchor="t"/>
+          <a:lstStyle/>
+          <a:p>
+            <a:pPr algn="ctr" indent="0" marL="0">
+              <a:buNone/>
+            </a:pPr>
+            <a:r>
+              <a:rPr lang="en-US" sz="850" dirty="0">
+                <a:solidFill>
+                  <a:srgbClr val="475569"/>
+                </a:solidFill>
+                <a:latin typeface="Calibri" pitchFamily="34" charset="0"/>
+                <a:ea typeface="Calibri" pitchFamily="34" charset="-122"/>
+                <a:cs typeface="Calibri" pitchFamily="34" charset="-120"/>
+              </a:rPr>
+              <a:t>having a quality</a:t>
+            </a:r>
+            <a:endParaRPr lang="en-US" sz="850" dirty="0"/>
+          </a:p>
+        </p:txBody>
+      </p:sp>
+      <p:sp>
+        <p:nvSpPr>
+          <p:cNvPr id="25" name="Shape 23"/>
           <p:cNvSpPr/>
           <p:nvPr/>
         </p:nvSpPr>
@@ -28025,7 +27803,7 @@
       </p:sp>
       <p:sp>
         <p:nvSpPr>
-          <p:cNvPr id="23" name="Text 21"/>
+          <p:cNvPr id="26" name="Text 24"/>
           <p:cNvSpPr/>
           <p:nvPr/>
         </p:nvSpPr>
@@ -28064,7 +27842,7 @@
       </p:sp>
       <p:sp>
         <p:nvSpPr>
-          <p:cNvPr id="24" name="Shape 22"/>
+          <p:cNvPr id="27" name="Shape 25"/>
           <p:cNvSpPr/>
           <p:nvPr/>
         </p:nvSpPr>
@@ -28091,14 +27869,14 @@
       </p:sp>
       <p:sp>
         <p:nvSpPr>
-          <p:cNvPr id="25" name="Shape 23"/>
-          <p:cNvSpPr/>
-          <p:nvPr/>
-        </p:nvSpPr>
-        <p:spPr>
-          <a:xfrm>
-            <a:off x="2999232" y="3364992"/>
-            <a:ext cx="1645920" cy="475488"/>
+          <p:cNvPr id="28" name="Shape 26"/>
+          <p:cNvSpPr/>
+          <p:nvPr/>
+        </p:nvSpPr>
+        <p:spPr>
+          <a:xfrm>
+            <a:off x="1975104" y="3364992"/>
+            <a:ext cx="1554480" cy="475488"/>
           </a:xfrm>
           <a:prstGeom prst="rect">
             <a:avLst>
@@ -28118,14 +27896,14 @@
       </p:sp>
       <p:sp>
         <p:nvSpPr>
-          <p:cNvPr id="26" name="Text 24"/>
-          <p:cNvSpPr/>
-          <p:nvPr/>
-        </p:nvSpPr>
-        <p:spPr>
-          <a:xfrm>
-            <a:off x="2999232" y="3364992"/>
-            <a:ext cx="1645920" cy="475488"/>
+          <p:cNvPr id="29" name="Text 27"/>
+          <p:cNvSpPr/>
+          <p:nvPr/>
+        </p:nvSpPr>
+        <p:spPr>
+          <a:xfrm>
+            <a:off x="1975104" y="3364992"/>
+            <a:ext cx="1554480" cy="475488"/>
           </a:xfrm>
           <a:prstGeom prst="rect">
             <a:avLst/>
@@ -28157,14 +27935,14 @@
       </p:sp>
       <p:sp>
         <p:nvSpPr>
-          <p:cNvPr id="27" name="Text 25"/>
-          <p:cNvSpPr/>
-          <p:nvPr/>
-        </p:nvSpPr>
-        <p:spPr>
-          <a:xfrm>
-            <a:off x="4645152" y="3364992"/>
-            <a:ext cx="1097280" cy="475488"/>
+          <p:cNvPr id="30" name="Text 28"/>
+          <p:cNvSpPr/>
+          <p:nvPr/>
+        </p:nvSpPr>
+        <p:spPr>
+          <a:xfrm>
+            <a:off x="3529584" y="3364992"/>
+            <a:ext cx="73152" cy="475488"/>
           </a:xfrm>
           <a:prstGeom prst="rect">
             <a:avLst/>
@@ -28196,14 +27974,14 @@
       </p:sp>
       <p:sp>
         <p:nvSpPr>
-          <p:cNvPr id="28" name="Shape 26"/>
-          <p:cNvSpPr/>
-          <p:nvPr/>
-        </p:nvSpPr>
-        <p:spPr>
-          <a:xfrm>
-            <a:off x="5742432" y="3364992"/>
-            <a:ext cx="1645920" cy="475488"/>
+          <p:cNvPr id="31" name="Shape 29"/>
+          <p:cNvSpPr/>
+          <p:nvPr/>
+        </p:nvSpPr>
+        <p:spPr>
+          <a:xfrm>
+            <a:off x="3602736" y="3364992"/>
+            <a:ext cx="1554480" cy="475488"/>
           </a:xfrm>
           <a:prstGeom prst="rect">
             <a:avLst>
@@ -28223,14 +28001,14 @@
       </p:sp>
       <p:sp>
         <p:nvSpPr>
-          <p:cNvPr id="29" name="Text 27"/>
-          <p:cNvSpPr/>
-          <p:nvPr/>
-        </p:nvSpPr>
-        <p:spPr>
-          <a:xfrm>
-            <a:off x="5742432" y="3364992"/>
-            <a:ext cx="1645920" cy="475488"/>
+          <p:cNvPr id="32" name="Text 30"/>
+          <p:cNvSpPr/>
+          <p:nvPr/>
+        </p:nvSpPr>
+        <p:spPr>
+          <a:xfrm>
+            <a:off x="3602736" y="3364992"/>
+            <a:ext cx="1554480" cy="475488"/>
           </a:xfrm>
           <a:prstGeom prst="rect">
             <a:avLst/>
@@ -28254,7 +28032,7 @@
                 <a:ea typeface="Trebuchet MS" pitchFamily="34" charset="-122"/>
                 <a:cs typeface="Trebuchet MS" pitchFamily="34" charset="-120"/>
               </a:rPr>
-              <a:t>stop</a:t>
+              <a:t>vi</a:t>
             </a:r>
             <a:endParaRPr lang="en-US" sz="1400" dirty="0"/>
           </a:p>
@@ -28262,7 +28040,217 @@
       </p:sp>
       <p:sp>
         <p:nvSpPr>
-          <p:cNvPr id="30" name="Shape 28"/>
+          <p:cNvPr id="33" name="Text 31"/>
+          <p:cNvSpPr/>
+          <p:nvPr/>
+        </p:nvSpPr>
+        <p:spPr>
+          <a:xfrm>
+            <a:off x="5157216" y="3364992"/>
+            <a:ext cx="73152" cy="475488"/>
+          </a:xfrm>
+          <a:prstGeom prst="rect">
+            <a:avLst/>
+          </a:prstGeom>
+          <a:noFill/>
+          <a:ln/>
+        </p:spPr>
+        <p:txBody>
+          <a:bodyPr wrap="square" lIns="0" tIns="0" rIns="0" bIns="0" rtlCol="0" anchor="ctr"/>
+          <a:lstStyle/>
+          <a:p>
+            <a:pPr algn="ctr" indent="0" marL="0">
+              <a:buNone/>
+            </a:pPr>
+            <a:r>
+              <a:rPr lang="en-US" sz="1600" b="1" dirty="0">
+                <a:solidFill>
+                  <a:srgbClr val="0D9488"/>
+                </a:solidFill>
+                <a:latin typeface="Trebuchet MS" pitchFamily="34" charset="0"/>
+                <a:ea typeface="Trebuchet MS" pitchFamily="34" charset="-122"/>
+                <a:cs typeface="Trebuchet MS" pitchFamily="34" charset="-120"/>
+              </a:rPr>
+              <a:t>·</a:t>
+            </a:r>
+            <a:endParaRPr lang="en-US" sz="1600" dirty="0"/>
+          </a:p>
+        </p:txBody>
+      </p:sp>
+      <p:sp>
+        <p:nvSpPr>
+          <p:cNvPr id="34" name="Shape 32"/>
+          <p:cNvSpPr/>
+          <p:nvPr/>
+        </p:nvSpPr>
+        <p:spPr>
+          <a:xfrm>
+            <a:off x="5230368" y="3364992"/>
+            <a:ext cx="1554480" cy="475488"/>
+          </a:xfrm>
+          <a:prstGeom prst="rect">
+            <a:avLst>
+              <a:gd name="adj" fmla="val 9615"/>
+            </a:avLst>
+          </a:prstGeom>
+          <a:solidFill>
+            <a:srgbClr val="FFFFFF"/>
+          </a:solidFill>
+          <a:ln w="12700">
+            <a:solidFill>
+              <a:srgbClr val="0D9488"/>
+            </a:solidFill>
+            <a:prstDash val="solid"/>
+          </a:ln>
+        </p:spPr>
+      </p:sp>
+      <p:sp>
+        <p:nvSpPr>
+          <p:cNvPr id="35" name="Text 33"/>
+          <p:cNvSpPr/>
+          <p:nvPr/>
+        </p:nvSpPr>
+        <p:spPr>
+          <a:xfrm>
+            <a:off x="5230368" y="3364992"/>
+            <a:ext cx="1554480" cy="475488"/>
+          </a:xfrm>
+          <a:prstGeom prst="rect">
+            <a:avLst/>
+          </a:prstGeom>
+          <a:noFill/>
+          <a:ln/>
+        </p:spPr>
+        <p:txBody>
+          <a:bodyPr wrap="square" lIns="0" tIns="0" rIns="0" bIns="0" rtlCol="0" anchor="ctr"/>
+          <a:lstStyle/>
+          <a:p>
+            <a:pPr algn="ctr" indent="0" marL="0">
+              <a:buNone/>
+            </a:pPr>
+            <a:r>
+              <a:rPr lang="en-US" sz="1400" b="1" dirty="0">
+                <a:solidFill>
+                  <a:srgbClr val="0D9488"/>
+                </a:solidFill>
+                <a:latin typeface="Trebuchet MS" pitchFamily="34" charset="0"/>
+                <a:ea typeface="Trebuchet MS" pitchFamily="34" charset="-122"/>
+                <a:cs typeface="Trebuchet MS" pitchFamily="34" charset="-120"/>
+              </a:rPr>
+              <a:t>o</a:t>
+            </a:r>
+            <a:endParaRPr lang="en-US" sz="1400" dirty="0"/>
+          </a:p>
+        </p:txBody>
+      </p:sp>
+      <p:sp>
+        <p:nvSpPr>
+          <p:cNvPr id="36" name="Text 34"/>
+          <p:cNvSpPr/>
+          <p:nvPr/>
+        </p:nvSpPr>
+        <p:spPr>
+          <a:xfrm>
+            <a:off x="6784848" y="3364992"/>
+            <a:ext cx="73152" cy="475488"/>
+          </a:xfrm>
+          <a:prstGeom prst="rect">
+            <a:avLst/>
+          </a:prstGeom>
+          <a:noFill/>
+          <a:ln/>
+        </p:spPr>
+        <p:txBody>
+          <a:bodyPr wrap="square" lIns="0" tIns="0" rIns="0" bIns="0" rtlCol="0" anchor="ctr"/>
+          <a:lstStyle/>
+          <a:p>
+            <a:pPr algn="ctr" indent="0" marL="0">
+              <a:buNone/>
+            </a:pPr>
+            <a:r>
+              <a:rPr lang="en-US" sz="1600" b="1" dirty="0">
+                <a:solidFill>
+                  <a:srgbClr val="0D9488"/>
+                </a:solidFill>
+                <a:latin typeface="Trebuchet MS" pitchFamily="34" charset="0"/>
+                <a:ea typeface="Trebuchet MS" pitchFamily="34" charset="-122"/>
+                <a:cs typeface="Trebuchet MS" pitchFamily="34" charset="-120"/>
+              </a:rPr>
+              <a:t>·</a:t>
+            </a:r>
+            <a:endParaRPr lang="en-US" sz="1600" dirty="0"/>
+          </a:p>
+        </p:txBody>
+      </p:sp>
+      <p:sp>
+        <p:nvSpPr>
+          <p:cNvPr id="37" name="Shape 35"/>
+          <p:cNvSpPr/>
+          <p:nvPr/>
+        </p:nvSpPr>
+        <p:spPr>
+          <a:xfrm>
+            <a:off x="6858000" y="3364992"/>
+            <a:ext cx="1554480" cy="475488"/>
+          </a:xfrm>
+          <a:prstGeom prst="rect">
+            <a:avLst>
+              <a:gd name="adj" fmla="val 9615"/>
+            </a:avLst>
+          </a:prstGeom>
+          <a:solidFill>
+            <a:srgbClr val="FFFFFF"/>
+          </a:solidFill>
+          <a:ln w="12700">
+            <a:solidFill>
+              <a:srgbClr val="0D9488"/>
+            </a:solidFill>
+            <a:prstDash val="solid"/>
+          </a:ln>
+        </p:spPr>
+      </p:sp>
+      <p:sp>
+        <p:nvSpPr>
+          <p:cNvPr id="38" name="Text 36"/>
+          <p:cNvSpPr/>
+          <p:nvPr/>
+        </p:nvSpPr>
+        <p:spPr>
+          <a:xfrm>
+            <a:off x="6858000" y="3364992"/>
+            <a:ext cx="1554480" cy="475488"/>
+          </a:xfrm>
+          <a:prstGeom prst="rect">
+            <a:avLst/>
+          </a:prstGeom>
+          <a:noFill/>
+          <a:ln/>
+        </p:spPr>
+        <p:txBody>
+          <a:bodyPr wrap="square" lIns="0" tIns="0" rIns="0" bIns="0" rtlCol="0" anchor="ctr"/>
+          <a:lstStyle/>
+          <a:p>
+            <a:pPr algn="ctr" indent="0" marL="0">
+              <a:buNone/>
+            </a:pPr>
+            <a:r>
+              <a:rPr lang="en-US" sz="1400" b="1" dirty="0">
+                <a:solidFill>
+                  <a:srgbClr val="0D9488"/>
+                </a:solidFill>
+                <a:latin typeface="Trebuchet MS" pitchFamily="34" charset="0"/>
+                <a:ea typeface="Trebuchet MS" pitchFamily="34" charset="-122"/>
+                <a:cs typeface="Trebuchet MS" pitchFamily="34" charset="-120"/>
+              </a:rPr>
+              <a:t>lent</a:t>
+            </a:r>
+            <a:endParaRPr lang="en-US" sz="1400" dirty="0"/>
+          </a:p>
+        </p:txBody>
+      </p:sp>
+      <p:sp>
+        <p:nvSpPr>
+          <p:cNvPr id="39" name="Shape 37"/>
           <p:cNvSpPr/>
           <p:nvPr/>
         </p:nvSpPr>
@@ -28289,7 +28277,7 @@
       </p:sp>
       <p:sp>
         <p:nvSpPr>
-          <p:cNvPr id="31" name="Text 29"/>
+          <p:cNvPr id="40" name="Text 38"/>
           <p:cNvSpPr/>
           <p:nvPr/>
         </p:nvSpPr>
@@ -28328,7 +28316,7 @@
       </p:sp>
       <p:sp>
         <p:nvSpPr>
-          <p:cNvPr id="32" name="Shape 30"/>
+          <p:cNvPr id="41" name="Shape 39"/>
           <p:cNvSpPr/>
           <p:nvPr/>
         </p:nvSpPr>
@@ -28355,14 +28343,14 @@
       </p:sp>
       <p:sp>
         <p:nvSpPr>
-          <p:cNvPr id="33" name="Shape 31"/>
-          <p:cNvSpPr/>
-          <p:nvPr/>
-        </p:nvSpPr>
-        <p:spPr>
-          <a:xfrm>
-            <a:off x="2124837" y="4169664"/>
-            <a:ext cx="685800" cy="475488"/>
+          <p:cNvPr id="42" name="Shape 40"/>
+          <p:cNvSpPr/>
+          <p:nvPr/>
+        </p:nvSpPr>
+        <p:spPr>
+          <a:xfrm>
+            <a:off x="1951828" y="4169664"/>
+            <a:ext cx="603504" cy="475488"/>
           </a:xfrm>
           <a:prstGeom prst="rect">
             <a:avLst>
@@ -28382,14 +28370,14 @@
       </p:sp>
       <p:sp>
         <p:nvSpPr>
-          <p:cNvPr id="34" name="Text 32"/>
-          <p:cNvSpPr/>
-          <p:nvPr/>
-        </p:nvSpPr>
-        <p:spPr>
-          <a:xfrm>
-            <a:off x="2124837" y="4169664"/>
-            <a:ext cx="685800" cy="475488"/>
+          <p:cNvPr id="43" name="Text 41"/>
+          <p:cNvSpPr/>
+          <p:nvPr/>
+        </p:nvSpPr>
+        <p:spPr>
+          <a:xfrm>
+            <a:off x="1951828" y="4169664"/>
+            <a:ext cx="603504" cy="475488"/>
           </a:xfrm>
           <a:prstGeom prst="rect">
             <a:avLst/>
@@ -28421,14 +28409,14 @@
       </p:sp>
       <p:sp>
         <p:nvSpPr>
-          <p:cNvPr id="35" name="Shape 33"/>
-          <p:cNvSpPr/>
-          <p:nvPr/>
-        </p:nvSpPr>
-        <p:spPr>
-          <a:xfrm>
-            <a:off x="3033522" y="4169664"/>
-            <a:ext cx="685800" cy="475488"/>
+          <p:cNvPr id="44" name="Shape 42"/>
+          <p:cNvSpPr/>
+          <p:nvPr/>
+        </p:nvSpPr>
+        <p:spPr>
+          <a:xfrm>
+            <a:off x="2605209" y="4169664"/>
+            <a:ext cx="603504" cy="475488"/>
           </a:xfrm>
           <a:prstGeom prst="rect">
             <a:avLst>
@@ -28448,14 +28436,14 @@
       </p:sp>
       <p:sp>
         <p:nvSpPr>
-          <p:cNvPr id="36" name="Text 34"/>
-          <p:cNvSpPr/>
-          <p:nvPr/>
-        </p:nvSpPr>
-        <p:spPr>
-          <a:xfrm>
-            <a:off x="3033522" y="4169664"/>
-            <a:ext cx="685800" cy="475488"/>
+          <p:cNvPr id="45" name="Text 43"/>
+          <p:cNvSpPr/>
+          <p:nvPr/>
+        </p:nvSpPr>
+        <p:spPr>
+          <a:xfrm>
+            <a:off x="2605209" y="4169664"/>
+            <a:ext cx="603504" cy="475488"/>
           </a:xfrm>
           <a:prstGeom prst="rect">
             <a:avLst/>
@@ -28487,14 +28475,14 @@
       </p:sp>
       <p:sp>
         <p:nvSpPr>
-          <p:cNvPr id="37" name="Shape 35"/>
-          <p:cNvSpPr/>
-          <p:nvPr/>
-        </p:nvSpPr>
-        <p:spPr>
-          <a:xfrm>
-            <a:off x="3942207" y="4169664"/>
-            <a:ext cx="685800" cy="475488"/>
+          <p:cNvPr id="46" name="Shape 44"/>
+          <p:cNvSpPr/>
+          <p:nvPr/>
+        </p:nvSpPr>
+        <p:spPr>
+          <a:xfrm>
+            <a:off x="3258589" y="4169664"/>
+            <a:ext cx="603504" cy="475488"/>
           </a:xfrm>
           <a:prstGeom prst="rect">
             <a:avLst>
@@ -28514,14 +28502,14 @@
       </p:sp>
       <p:sp>
         <p:nvSpPr>
-          <p:cNvPr id="38" name="Text 36"/>
-          <p:cNvSpPr/>
-          <p:nvPr/>
-        </p:nvSpPr>
-        <p:spPr>
-          <a:xfrm>
-            <a:off x="3942207" y="4169664"/>
-            <a:ext cx="685800" cy="475488"/>
+          <p:cNvPr id="47" name="Text 45"/>
+          <p:cNvSpPr/>
+          <p:nvPr/>
+        </p:nvSpPr>
+        <p:spPr>
+          <a:xfrm>
+            <a:off x="3258589" y="4169664"/>
+            <a:ext cx="603504" cy="475488"/>
           </a:xfrm>
           <a:prstGeom prst="rect">
             <a:avLst/>
@@ -28553,14 +28541,14 @@
       </p:sp>
       <p:sp>
         <p:nvSpPr>
-          <p:cNvPr id="39" name="Shape 37"/>
-          <p:cNvSpPr/>
-          <p:nvPr/>
-        </p:nvSpPr>
-        <p:spPr>
-          <a:xfrm>
-            <a:off x="4850892" y="4169664"/>
-            <a:ext cx="685800" cy="475488"/>
+          <p:cNvPr id="48" name="Shape 46"/>
+          <p:cNvSpPr/>
+          <p:nvPr/>
+        </p:nvSpPr>
+        <p:spPr>
+          <a:xfrm>
+            <a:off x="3911969" y="4169664"/>
+            <a:ext cx="603504" cy="475488"/>
           </a:xfrm>
           <a:prstGeom prst="rect">
             <a:avLst>
@@ -28580,14 +28568,14 @@
       </p:sp>
       <p:sp>
         <p:nvSpPr>
-          <p:cNvPr id="40" name="Text 38"/>
-          <p:cNvSpPr/>
-          <p:nvPr/>
-        </p:nvSpPr>
-        <p:spPr>
-          <a:xfrm>
-            <a:off x="4850892" y="4169664"/>
-            <a:ext cx="685800" cy="475488"/>
+          <p:cNvPr id="49" name="Text 47"/>
+          <p:cNvSpPr/>
+          <p:nvPr/>
+        </p:nvSpPr>
+        <p:spPr>
+          <a:xfrm>
+            <a:off x="3911969" y="4169664"/>
+            <a:ext cx="603504" cy="475488"/>
           </a:xfrm>
           <a:prstGeom prst="rect">
             <a:avLst/>
@@ -28611,7 +28599,7 @@
                 <a:ea typeface="Trebuchet MS" pitchFamily="34" charset="-122"/>
                 <a:cs typeface="Trebuchet MS" pitchFamily="34" charset="-120"/>
               </a:rPr>
-              <a:t>s</a:t>
+              <a:t>v</a:t>
             </a:r>
             <a:endParaRPr lang="en-US" sz="900" dirty="0"/>
           </a:p>
@@ -28619,14 +28607,14 @@
       </p:sp>
       <p:sp>
         <p:nvSpPr>
-          <p:cNvPr id="41" name="Shape 39"/>
-          <p:cNvSpPr/>
-          <p:nvPr/>
-        </p:nvSpPr>
-        <p:spPr>
-          <a:xfrm>
-            <a:off x="5759577" y="4169664"/>
-            <a:ext cx="685800" cy="475488"/>
+          <p:cNvPr id="50" name="Shape 48"/>
+          <p:cNvSpPr/>
+          <p:nvPr/>
+        </p:nvSpPr>
+        <p:spPr>
+          <a:xfrm>
+            <a:off x="4565350" y="4169664"/>
+            <a:ext cx="603504" cy="475488"/>
           </a:xfrm>
           <a:prstGeom prst="rect">
             <a:avLst>
@@ -28646,14 +28634,14 @@
       </p:sp>
       <p:sp>
         <p:nvSpPr>
-          <p:cNvPr id="42" name="Text 40"/>
-          <p:cNvSpPr/>
-          <p:nvPr/>
-        </p:nvSpPr>
-        <p:spPr>
-          <a:xfrm>
-            <a:off x="5759577" y="4169664"/>
-            <a:ext cx="685800" cy="475488"/>
+          <p:cNvPr id="51" name="Text 49"/>
+          <p:cNvSpPr/>
+          <p:nvPr/>
+        </p:nvSpPr>
+        <p:spPr>
+          <a:xfrm>
+            <a:off x="4565350" y="4169664"/>
+            <a:ext cx="603504" cy="475488"/>
           </a:xfrm>
           <a:prstGeom prst="rect">
             <a:avLst/>
@@ -28677,7 +28665,7 @@
                 <a:ea typeface="Trebuchet MS" pitchFamily="34" charset="-122"/>
                 <a:cs typeface="Trebuchet MS" pitchFamily="34" charset="-120"/>
               </a:rPr>
-              <a:t>t</a:t>
+              <a:t>i</a:t>
             </a:r>
             <a:endParaRPr lang="en-US" sz="900" dirty="0"/>
           </a:p>
@@ -28685,14 +28673,14 @@
       </p:sp>
       <p:sp>
         <p:nvSpPr>
-          <p:cNvPr id="43" name="Shape 41"/>
-          <p:cNvSpPr/>
-          <p:nvPr/>
-        </p:nvSpPr>
-        <p:spPr>
-          <a:xfrm>
-            <a:off x="6668262" y="4169664"/>
-            <a:ext cx="685800" cy="475488"/>
+          <p:cNvPr id="52" name="Shape 50"/>
+          <p:cNvSpPr/>
+          <p:nvPr/>
+        </p:nvSpPr>
+        <p:spPr>
+          <a:xfrm>
+            <a:off x="5218730" y="4169664"/>
+            <a:ext cx="603504" cy="475488"/>
           </a:xfrm>
           <a:prstGeom prst="rect">
             <a:avLst>
@@ -28712,14 +28700,14 @@
       </p:sp>
       <p:sp>
         <p:nvSpPr>
-          <p:cNvPr id="44" name="Text 42"/>
-          <p:cNvSpPr/>
-          <p:nvPr/>
-        </p:nvSpPr>
-        <p:spPr>
-          <a:xfrm>
-            <a:off x="6668262" y="4169664"/>
-            <a:ext cx="685800" cy="475488"/>
+          <p:cNvPr id="53" name="Text 51"/>
+          <p:cNvSpPr/>
+          <p:nvPr/>
+        </p:nvSpPr>
+        <p:spPr>
+          <a:xfrm>
+            <a:off x="5218730" y="4169664"/>
+            <a:ext cx="603504" cy="475488"/>
           </a:xfrm>
           <a:prstGeom prst="rect">
             <a:avLst/>
@@ -28751,14 +28739,14 @@
       </p:sp>
       <p:sp>
         <p:nvSpPr>
-          <p:cNvPr id="45" name="Shape 43"/>
-          <p:cNvSpPr/>
-          <p:nvPr/>
-        </p:nvSpPr>
-        <p:spPr>
-          <a:xfrm>
-            <a:off x="7576947" y="4169664"/>
-            <a:ext cx="685800" cy="475488"/>
+          <p:cNvPr id="54" name="Shape 52"/>
+          <p:cNvSpPr/>
+          <p:nvPr/>
+        </p:nvSpPr>
+        <p:spPr>
+          <a:xfrm>
+            <a:off x="5872111" y="4169664"/>
+            <a:ext cx="603504" cy="475488"/>
           </a:xfrm>
           <a:prstGeom prst="rect">
             <a:avLst>
@@ -28778,14 +28766,14 @@
       </p:sp>
       <p:sp>
         <p:nvSpPr>
-          <p:cNvPr id="46" name="Text 44"/>
-          <p:cNvSpPr/>
-          <p:nvPr/>
-        </p:nvSpPr>
-        <p:spPr>
-          <a:xfrm>
-            <a:off x="7576947" y="4169664"/>
-            <a:ext cx="685800" cy="475488"/>
+          <p:cNvPr id="55" name="Text 53"/>
+          <p:cNvSpPr/>
+          <p:nvPr/>
+        </p:nvSpPr>
+        <p:spPr>
+          <a:xfrm>
+            <a:off x="5872111" y="4169664"/>
+            <a:ext cx="603504" cy="475488"/>
           </a:xfrm>
           <a:prstGeom prst="rect">
             <a:avLst/>
@@ -28809,7 +28797,205 @@
                 <a:ea typeface="Trebuchet MS" pitchFamily="34" charset="-122"/>
                 <a:cs typeface="Trebuchet MS" pitchFamily="34" charset="-120"/>
               </a:rPr>
-              <a:t>p</a:t>
+              <a:t>l</a:t>
+            </a:r>
+            <a:endParaRPr lang="en-US" sz="900" dirty="0"/>
+          </a:p>
+        </p:txBody>
+      </p:sp>
+      <p:sp>
+        <p:nvSpPr>
+          <p:cNvPr id="56" name="Shape 54"/>
+          <p:cNvSpPr/>
+          <p:nvPr/>
+        </p:nvSpPr>
+        <p:spPr>
+          <a:xfrm>
+            <a:off x="6525491" y="4169664"/>
+            <a:ext cx="603504" cy="475488"/>
+          </a:xfrm>
+          <a:prstGeom prst="rect">
+            <a:avLst>
+              <a:gd name="adj" fmla="val 7692"/>
+            </a:avLst>
+          </a:prstGeom>
+          <a:solidFill>
+            <a:srgbClr val="FFFFFF"/>
+          </a:solidFill>
+          <a:ln w="12700">
+            <a:solidFill>
+              <a:srgbClr val="DB2777"/>
+            </a:solidFill>
+            <a:prstDash val="solid"/>
+          </a:ln>
+        </p:spPr>
+      </p:sp>
+      <p:sp>
+        <p:nvSpPr>
+          <p:cNvPr id="57" name="Text 55"/>
+          <p:cNvSpPr/>
+          <p:nvPr/>
+        </p:nvSpPr>
+        <p:spPr>
+          <a:xfrm>
+            <a:off x="6525491" y="4169664"/>
+            <a:ext cx="603504" cy="475488"/>
+          </a:xfrm>
+          <a:prstGeom prst="rect">
+            <a:avLst/>
+          </a:prstGeom>
+          <a:noFill/>
+          <a:ln/>
+        </p:spPr>
+        <p:txBody>
+          <a:bodyPr wrap="square" lIns="0" tIns="0" rIns="0" bIns="0" rtlCol="0" anchor="ctr"/>
+          <a:lstStyle/>
+          <a:p>
+            <a:pPr algn="ctr" indent="0" marL="0">
+              <a:buNone/>
+            </a:pPr>
+            <a:r>
+              <a:rPr lang="en-US" sz="900" b="1" dirty="0">
+                <a:solidFill>
+                  <a:srgbClr val="9D174D"/>
+                </a:solidFill>
+                <a:latin typeface="Trebuchet MS" pitchFamily="34" charset="0"/>
+                <a:ea typeface="Trebuchet MS" pitchFamily="34" charset="-122"/>
+                <a:cs typeface="Trebuchet MS" pitchFamily="34" charset="-120"/>
+              </a:rPr>
+              <a:t>e</a:t>
+            </a:r>
+            <a:endParaRPr lang="en-US" sz="900" dirty="0"/>
+          </a:p>
+        </p:txBody>
+      </p:sp>
+      <p:sp>
+        <p:nvSpPr>
+          <p:cNvPr id="58" name="Shape 56"/>
+          <p:cNvSpPr/>
+          <p:nvPr/>
+        </p:nvSpPr>
+        <p:spPr>
+          <a:xfrm>
+            <a:off x="7178871" y="4169664"/>
+            <a:ext cx="603504" cy="475488"/>
+          </a:xfrm>
+          <a:prstGeom prst="rect">
+            <a:avLst>
+              <a:gd name="adj" fmla="val 7692"/>
+            </a:avLst>
+          </a:prstGeom>
+          <a:solidFill>
+            <a:srgbClr val="FFFFFF"/>
+          </a:solidFill>
+          <a:ln w="12700">
+            <a:solidFill>
+              <a:srgbClr val="DB2777"/>
+            </a:solidFill>
+            <a:prstDash val="solid"/>
+          </a:ln>
+        </p:spPr>
+      </p:sp>
+      <p:sp>
+        <p:nvSpPr>
+          <p:cNvPr id="59" name="Text 57"/>
+          <p:cNvSpPr/>
+          <p:nvPr/>
+        </p:nvSpPr>
+        <p:spPr>
+          <a:xfrm>
+            <a:off x="7178871" y="4169664"/>
+            <a:ext cx="603504" cy="475488"/>
+          </a:xfrm>
+          <a:prstGeom prst="rect">
+            <a:avLst/>
+          </a:prstGeom>
+          <a:noFill/>
+          <a:ln/>
+        </p:spPr>
+        <p:txBody>
+          <a:bodyPr wrap="square" lIns="0" tIns="0" rIns="0" bIns="0" rtlCol="0" anchor="ctr"/>
+          <a:lstStyle/>
+          <a:p>
+            <a:pPr algn="ctr" indent="0" marL="0">
+              <a:buNone/>
+            </a:pPr>
+            <a:r>
+              <a:rPr lang="en-US" sz="900" b="1" dirty="0">
+                <a:solidFill>
+                  <a:srgbClr val="9D174D"/>
+                </a:solidFill>
+                <a:latin typeface="Trebuchet MS" pitchFamily="34" charset="0"/>
+                <a:ea typeface="Trebuchet MS" pitchFamily="34" charset="-122"/>
+                <a:cs typeface="Trebuchet MS" pitchFamily="34" charset="-120"/>
+              </a:rPr>
+              <a:t>n</a:t>
+            </a:r>
+            <a:endParaRPr lang="en-US" sz="900" dirty="0"/>
+          </a:p>
+        </p:txBody>
+      </p:sp>
+      <p:sp>
+        <p:nvSpPr>
+          <p:cNvPr id="60" name="Shape 58"/>
+          <p:cNvSpPr/>
+          <p:nvPr/>
+        </p:nvSpPr>
+        <p:spPr>
+          <a:xfrm>
+            <a:off x="7832252" y="4169664"/>
+            <a:ext cx="603504" cy="475488"/>
+          </a:xfrm>
+          <a:prstGeom prst="rect">
+            <a:avLst>
+              <a:gd name="adj" fmla="val 7692"/>
+            </a:avLst>
+          </a:prstGeom>
+          <a:solidFill>
+            <a:srgbClr val="FFFFFF"/>
+          </a:solidFill>
+          <a:ln w="12700">
+            <a:solidFill>
+              <a:srgbClr val="DB2777"/>
+            </a:solidFill>
+            <a:prstDash val="solid"/>
+          </a:ln>
+        </p:spPr>
+      </p:sp>
+      <p:sp>
+        <p:nvSpPr>
+          <p:cNvPr id="61" name="Text 59"/>
+          <p:cNvSpPr/>
+          <p:nvPr/>
+        </p:nvSpPr>
+        <p:spPr>
+          <a:xfrm>
+            <a:off x="7832252" y="4169664"/>
+            <a:ext cx="603504" cy="475488"/>
+          </a:xfrm>
+          <a:prstGeom prst="rect">
+            <a:avLst/>
+          </a:prstGeom>
+          <a:noFill/>
+          <a:ln/>
+        </p:spPr>
+        <p:txBody>
+          <a:bodyPr wrap="square" lIns="0" tIns="0" rIns="0" bIns="0" rtlCol="0" anchor="ctr"/>
+          <a:lstStyle/>
+          <a:p>
+            <a:pPr algn="ctr" indent="0" marL="0">
+              <a:buNone/>
+            </a:pPr>
+            <a:r>
+              <a:rPr lang="en-US" sz="900" b="1" dirty="0">
+                <a:solidFill>
+                  <a:srgbClr val="9D174D"/>
+                </a:solidFill>
+                <a:latin typeface="Trebuchet MS" pitchFamily="34" charset="0"/>
+                <a:ea typeface="Trebuchet MS" pitchFamily="34" charset="-122"/>
+                <a:cs typeface="Trebuchet MS" pitchFamily="34" charset="-120"/>
+              </a:rPr>
+              <a:t>t</a:t>
             </a:r>
             <a:endParaRPr lang="en-US" sz="900" dirty="0"/>
           </a:p>
@@ -29240,7 +29426,7 @@
                 <a:ea typeface="Trebuchet MS" pitchFamily="34" charset="-122"/>
                 <a:cs typeface="Trebuchet MS" pitchFamily="34" charset="-120"/>
               </a:rPr>
-              <a:t>nonviolent</a:t>
+              <a:t>nonfiction</a:t>
             </a:r>
             <a:endParaRPr lang="en-US" sz="2800" dirty="0"/>
           </a:p>
@@ -30067,7 +30253,7 @@
                 <a:ea typeface="Trebuchet MS" pitchFamily="34" charset="-122"/>
                 <a:cs typeface="Trebuchet MS" pitchFamily="34" charset="-120"/>
               </a:rPr>
-              <a:t>nonviolent</a:t>
+              <a:t>nonfiction</a:t>
             </a:r>
             <a:endParaRPr lang="en-US" sz="2800" dirty="0"/>
           </a:p>
@@ -30245,7 +30431,7 @@
                 <a:ea typeface="Calibri" pitchFamily="34" charset="-122"/>
                 <a:cs typeface="Calibri" pitchFamily="34" charset="-120"/>
               </a:rPr>
-              <a:t>not</a:t>
+              <a:t>not, without</a:t>
             </a:r>
             <a:endParaRPr lang="en-US" sz="850" dirty="0"/>
           </a:p>
@@ -30318,7 +30504,7 @@
                 <a:ea typeface="Trebuchet MS" pitchFamily="34" charset="-122"/>
                 <a:cs typeface="Trebuchet MS" pitchFamily="34" charset="-120"/>
               </a:rPr>
-              <a:t>viol</a:t>
+              <a:t>fict</a:t>
             </a:r>
             <a:endParaRPr lang="en-US" sz="1300" dirty="0"/>
           </a:p>
@@ -30357,7 +30543,7 @@
                 <a:ea typeface="Calibri" pitchFamily="34" charset="-122"/>
                 <a:cs typeface="Calibri" pitchFamily="34" charset="-120"/>
               </a:rPr>
-              <a:t>force, harm</a:t>
+              <a:t>to make up, invent</a:t>
             </a:r>
             <a:endParaRPr lang="en-US" sz="850" dirty="0"/>
           </a:p>
@@ -30430,7 +30616,7 @@
                 <a:ea typeface="Trebuchet MS" pitchFamily="34" charset="-122"/>
                 <a:cs typeface="Trebuchet MS" pitchFamily="34" charset="-120"/>
               </a:rPr>
-              <a:t>ent</a:t>
+              <a:t>ion</a:t>
             </a:r>
             <a:endParaRPr lang="en-US" sz="1300" dirty="0"/>
           </a:p>
@@ -30469,7 +30655,7 @@
                 <a:ea typeface="Calibri" pitchFamily="34" charset="-122"/>
                 <a:cs typeface="Calibri" pitchFamily="34" charset="-120"/>
               </a:rPr>
-              <a:t>having a quality</a:t>
+              <a:t>state or result of</a:t>
             </a:r>
             <a:endParaRPr lang="en-US" sz="850" dirty="0"/>
           </a:p>
@@ -31164,7 +31350,7 @@
                 <a:ea typeface="Trebuchet MS" pitchFamily="34" charset="-122"/>
                 <a:cs typeface="Trebuchet MS" pitchFamily="34" charset="-120"/>
               </a:rPr>
-              <a:t>nonviolent</a:t>
+              <a:t>nonfiction</a:t>
             </a:r>
             <a:endParaRPr lang="en-US" sz="2800" dirty="0"/>
           </a:p>
@@ -31342,7 +31528,7 @@
                 <a:ea typeface="Calibri" pitchFamily="34" charset="-122"/>
                 <a:cs typeface="Calibri" pitchFamily="34" charset="-120"/>
               </a:rPr>
-              <a:t>not</a:t>
+              <a:t>not, without</a:t>
             </a:r>
             <a:endParaRPr lang="en-US" sz="850" dirty="0"/>
           </a:p>
@@ -31415,7 +31601,7 @@
                 <a:ea typeface="Trebuchet MS" pitchFamily="34" charset="-122"/>
                 <a:cs typeface="Trebuchet MS" pitchFamily="34" charset="-120"/>
               </a:rPr>
-              <a:t>viol</a:t>
+              <a:t>fict</a:t>
             </a:r>
             <a:endParaRPr lang="en-US" sz="1300" dirty="0"/>
           </a:p>
@@ -31454,7 +31640,7 @@
                 <a:ea typeface="Calibri" pitchFamily="34" charset="-122"/>
                 <a:cs typeface="Calibri" pitchFamily="34" charset="-120"/>
               </a:rPr>
-              <a:t>force, harm</a:t>
+              <a:t>to make up, invent</a:t>
             </a:r>
             <a:endParaRPr lang="en-US" sz="850" dirty="0"/>
           </a:p>
@@ -31527,7 +31713,7 @@
                 <a:ea typeface="Trebuchet MS" pitchFamily="34" charset="-122"/>
                 <a:cs typeface="Trebuchet MS" pitchFamily="34" charset="-120"/>
               </a:rPr>
-              <a:t>ent</a:t>
+              <a:t>ion</a:t>
             </a:r>
             <a:endParaRPr lang="en-US" sz="1300" dirty="0"/>
           </a:p>
@@ -31566,7 +31752,7 @@
                 <a:ea typeface="Calibri" pitchFamily="34" charset="-122"/>
                 <a:cs typeface="Calibri" pitchFamily="34" charset="-120"/>
               </a:rPr>
-              <a:t>having a quality</a:t>
+              <a:t>state or result of</a:t>
             </a:r>
             <a:endParaRPr lang="en-US" sz="850" dirty="0"/>
           </a:p>
@@ -31673,8 +31859,8 @@
         </p:nvSpPr>
         <p:spPr>
           <a:xfrm>
-            <a:off x="1975104" y="3364992"/>
-            <a:ext cx="1554480" cy="475488"/>
+            <a:off x="2313432" y="3364992"/>
+            <a:ext cx="1645920" cy="475488"/>
           </a:xfrm>
           <a:prstGeom prst="rect">
             <a:avLst>
@@ -31700,8 +31886,8 @@
         </p:nvSpPr>
         <p:spPr>
           <a:xfrm>
-            <a:off x="1975104" y="3364992"/>
-            <a:ext cx="1554480" cy="475488"/>
+            <a:off x="2313432" y="3364992"/>
+            <a:ext cx="1645920" cy="475488"/>
           </a:xfrm>
           <a:prstGeom prst="rect">
             <a:avLst/>
@@ -31739,8 +31925,8 @@
         </p:nvSpPr>
         <p:spPr>
           <a:xfrm>
-            <a:off x="3529584" y="3364992"/>
-            <a:ext cx="73152" cy="475488"/>
+            <a:off x="3959352" y="3364992"/>
+            <a:ext cx="411480" cy="475488"/>
           </a:xfrm>
           <a:prstGeom prst="rect">
             <a:avLst/>
@@ -31778,8 +31964,8 @@
         </p:nvSpPr>
         <p:spPr>
           <a:xfrm>
-            <a:off x="3602736" y="3364992"/>
-            <a:ext cx="1554480" cy="475488"/>
+            <a:off x="4370832" y="3364992"/>
+            <a:ext cx="1645920" cy="475488"/>
           </a:xfrm>
           <a:prstGeom prst="rect">
             <a:avLst>
@@ -31805,8 +31991,8 @@
         </p:nvSpPr>
         <p:spPr>
           <a:xfrm>
-            <a:off x="3602736" y="3364992"/>
-            <a:ext cx="1554480" cy="475488"/>
+            <a:off x="4370832" y="3364992"/>
+            <a:ext cx="1645920" cy="475488"/>
           </a:xfrm>
           <a:prstGeom prst="rect">
             <a:avLst/>
@@ -31830,7 +32016,7 @@
                 <a:ea typeface="Trebuchet MS" pitchFamily="34" charset="-122"/>
                 <a:cs typeface="Trebuchet MS" pitchFamily="34" charset="-120"/>
               </a:rPr>
-              <a:t>vi</a:t>
+              <a:t>fic</a:t>
             </a:r>
             <a:endParaRPr lang="en-US" sz="1400" dirty="0"/>
           </a:p>
@@ -31844,8 +32030,8 @@
         </p:nvSpPr>
         <p:spPr>
           <a:xfrm>
-            <a:off x="5157216" y="3364992"/>
-            <a:ext cx="73152" cy="475488"/>
+            <a:off x="6016752" y="3364992"/>
+            <a:ext cx="411480" cy="475488"/>
           </a:xfrm>
           <a:prstGeom prst="rect">
             <a:avLst/>
@@ -31883,8 +32069,8 @@
         </p:nvSpPr>
         <p:spPr>
           <a:xfrm>
-            <a:off x="5230368" y="3364992"/>
-            <a:ext cx="1554480" cy="475488"/>
+            <a:off x="6428232" y="3364992"/>
+            <a:ext cx="1645920" cy="475488"/>
           </a:xfrm>
           <a:prstGeom prst="rect">
             <a:avLst>
@@ -31910,8 +32096,8 @@
         </p:nvSpPr>
         <p:spPr>
           <a:xfrm>
-            <a:off x="5230368" y="3364992"/>
-            <a:ext cx="1554480" cy="475488"/>
+            <a:off x="6428232" y="3364992"/>
+            <a:ext cx="1645920" cy="475488"/>
           </a:xfrm>
           <a:prstGeom prst="rect">
             <a:avLst/>
@@ -31935,7 +32121,7 @@
                 <a:ea typeface="Trebuchet MS" pitchFamily="34" charset="-122"/>
                 <a:cs typeface="Trebuchet MS" pitchFamily="34" charset="-120"/>
               </a:rPr>
-              <a:t>o</a:t>
+              <a:t>tion</a:t>
             </a:r>
             <a:endParaRPr lang="en-US" sz="1400" dirty="0"/>
           </a:p>
@@ -31943,119 +32129,80 @@
       </p:sp>
       <p:sp>
         <p:nvSpPr>
-          <p:cNvPr id="36" name="Text 34"/>
-          <p:cNvSpPr/>
-          <p:nvPr/>
-        </p:nvSpPr>
-        <p:spPr>
-          <a:xfrm>
-            <a:off x="6784848" y="3364992"/>
-            <a:ext cx="73152" cy="475488"/>
-          </a:xfrm>
-          <a:prstGeom prst="rect">
-            <a:avLst/>
-          </a:prstGeom>
-          <a:noFill/>
-          <a:ln/>
-        </p:spPr>
-        <p:txBody>
-          <a:bodyPr wrap="square" lIns="0" tIns="0" rIns="0" bIns="0" rtlCol="0" anchor="ctr"/>
-          <a:lstStyle/>
-          <a:p>
-            <a:pPr algn="ctr" indent="0" marL="0">
-              <a:buNone/>
-            </a:pPr>
-            <a:r>
-              <a:rPr lang="en-US" sz="1600" b="1" dirty="0">
-                <a:solidFill>
-                  <a:srgbClr val="0D9488"/>
+          <p:cNvPr id="36" name="Shape 34"/>
+          <p:cNvSpPr/>
+          <p:nvPr/>
+        </p:nvSpPr>
+        <p:spPr>
+          <a:xfrm>
+            <a:off x="365760" y="4096512"/>
+            <a:ext cx="1371600" cy="804672"/>
+          </a:xfrm>
+          <a:prstGeom prst="rect">
+            <a:avLst>
+              <a:gd name="adj" fmla="val 6818"/>
+            </a:avLst>
+          </a:prstGeom>
+          <a:solidFill>
+            <a:srgbClr val="E2E8F0"/>
+          </a:solidFill>
+          <a:ln w="12700">
+            <a:solidFill>
+              <a:srgbClr val="E2E8F0"/>
+            </a:solidFill>
+            <a:prstDash val="solid"/>
+          </a:ln>
+        </p:spPr>
+      </p:sp>
+      <p:sp>
+        <p:nvSpPr>
+          <p:cNvPr id="37" name="Text 35"/>
+          <p:cNvSpPr/>
+          <p:nvPr/>
+        </p:nvSpPr>
+        <p:spPr>
+          <a:xfrm>
+            <a:off x="365760" y="4096512"/>
+            <a:ext cx="1371600" cy="804672"/>
+          </a:xfrm>
+          <a:prstGeom prst="rect">
+            <a:avLst/>
+          </a:prstGeom>
+          <a:noFill/>
+          <a:ln/>
+        </p:spPr>
+        <p:txBody>
+          <a:bodyPr wrap="square" lIns="0" tIns="0" rIns="0" bIns="0" rtlCol="0" anchor="ctr"/>
+          <a:lstStyle/>
+          <a:p>
+            <a:pPr algn="ctr" indent="0" marL="0">
+              <a:buNone/>
+            </a:pPr>
+            <a:r>
+              <a:rPr lang="en-US" sz="1100" b="1" dirty="0">
+                <a:solidFill>
+                  <a:srgbClr val="475569"/>
                 </a:solidFill>
                 <a:latin typeface="Trebuchet MS" pitchFamily="34" charset="0"/>
                 <a:ea typeface="Trebuchet MS" pitchFamily="34" charset="-122"/>
                 <a:cs typeface="Trebuchet MS" pitchFamily="34" charset="-120"/>
               </a:rPr>
-              <a:t>·</a:t>
-            </a:r>
-            <a:endParaRPr lang="en-US" sz="1600" dirty="0"/>
-          </a:p>
-        </p:txBody>
-      </p:sp>
-      <p:sp>
-        <p:nvSpPr>
-          <p:cNvPr id="37" name="Shape 35"/>
-          <p:cNvSpPr/>
-          <p:nvPr/>
-        </p:nvSpPr>
-        <p:spPr>
-          <a:xfrm>
-            <a:off x="6858000" y="3364992"/>
-            <a:ext cx="1554480" cy="475488"/>
-          </a:xfrm>
-          <a:prstGeom prst="rect">
-            <a:avLst>
-              <a:gd name="adj" fmla="val 9615"/>
-            </a:avLst>
-          </a:prstGeom>
-          <a:solidFill>
-            <a:srgbClr val="FFFFFF"/>
-          </a:solidFill>
-          <a:ln w="12700">
-            <a:solidFill>
-              <a:srgbClr val="0D9488"/>
-            </a:solidFill>
-            <a:prstDash val="solid"/>
-          </a:ln>
-        </p:spPr>
-      </p:sp>
-      <p:sp>
-        <p:nvSpPr>
-          <p:cNvPr id="38" name="Text 36"/>
-          <p:cNvSpPr/>
-          <p:nvPr/>
-        </p:nvSpPr>
-        <p:spPr>
-          <a:xfrm>
-            <a:off x="6858000" y="3364992"/>
-            <a:ext cx="1554480" cy="475488"/>
-          </a:xfrm>
-          <a:prstGeom prst="rect">
-            <a:avLst/>
-          </a:prstGeom>
-          <a:noFill/>
-          <a:ln/>
-        </p:spPr>
-        <p:txBody>
-          <a:bodyPr wrap="square" lIns="0" tIns="0" rIns="0" bIns="0" rtlCol="0" anchor="ctr"/>
-          <a:lstStyle/>
-          <a:p>
-            <a:pPr algn="ctr" indent="0" marL="0">
-              <a:buNone/>
-            </a:pPr>
-            <a:r>
-              <a:rPr lang="en-US" sz="1400" b="1" dirty="0">
-                <a:solidFill>
-                  <a:srgbClr val="0D9488"/>
-                </a:solidFill>
-                <a:latin typeface="Trebuchet MS" pitchFamily="34" charset="0"/>
-                <a:ea typeface="Trebuchet MS" pitchFamily="34" charset="-122"/>
-                <a:cs typeface="Trebuchet MS" pitchFamily="34" charset="-120"/>
-              </a:rPr>
-              <a:t>lent</a:t>
-            </a:r>
-            <a:endParaRPr lang="en-US" sz="1400" dirty="0"/>
-          </a:p>
-        </p:txBody>
-      </p:sp>
-      <p:sp>
-        <p:nvSpPr>
-          <p:cNvPr id="39" name="Shape 37"/>
-          <p:cNvSpPr/>
-          <p:nvPr/>
-        </p:nvSpPr>
-        <p:spPr>
-          <a:xfrm>
-            <a:off x="365760" y="4096512"/>
-            <a:ext cx="1371600" cy="804672"/>
+              <a:t>Phonemes</a:t>
+            </a:r>
+            <a:endParaRPr lang="en-US" sz="1100" dirty="0"/>
+          </a:p>
+        </p:txBody>
+      </p:sp>
+      <p:sp>
+        <p:nvSpPr>
+          <p:cNvPr id="38" name="Shape 36"/>
+          <p:cNvSpPr/>
+          <p:nvPr/>
+        </p:nvSpPr>
+        <p:spPr>
+          <a:xfrm>
+            <a:off x="1874520" y="4096512"/>
+            <a:ext cx="6903720" cy="804672"/>
           </a:xfrm>
           <a:prstGeom prst="rect">
             <a:avLst>
@@ -32063,85 +32210,19 @@
             </a:avLst>
           </a:prstGeom>
           <a:solidFill>
-            <a:srgbClr val="E2E8F0"/>
+            <a:srgbClr val="F8FAFC"/>
           </a:solidFill>
           <a:ln w="12700">
             <a:solidFill>
               <a:srgbClr val="E2E8F0"/>
             </a:solidFill>
-            <a:prstDash val="solid"/>
-          </a:ln>
-        </p:spPr>
-      </p:sp>
-      <p:sp>
-        <p:nvSpPr>
-          <p:cNvPr id="40" name="Text 38"/>
-          <p:cNvSpPr/>
-          <p:nvPr/>
-        </p:nvSpPr>
-        <p:spPr>
-          <a:xfrm>
-            <a:off x="365760" y="4096512"/>
-            <a:ext cx="1371600" cy="804672"/>
-          </a:xfrm>
-          <a:prstGeom prst="rect">
-            <a:avLst/>
-          </a:prstGeom>
-          <a:noFill/>
-          <a:ln/>
-        </p:spPr>
-        <p:txBody>
-          <a:bodyPr wrap="square" lIns="0" tIns="0" rIns="0" bIns="0" rtlCol="0" anchor="ctr"/>
-          <a:lstStyle/>
-          <a:p>
-            <a:pPr algn="ctr" indent="0" marL="0">
-              <a:buNone/>
-            </a:pPr>
-            <a:r>
-              <a:rPr lang="en-US" sz="1100" b="1" dirty="0">
-                <a:solidFill>
-                  <a:srgbClr val="475569"/>
-                </a:solidFill>
-                <a:latin typeface="Trebuchet MS" pitchFamily="34" charset="0"/>
-                <a:ea typeface="Trebuchet MS" pitchFamily="34" charset="-122"/>
-                <a:cs typeface="Trebuchet MS" pitchFamily="34" charset="-120"/>
-              </a:rPr>
-              <a:t>Phonemes</a:t>
-            </a:r>
-            <a:endParaRPr lang="en-US" sz="1100" dirty="0"/>
-          </a:p>
-        </p:txBody>
-      </p:sp>
-      <p:sp>
-        <p:nvSpPr>
-          <p:cNvPr id="41" name="Shape 39"/>
-          <p:cNvSpPr/>
-          <p:nvPr/>
-        </p:nvSpPr>
-        <p:spPr>
-          <a:xfrm>
-            <a:off x="1874520" y="4096512"/>
-            <a:ext cx="6903720" cy="804672"/>
-          </a:xfrm>
-          <a:prstGeom prst="rect">
-            <a:avLst>
-              <a:gd name="adj" fmla="val 6818"/>
-            </a:avLst>
-          </a:prstGeom>
-          <a:solidFill>
-            <a:srgbClr val="F8FAFC"/>
-          </a:solidFill>
-          <a:ln w="12700">
-            <a:solidFill>
-              <a:srgbClr val="E2E8F0"/>
-            </a:solidFill>
             <a:prstDash val="dash"/>
           </a:ln>
         </p:spPr>
       </p:sp>
       <p:sp>
         <p:nvSpPr>
-          <p:cNvPr id="42" name="Text 40"/>
+          <p:cNvPr id="39" name="Text 37"/>
           <p:cNvSpPr/>
           <p:nvPr/>
         </p:nvSpPr>
@@ -32603,7 +32684,7 @@
                 <a:ea typeface="Trebuchet MS" pitchFamily="34" charset="-122"/>
                 <a:cs typeface="Trebuchet MS" pitchFamily="34" charset="-120"/>
               </a:rPr>
-              <a:t>nonviolent</a:t>
+              <a:t>nonfiction</a:t>
             </a:r>
             <a:endParaRPr lang="en-US" sz="2800" dirty="0"/>
           </a:p>
@@ -32781,7 +32862,7 @@
                 <a:ea typeface="Calibri" pitchFamily="34" charset="-122"/>
                 <a:cs typeface="Calibri" pitchFamily="34" charset="-120"/>
               </a:rPr>
-              <a:t>not</a:t>
+              <a:t>not, without</a:t>
             </a:r>
             <a:endParaRPr lang="en-US" sz="850" dirty="0"/>
           </a:p>
@@ -32854,7 +32935,7 @@
                 <a:ea typeface="Trebuchet MS" pitchFamily="34" charset="-122"/>
                 <a:cs typeface="Trebuchet MS" pitchFamily="34" charset="-120"/>
               </a:rPr>
-              <a:t>viol</a:t>
+              <a:t>fict</a:t>
             </a:r>
             <a:endParaRPr lang="en-US" sz="1300" dirty="0"/>
           </a:p>
@@ -32893,7 +32974,7 @@
                 <a:ea typeface="Calibri" pitchFamily="34" charset="-122"/>
                 <a:cs typeface="Calibri" pitchFamily="34" charset="-120"/>
               </a:rPr>
-              <a:t>force, harm</a:t>
+              <a:t>to make up, invent</a:t>
             </a:r>
             <a:endParaRPr lang="en-US" sz="850" dirty="0"/>
           </a:p>
@@ -32966,7 +33047,7 @@
                 <a:ea typeface="Trebuchet MS" pitchFamily="34" charset="-122"/>
                 <a:cs typeface="Trebuchet MS" pitchFamily="34" charset="-120"/>
               </a:rPr>
-              <a:t>ent</a:t>
+              <a:t>ion</a:t>
             </a:r>
             <a:endParaRPr lang="en-US" sz="1300" dirty="0"/>
           </a:p>
@@ -33005,7 +33086,7 @@
                 <a:ea typeface="Calibri" pitchFamily="34" charset="-122"/>
                 <a:cs typeface="Calibri" pitchFamily="34" charset="-120"/>
               </a:rPr>
-              <a:t>having a quality</a:t>
+              <a:t>state or result of</a:t>
             </a:r>
             <a:endParaRPr lang="en-US" sz="850" dirty="0"/>
           </a:p>
@@ -33112,8 +33193,8 @@
         </p:nvSpPr>
         <p:spPr>
           <a:xfrm>
-            <a:off x="1975104" y="3364992"/>
-            <a:ext cx="1554480" cy="475488"/>
+            <a:off x="2313432" y="3364992"/>
+            <a:ext cx="1645920" cy="475488"/>
           </a:xfrm>
           <a:prstGeom prst="rect">
             <a:avLst>
@@ -33139,8 +33220,8 @@
         </p:nvSpPr>
         <p:spPr>
           <a:xfrm>
-            <a:off x="1975104" y="3364992"/>
-            <a:ext cx="1554480" cy="475488"/>
+            <a:off x="2313432" y="3364992"/>
+            <a:ext cx="1645920" cy="475488"/>
           </a:xfrm>
           <a:prstGeom prst="rect">
             <a:avLst/>
@@ -33178,8 +33259,8 @@
         </p:nvSpPr>
         <p:spPr>
           <a:xfrm>
-            <a:off x="3529584" y="3364992"/>
-            <a:ext cx="73152" cy="475488"/>
+            <a:off x="3959352" y="3364992"/>
+            <a:ext cx="411480" cy="475488"/>
           </a:xfrm>
           <a:prstGeom prst="rect">
             <a:avLst/>
@@ -33217,8 +33298,8 @@
         </p:nvSpPr>
         <p:spPr>
           <a:xfrm>
-            <a:off x="3602736" y="3364992"/>
-            <a:ext cx="1554480" cy="475488"/>
+            <a:off x="4370832" y="3364992"/>
+            <a:ext cx="1645920" cy="475488"/>
           </a:xfrm>
           <a:prstGeom prst="rect">
             <a:avLst>
@@ -33244,8 +33325,8 @@
         </p:nvSpPr>
         <p:spPr>
           <a:xfrm>
-            <a:off x="3602736" y="3364992"/>
-            <a:ext cx="1554480" cy="475488"/>
+            <a:off x="4370832" y="3364992"/>
+            <a:ext cx="1645920" cy="475488"/>
           </a:xfrm>
           <a:prstGeom prst="rect">
             <a:avLst/>
@@ -33269,7 +33350,7 @@
                 <a:ea typeface="Trebuchet MS" pitchFamily="34" charset="-122"/>
                 <a:cs typeface="Trebuchet MS" pitchFamily="34" charset="-120"/>
               </a:rPr>
-              <a:t>vi</a:t>
+              <a:t>fic</a:t>
             </a:r>
             <a:endParaRPr lang="en-US" sz="1400" dirty="0"/>
           </a:p>
@@ -33283,8 +33364,8 @@
         </p:nvSpPr>
         <p:spPr>
           <a:xfrm>
-            <a:off x="5157216" y="3364992"/>
-            <a:ext cx="73152" cy="475488"/>
+            <a:off x="6016752" y="3364992"/>
+            <a:ext cx="411480" cy="475488"/>
           </a:xfrm>
           <a:prstGeom prst="rect">
             <a:avLst/>
@@ -33322,8 +33403,8 @@
         </p:nvSpPr>
         <p:spPr>
           <a:xfrm>
-            <a:off x="5230368" y="3364992"/>
-            <a:ext cx="1554480" cy="475488"/>
+            <a:off x="6428232" y="3364992"/>
+            <a:ext cx="1645920" cy="475488"/>
           </a:xfrm>
           <a:prstGeom prst="rect">
             <a:avLst>
@@ -33349,8 +33430,8 @@
         </p:nvSpPr>
         <p:spPr>
           <a:xfrm>
-            <a:off x="5230368" y="3364992"/>
-            <a:ext cx="1554480" cy="475488"/>
+            <a:off x="6428232" y="3364992"/>
+            <a:ext cx="1645920" cy="475488"/>
           </a:xfrm>
           <a:prstGeom prst="rect">
             <a:avLst/>
@@ -33374,7 +33455,7 @@
                 <a:ea typeface="Trebuchet MS" pitchFamily="34" charset="-122"/>
                 <a:cs typeface="Trebuchet MS" pitchFamily="34" charset="-120"/>
               </a:rPr>
-              <a:t>o</a:t>
+              <a:t>tion</a:t>
             </a:r>
             <a:endParaRPr lang="en-US" sz="1400" dirty="0"/>
           </a:p>
@@ -33382,193 +33463,247 @@
       </p:sp>
       <p:sp>
         <p:nvSpPr>
-          <p:cNvPr id="36" name="Text 34"/>
-          <p:cNvSpPr/>
-          <p:nvPr/>
-        </p:nvSpPr>
-        <p:spPr>
-          <a:xfrm>
-            <a:off x="6784848" y="3364992"/>
-            <a:ext cx="73152" cy="475488"/>
-          </a:xfrm>
-          <a:prstGeom prst="rect">
-            <a:avLst/>
-          </a:prstGeom>
-          <a:noFill/>
-          <a:ln/>
-        </p:spPr>
-        <p:txBody>
-          <a:bodyPr wrap="square" lIns="0" tIns="0" rIns="0" bIns="0" rtlCol="0" anchor="ctr"/>
-          <a:lstStyle/>
-          <a:p>
-            <a:pPr algn="ctr" indent="0" marL="0">
-              <a:buNone/>
-            </a:pPr>
-            <a:r>
-              <a:rPr lang="en-US" sz="1600" b="1" dirty="0">
-                <a:solidFill>
-                  <a:srgbClr val="0D9488"/>
+          <p:cNvPr id="36" name="Shape 34"/>
+          <p:cNvSpPr/>
+          <p:nvPr/>
+        </p:nvSpPr>
+        <p:spPr>
+          <a:xfrm>
+            <a:off x="365760" y="4096512"/>
+            <a:ext cx="1371600" cy="804672"/>
+          </a:xfrm>
+          <a:prstGeom prst="rect">
+            <a:avLst>
+              <a:gd name="adj" fmla="val 6818"/>
+            </a:avLst>
+          </a:prstGeom>
+          <a:solidFill>
+            <a:srgbClr val="E2E8F0"/>
+          </a:solidFill>
+          <a:ln w="12700">
+            <a:solidFill>
+              <a:srgbClr val="E2E8F0"/>
+            </a:solidFill>
+            <a:prstDash val="solid"/>
+          </a:ln>
+        </p:spPr>
+      </p:sp>
+      <p:sp>
+        <p:nvSpPr>
+          <p:cNvPr id="37" name="Text 35"/>
+          <p:cNvSpPr/>
+          <p:nvPr/>
+        </p:nvSpPr>
+        <p:spPr>
+          <a:xfrm>
+            <a:off x="365760" y="4096512"/>
+            <a:ext cx="1371600" cy="804672"/>
+          </a:xfrm>
+          <a:prstGeom prst="rect">
+            <a:avLst/>
+          </a:prstGeom>
+          <a:noFill/>
+          <a:ln/>
+        </p:spPr>
+        <p:txBody>
+          <a:bodyPr wrap="square" lIns="0" tIns="0" rIns="0" bIns="0" rtlCol="0" anchor="ctr"/>
+          <a:lstStyle/>
+          <a:p>
+            <a:pPr algn="ctr" indent="0" marL="0">
+              <a:buNone/>
+            </a:pPr>
+            <a:r>
+              <a:rPr lang="en-US" sz="1100" b="1" dirty="0">
+                <a:solidFill>
+                  <a:srgbClr val="475569"/>
                 </a:solidFill>
                 <a:latin typeface="Trebuchet MS" pitchFamily="34" charset="0"/>
                 <a:ea typeface="Trebuchet MS" pitchFamily="34" charset="-122"/>
                 <a:cs typeface="Trebuchet MS" pitchFamily="34" charset="-120"/>
               </a:rPr>
-              <a:t>·</a:t>
-            </a:r>
-            <a:endParaRPr lang="en-US" sz="1600" dirty="0"/>
-          </a:p>
-        </p:txBody>
-      </p:sp>
-      <p:sp>
-        <p:nvSpPr>
-          <p:cNvPr id="37" name="Shape 35"/>
-          <p:cNvSpPr/>
-          <p:nvPr/>
-        </p:nvSpPr>
-        <p:spPr>
-          <a:xfrm>
-            <a:off x="6858000" y="3364992"/>
-            <a:ext cx="1554480" cy="475488"/>
+              <a:t>Phonemes</a:t>
+            </a:r>
+            <a:endParaRPr lang="en-US" sz="1100" dirty="0"/>
+          </a:p>
+        </p:txBody>
+      </p:sp>
+      <p:sp>
+        <p:nvSpPr>
+          <p:cNvPr id="38" name="Shape 36"/>
+          <p:cNvSpPr/>
+          <p:nvPr/>
+        </p:nvSpPr>
+        <p:spPr>
+          <a:xfrm>
+            <a:off x="1874520" y="4096512"/>
+            <a:ext cx="6903720" cy="804672"/>
           </a:xfrm>
           <a:prstGeom prst="rect">
             <a:avLst>
-              <a:gd name="adj" fmla="val 9615"/>
+              <a:gd name="adj" fmla="val 6818"/>
             </a:avLst>
           </a:prstGeom>
           <a:solidFill>
+            <a:srgbClr val="FCE7F3"/>
+          </a:solidFill>
+          <a:ln w="12700">
+            <a:solidFill>
+              <a:srgbClr val="DB2777"/>
+            </a:solidFill>
+            <a:prstDash val="solid"/>
+          </a:ln>
+        </p:spPr>
+      </p:sp>
+      <p:sp>
+        <p:nvSpPr>
+          <p:cNvPr id="39" name="Shape 37"/>
+          <p:cNvSpPr/>
+          <p:nvPr/>
+        </p:nvSpPr>
+        <p:spPr>
+          <a:xfrm>
+            <a:off x="2023872" y="4169664"/>
+            <a:ext cx="685800" cy="384048"/>
+          </a:xfrm>
+          <a:prstGeom prst="rect">
+            <a:avLst>
+              <a:gd name="adj" fmla="val 9524"/>
+            </a:avLst>
+          </a:prstGeom>
+          <a:solidFill>
             <a:srgbClr val="FFFFFF"/>
           </a:solidFill>
           <a:ln w="12700">
             <a:solidFill>
-              <a:srgbClr val="0D9488"/>
-            </a:solidFill>
-            <a:prstDash val="solid"/>
-          </a:ln>
-        </p:spPr>
-      </p:sp>
-      <p:sp>
-        <p:nvSpPr>
-          <p:cNvPr id="38" name="Text 36"/>
-          <p:cNvSpPr/>
-          <p:nvPr/>
-        </p:nvSpPr>
-        <p:spPr>
-          <a:xfrm>
-            <a:off x="6858000" y="3364992"/>
-            <a:ext cx="1554480" cy="475488"/>
-          </a:xfrm>
-          <a:prstGeom prst="rect">
-            <a:avLst/>
-          </a:prstGeom>
-          <a:noFill/>
-          <a:ln/>
-        </p:spPr>
-        <p:txBody>
-          <a:bodyPr wrap="square" lIns="0" tIns="0" rIns="0" bIns="0" rtlCol="0" anchor="ctr"/>
-          <a:lstStyle/>
-          <a:p>
-            <a:pPr algn="ctr" indent="0" marL="0">
-              <a:buNone/>
-            </a:pPr>
-            <a:r>
-              <a:rPr lang="en-US" sz="1400" b="1" dirty="0">
-                <a:solidFill>
-                  <a:srgbClr val="0D9488"/>
+              <a:srgbClr val="DB2777"/>
+            </a:solidFill>
+            <a:prstDash val="solid"/>
+          </a:ln>
+        </p:spPr>
+      </p:sp>
+      <p:sp>
+        <p:nvSpPr>
+          <p:cNvPr id="40" name="Text 38"/>
+          <p:cNvSpPr/>
+          <p:nvPr/>
+        </p:nvSpPr>
+        <p:spPr>
+          <a:xfrm>
+            <a:off x="2023872" y="4169664"/>
+            <a:ext cx="685800" cy="384048"/>
+          </a:xfrm>
+          <a:prstGeom prst="rect">
+            <a:avLst/>
+          </a:prstGeom>
+          <a:noFill/>
+          <a:ln/>
+        </p:spPr>
+        <p:txBody>
+          <a:bodyPr wrap="square" lIns="0" tIns="0" rIns="0" bIns="0" rtlCol="0" anchor="ctr"/>
+          <a:lstStyle/>
+          <a:p>
+            <a:pPr algn="ctr" indent="0" marL="0">
+              <a:buNone/>
+            </a:pPr>
+            <a:r>
+              <a:rPr lang="en-US" sz="900" b="1" dirty="0">
+                <a:solidFill>
+                  <a:srgbClr val="9D174D"/>
                 </a:solidFill>
                 <a:latin typeface="Trebuchet MS" pitchFamily="34" charset="0"/>
                 <a:ea typeface="Trebuchet MS" pitchFamily="34" charset="-122"/>
                 <a:cs typeface="Trebuchet MS" pitchFamily="34" charset="-120"/>
               </a:rPr>
-              <a:t>lent</a:t>
-            </a:r>
-            <a:endParaRPr lang="en-US" sz="1400" dirty="0"/>
-          </a:p>
-        </p:txBody>
-      </p:sp>
-      <p:sp>
-        <p:nvSpPr>
-          <p:cNvPr id="39" name="Shape 37"/>
-          <p:cNvSpPr/>
-          <p:nvPr/>
-        </p:nvSpPr>
-        <p:spPr>
-          <a:xfrm>
-            <a:off x="365760" y="4096512"/>
-            <a:ext cx="1371600" cy="804672"/>
+              <a:t>n</a:t>
+            </a:r>
+            <a:endParaRPr lang="en-US" sz="900" dirty="0"/>
+          </a:p>
+        </p:txBody>
+      </p:sp>
+      <p:sp>
+        <p:nvSpPr>
+          <p:cNvPr id="41" name="Shape 39"/>
+          <p:cNvSpPr/>
+          <p:nvPr/>
+        </p:nvSpPr>
+        <p:spPr>
+          <a:xfrm>
+            <a:off x="2831592" y="4169664"/>
+            <a:ext cx="685800" cy="384048"/>
           </a:xfrm>
           <a:prstGeom prst="rect">
             <a:avLst>
-              <a:gd name="adj" fmla="val 6818"/>
+              <a:gd name="adj" fmla="val 9524"/>
             </a:avLst>
           </a:prstGeom>
           <a:solidFill>
-            <a:srgbClr val="E2E8F0"/>
-          </a:solidFill>
-          <a:ln w="12700">
-            <a:solidFill>
-              <a:srgbClr val="E2E8F0"/>
-            </a:solidFill>
-            <a:prstDash val="solid"/>
-          </a:ln>
-        </p:spPr>
-      </p:sp>
-      <p:sp>
-        <p:nvSpPr>
-          <p:cNvPr id="40" name="Text 38"/>
-          <p:cNvSpPr/>
-          <p:nvPr/>
-        </p:nvSpPr>
-        <p:spPr>
-          <a:xfrm>
-            <a:off x="365760" y="4096512"/>
-            <a:ext cx="1371600" cy="804672"/>
-          </a:xfrm>
-          <a:prstGeom prst="rect">
-            <a:avLst/>
-          </a:prstGeom>
-          <a:noFill/>
-          <a:ln/>
-        </p:spPr>
-        <p:txBody>
-          <a:bodyPr wrap="square" lIns="0" tIns="0" rIns="0" bIns="0" rtlCol="0" anchor="ctr"/>
-          <a:lstStyle/>
-          <a:p>
-            <a:pPr algn="ctr" indent="0" marL="0">
-              <a:buNone/>
-            </a:pPr>
-            <a:r>
-              <a:rPr lang="en-US" sz="1100" b="1" dirty="0">
-                <a:solidFill>
-                  <a:srgbClr val="475569"/>
+            <a:srgbClr val="FFFFFF"/>
+          </a:solidFill>
+          <a:ln w="12700">
+            <a:solidFill>
+              <a:srgbClr val="DB2777"/>
+            </a:solidFill>
+            <a:prstDash val="solid"/>
+          </a:ln>
+        </p:spPr>
+      </p:sp>
+      <p:sp>
+        <p:nvSpPr>
+          <p:cNvPr id="42" name="Text 40"/>
+          <p:cNvSpPr/>
+          <p:nvPr/>
+        </p:nvSpPr>
+        <p:spPr>
+          <a:xfrm>
+            <a:off x="2831592" y="4169664"/>
+            <a:ext cx="685800" cy="384048"/>
+          </a:xfrm>
+          <a:prstGeom prst="rect">
+            <a:avLst/>
+          </a:prstGeom>
+          <a:noFill/>
+          <a:ln/>
+        </p:spPr>
+        <p:txBody>
+          <a:bodyPr wrap="square" lIns="0" tIns="0" rIns="0" bIns="0" rtlCol="0" anchor="ctr"/>
+          <a:lstStyle/>
+          <a:p>
+            <a:pPr algn="ctr" indent="0" marL="0">
+              <a:buNone/>
+            </a:pPr>
+            <a:r>
+              <a:rPr lang="en-US" sz="900" b="1" dirty="0">
+                <a:solidFill>
+                  <a:srgbClr val="9D174D"/>
                 </a:solidFill>
                 <a:latin typeface="Trebuchet MS" pitchFamily="34" charset="0"/>
                 <a:ea typeface="Trebuchet MS" pitchFamily="34" charset="-122"/>
                 <a:cs typeface="Trebuchet MS" pitchFamily="34" charset="-120"/>
               </a:rPr>
-              <a:t>Phonemes</a:t>
-            </a:r>
-            <a:endParaRPr lang="en-US" sz="1100" dirty="0"/>
-          </a:p>
-        </p:txBody>
-      </p:sp>
-      <p:sp>
-        <p:nvSpPr>
-          <p:cNvPr id="41" name="Shape 39"/>
-          <p:cNvSpPr/>
-          <p:nvPr/>
-        </p:nvSpPr>
-        <p:spPr>
-          <a:xfrm>
-            <a:off x="1874520" y="4096512"/>
-            <a:ext cx="6903720" cy="658368"/>
+              <a:t>o</a:t>
+            </a:r>
+            <a:endParaRPr lang="en-US" sz="900" dirty="0"/>
+          </a:p>
+        </p:txBody>
+      </p:sp>
+      <p:sp>
+        <p:nvSpPr>
+          <p:cNvPr id="43" name="Shape 41"/>
+          <p:cNvSpPr/>
+          <p:nvPr/>
+        </p:nvSpPr>
+        <p:spPr>
+          <a:xfrm>
+            <a:off x="3639312" y="4169664"/>
+            <a:ext cx="685800" cy="384048"/>
           </a:xfrm>
           <a:prstGeom prst="rect">
             <a:avLst>
-              <a:gd name="adj" fmla="val 8333"/>
+              <a:gd name="adj" fmla="val 9524"/>
             </a:avLst>
           </a:prstGeom>
           <a:solidFill>
-            <a:srgbClr val="FCE7F3"/>
+            <a:srgbClr val="FFFFFF"/>
           </a:solidFill>
           <a:ln w="12700">
             <a:solidFill>
@@ -33580,41 +33715,14 @@
       </p:sp>
       <p:sp>
         <p:nvSpPr>
-          <p:cNvPr id="42" name="Shape 40"/>
-          <p:cNvSpPr/>
-          <p:nvPr/>
-        </p:nvSpPr>
-        <p:spPr>
-          <a:xfrm>
-            <a:off x="1951828" y="4169664"/>
-            <a:ext cx="603504" cy="475488"/>
-          </a:xfrm>
-          <a:prstGeom prst="rect">
-            <a:avLst>
-              <a:gd name="adj" fmla="val 7692"/>
-            </a:avLst>
-          </a:prstGeom>
-          <a:solidFill>
-            <a:srgbClr val="FFFFFF"/>
-          </a:solidFill>
-          <a:ln w="12700">
-            <a:solidFill>
-              <a:srgbClr val="DB2777"/>
-            </a:solidFill>
-            <a:prstDash val="solid"/>
-          </a:ln>
-        </p:spPr>
-      </p:sp>
-      <p:sp>
-        <p:nvSpPr>
-          <p:cNvPr id="43" name="Text 41"/>
-          <p:cNvSpPr/>
-          <p:nvPr/>
-        </p:nvSpPr>
-        <p:spPr>
-          <a:xfrm>
-            <a:off x="1951828" y="4169664"/>
-            <a:ext cx="603504" cy="475488"/>
+          <p:cNvPr id="44" name="Text 42"/>
+          <p:cNvSpPr/>
+          <p:nvPr/>
+        </p:nvSpPr>
+        <p:spPr>
+          <a:xfrm>
+            <a:off x="3639312" y="4169664"/>
+            <a:ext cx="685800" cy="384048"/>
           </a:xfrm>
           <a:prstGeom prst="rect">
             <a:avLst/>
@@ -33646,18 +33754,18 @@
       </p:sp>
       <p:sp>
         <p:nvSpPr>
-          <p:cNvPr id="44" name="Shape 42"/>
-          <p:cNvSpPr/>
-          <p:nvPr/>
-        </p:nvSpPr>
-        <p:spPr>
-          <a:xfrm>
-            <a:off x="2605209" y="4169664"/>
-            <a:ext cx="603504" cy="475488"/>
+          <p:cNvPr id="45" name="Shape 43"/>
+          <p:cNvSpPr/>
+          <p:nvPr/>
+        </p:nvSpPr>
+        <p:spPr>
+          <a:xfrm>
+            <a:off x="4447032" y="4169664"/>
+            <a:ext cx="685800" cy="384048"/>
           </a:xfrm>
           <a:prstGeom prst="rect">
             <a:avLst>
-              <a:gd name="adj" fmla="val 7692"/>
+              <a:gd name="adj" fmla="val 9524"/>
             </a:avLst>
           </a:prstGeom>
           <a:solidFill>
@@ -33673,14 +33781,14 @@
       </p:sp>
       <p:sp>
         <p:nvSpPr>
-          <p:cNvPr id="45" name="Text 43"/>
-          <p:cNvSpPr/>
-          <p:nvPr/>
-        </p:nvSpPr>
-        <p:spPr>
-          <a:xfrm>
-            <a:off x="2605209" y="4169664"/>
-            <a:ext cx="603504" cy="475488"/>
+          <p:cNvPr id="46" name="Text 44"/>
+          <p:cNvSpPr/>
+          <p:nvPr/>
+        </p:nvSpPr>
+        <p:spPr>
+          <a:xfrm>
+            <a:off x="4447032" y="4169664"/>
+            <a:ext cx="685800" cy="384048"/>
           </a:xfrm>
           <a:prstGeom prst="rect">
             <a:avLst/>
@@ -33704,7 +33812,7 @@
                 <a:ea typeface="Trebuchet MS" pitchFamily="34" charset="-122"/>
                 <a:cs typeface="Trebuchet MS" pitchFamily="34" charset="-120"/>
               </a:rPr>
-              <a:t>o</a:t>
+              <a:t>f</a:t>
             </a:r>
             <a:endParaRPr lang="en-US" sz="900" dirty="0"/>
           </a:p>
@@ -33712,18 +33820,18 @@
       </p:sp>
       <p:sp>
         <p:nvSpPr>
-          <p:cNvPr id="46" name="Shape 44"/>
-          <p:cNvSpPr/>
-          <p:nvPr/>
-        </p:nvSpPr>
-        <p:spPr>
-          <a:xfrm>
-            <a:off x="3258589" y="4169664"/>
-            <a:ext cx="603504" cy="475488"/>
+          <p:cNvPr id="47" name="Shape 45"/>
+          <p:cNvSpPr/>
+          <p:nvPr/>
+        </p:nvSpPr>
+        <p:spPr>
+          <a:xfrm>
+            <a:off x="5254752" y="4169664"/>
+            <a:ext cx="685800" cy="384048"/>
           </a:xfrm>
           <a:prstGeom prst="rect">
             <a:avLst>
-              <a:gd name="adj" fmla="val 7692"/>
+              <a:gd name="adj" fmla="val 9524"/>
             </a:avLst>
           </a:prstGeom>
           <a:solidFill>
@@ -33739,14 +33847,14 @@
       </p:sp>
       <p:sp>
         <p:nvSpPr>
-          <p:cNvPr id="47" name="Text 45"/>
-          <p:cNvSpPr/>
-          <p:nvPr/>
-        </p:nvSpPr>
-        <p:spPr>
-          <a:xfrm>
-            <a:off x="3258589" y="4169664"/>
-            <a:ext cx="603504" cy="475488"/>
+          <p:cNvPr id="48" name="Text 46"/>
+          <p:cNvSpPr/>
+          <p:nvPr/>
+        </p:nvSpPr>
+        <p:spPr>
+          <a:xfrm>
+            <a:off x="5254752" y="4169664"/>
+            <a:ext cx="685800" cy="384048"/>
           </a:xfrm>
           <a:prstGeom prst="rect">
             <a:avLst/>
@@ -33770,7 +33878,7 @@
                 <a:ea typeface="Trebuchet MS" pitchFamily="34" charset="-122"/>
                 <a:cs typeface="Trebuchet MS" pitchFamily="34" charset="-120"/>
               </a:rPr>
-              <a:t>n</a:t>
+              <a:t>i</a:t>
             </a:r>
             <a:endParaRPr lang="en-US" sz="900" dirty="0"/>
           </a:p>
@@ -33778,18 +33886,18 @@
       </p:sp>
       <p:sp>
         <p:nvSpPr>
-          <p:cNvPr id="48" name="Shape 46"/>
-          <p:cNvSpPr/>
-          <p:nvPr/>
-        </p:nvSpPr>
-        <p:spPr>
-          <a:xfrm>
-            <a:off x="3911969" y="4169664"/>
-            <a:ext cx="603504" cy="475488"/>
+          <p:cNvPr id="49" name="Shape 47"/>
+          <p:cNvSpPr/>
+          <p:nvPr/>
+        </p:nvSpPr>
+        <p:spPr>
+          <a:xfrm>
+            <a:off x="6062472" y="4169664"/>
+            <a:ext cx="685800" cy="384048"/>
           </a:xfrm>
           <a:prstGeom prst="rect">
             <a:avLst>
-              <a:gd name="adj" fmla="val 7692"/>
+              <a:gd name="adj" fmla="val 9524"/>
             </a:avLst>
           </a:prstGeom>
           <a:solidFill>
@@ -33805,14 +33913,14 @@
       </p:sp>
       <p:sp>
         <p:nvSpPr>
-          <p:cNvPr id="49" name="Text 47"/>
-          <p:cNvSpPr/>
-          <p:nvPr/>
-        </p:nvSpPr>
-        <p:spPr>
-          <a:xfrm>
-            <a:off x="3911969" y="4169664"/>
-            <a:ext cx="603504" cy="475488"/>
+          <p:cNvPr id="50" name="Text 48"/>
+          <p:cNvSpPr/>
+          <p:nvPr/>
+        </p:nvSpPr>
+        <p:spPr>
+          <a:xfrm>
+            <a:off x="6062472" y="4169664"/>
+            <a:ext cx="685800" cy="384048"/>
           </a:xfrm>
           <a:prstGeom prst="rect">
             <a:avLst/>
@@ -33836,7 +33944,7 @@
                 <a:ea typeface="Trebuchet MS" pitchFamily="34" charset="-122"/>
                 <a:cs typeface="Trebuchet MS" pitchFamily="34" charset="-120"/>
               </a:rPr>
-              <a:t>v</a:t>
+              <a:t>c</a:t>
             </a:r>
             <a:endParaRPr lang="en-US" sz="900" dirty="0"/>
           </a:p>
@@ -33844,18 +33952,18 @@
       </p:sp>
       <p:sp>
         <p:nvSpPr>
-          <p:cNvPr id="50" name="Shape 48"/>
-          <p:cNvSpPr/>
-          <p:nvPr/>
-        </p:nvSpPr>
-        <p:spPr>
-          <a:xfrm>
-            <a:off x="4565350" y="4169664"/>
-            <a:ext cx="603504" cy="475488"/>
+          <p:cNvPr id="51" name="Shape 49"/>
+          <p:cNvSpPr/>
+          <p:nvPr/>
+        </p:nvSpPr>
+        <p:spPr>
+          <a:xfrm>
+            <a:off x="6870192" y="4169664"/>
+            <a:ext cx="685800" cy="384048"/>
           </a:xfrm>
           <a:prstGeom prst="rect">
             <a:avLst>
-              <a:gd name="adj" fmla="val 7692"/>
+              <a:gd name="adj" fmla="val 9524"/>
             </a:avLst>
           </a:prstGeom>
           <a:solidFill>
@@ -33871,14 +33979,14 @@
       </p:sp>
       <p:sp>
         <p:nvSpPr>
-          <p:cNvPr id="51" name="Text 49"/>
-          <p:cNvSpPr/>
-          <p:nvPr/>
-        </p:nvSpPr>
-        <p:spPr>
-          <a:xfrm>
-            <a:off x="4565350" y="4169664"/>
-            <a:ext cx="603504" cy="475488"/>
+          <p:cNvPr id="52" name="Text 50"/>
+          <p:cNvSpPr/>
+          <p:nvPr/>
+        </p:nvSpPr>
+        <p:spPr>
+          <a:xfrm>
+            <a:off x="6870192" y="4169664"/>
+            <a:ext cx="685800" cy="384048"/>
           </a:xfrm>
           <a:prstGeom prst="rect">
             <a:avLst/>
@@ -33902,7 +34010,7 @@
                 <a:ea typeface="Trebuchet MS" pitchFamily="34" charset="-122"/>
                 <a:cs typeface="Trebuchet MS" pitchFamily="34" charset="-120"/>
               </a:rPr>
-              <a:t>i</a:t>
+              <a:t>t</a:t>
             </a:r>
             <a:endParaRPr lang="en-US" sz="900" dirty="0"/>
           </a:p>
@@ -33910,18 +34018,18 @@
       </p:sp>
       <p:sp>
         <p:nvSpPr>
-          <p:cNvPr id="52" name="Shape 50"/>
-          <p:cNvSpPr/>
-          <p:nvPr/>
-        </p:nvSpPr>
-        <p:spPr>
-          <a:xfrm>
-            <a:off x="5218730" y="4169664"/>
-            <a:ext cx="603504" cy="475488"/>
+          <p:cNvPr id="53" name="Shape 51"/>
+          <p:cNvSpPr/>
+          <p:nvPr/>
+        </p:nvSpPr>
+        <p:spPr>
+          <a:xfrm>
+            <a:off x="7677912" y="4169664"/>
+            <a:ext cx="685800" cy="384048"/>
           </a:xfrm>
           <a:prstGeom prst="rect">
             <a:avLst>
-              <a:gd name="adj" fmla="val 7692"/>
+              <a:gd name="adj" fmla="val 9524"/>
             </a:avLst>
           </a:prstGeom>
           <a:solidFill>
@@ -33937,14 +34045,14 @@
       </p:sp>
       <p:sp>
         <p:nvSpPr>
-          <p:cNvPr id="53" name="Text 51"/>
-          <p:cNvSpPr/>
-          <p:nvPr/>
-        </p:nvSpPr>
-        <p:spPr>
-          <a:xfrm>
-            <a:off x="5218730" y="4169664"/>
-            <a:ext cx="603504" cy="475488"/>
+          <p:cNvPr id="54" name="Text 52"/>
+          <p:cNvSpPr/>
+          <p:nvPr/>
+        </p:nvSpPr>
+        <p:spPr>
+          <a:xfrm>
+            <a:off x="7677912" y="4169664"/>
+            <a:ext cx="685800" cy="384048"/>
           </a:xfrm>
           <a:prstGeom prst="rect">
             <a:avLst/>
@@ -33968,7 +34076,7 @@
                 <a:ea typeface="Trebuchet MS" pitchFamily="34" charset="-122"/>
                 <a:cs typeface="Trebuchet MS" pitchFamily="34" charset="-120"/>
               </a:rPr>
-              <a:t>o</a:t>
+              <a:t>ion</a:t>
             </a:r>
             <a:endParaRPr lang="en-US" sz="900" dirty="0"/>
           </a:p>
@@ -33976,265 +34084,40 @@
       </p:sp>
       <p:sp>
         <p:nvSpPr>
-          <p:cNvPr id="54" name="Shape 52"/>
-          <p:cNvSpPr/>
-          <p:nvPr/>
-        </p:nvSpPr>
-        <p:spPr>
-          <a:xfrm>
-            <a:off x="5872111" y="4169664"/>
-            <a:ext cx="603504" cy="475488"/>
-          </a:xfrm>
-          <a:prstGeom prst="rect">
-            <a:avLst>
-              <a:gd name="adj" fmla="val 7692"/>
-            </a:avLst>
-          </a:prstGeom>
-          <a:solidFill>
-            <a:srgbClr val="FFFFFF"/>
-          </a:solidFill>
-          <a:ln w="12700">
-            <a:solidFill>
-              <a:srgbClr val="DB2777"/>
-            </a:solidFill>
-            <a:prstDash val="solid"/>
-          </a:ln>
-        </p:spPr>
-      </p:sp>
-      <p:sp>
-        <p:nvSpPr>
           <p:cNvPr id="55" name="Text 53"/>
           <p:cNvSpPr/>
           <p:nvPr/>
         </p:nvSpPr>
         <p:spPr>
           <a:xfrm>
-            <a:off x="5872111" y="4169664"/>
-            <a:ext cx="603504" cy="475488"/>
-          </a:xfrm>
-          <a:prstGeom prst="rect">
-            <a:avLst/>
-          </a:prstGeom>
-          <a:noFill/>
-          <a:ln/>
-        </p:spPr>
-        <p:txBody>
-          <a:bodyPr wrap="square" lIns="0" tIns="0" rIns="0" bIns="0" rtlCol="0" anchor="ctr"/>
-          <a:lstStyle/>
-          <a:p>
-            <a:pPr algn="ctr" indent="0" marL="0">
-              <a:buNone/>
-            </a:pPr>
-            <a:r>
-              <a:rPr lang="en-US" sz="900" b="1" dirty="0">
-                <a:solidFill>
-                  <a:srgbClr val="9D174D"/>
-                </a:solidFill>
-                <a:latin typeface="Trebuchet MS" pitchFamily="34" charset="0"/>
-                <a:ea typeface="Trebuchet MS" pitchFamily="34" charset="-122"/>
-                <a:cs typeface="Trebuchet MS" pitchFamily="34" charset="-120"/>
-              </a:rPr>
-              <a:t>l</a:t>
-            </a:r>
-            <a:endParaRPr lang="en-US" sz="900" dirty="0"/>
-          </a:p>
-        </p:txBody>
-      </p:sp>
-      <p:sp>
-        <p:nvSpPr>
-          <p:cNvPr id="56" name="Shape 54"/>
-          <p:cNvSpPr/>
-          <p:nvPr/>
-        </p:nvSpPr>
-        <p:spPr>
-          <a:xfrm>
-            <a:off x="6525491" y="4169664"/>
-            <a:ext cx="603504" cy="475488"/>
-          </a:xfrm>
-          <a:prstGeom prst="rect">
-            <a:avLst>
-              <a:gd name="adj" fmla="val 7692"/>
-            </a:avLst>
-          </a:prstGeom>
-          <a:solidFill>
-            <a:srgbClr val="FFFFFF"/>
-          </a:solidFill>
-          <a:ln w="12700">
-            <a:solidFill>
-              <a:srgbClr val="DB2777"/>
-            </a:solidFill>
-            <a:prstDash val="solid"/>
-          </a:ln>
-        </p:spPr>
-      </p:sp>
-      <p:sp>
-        <p:nvSpPr>
-          <p:cNvPr id="57" name="Text 55"/>
-          <p:cNvSpPr/>
-          <p:nvPr/>
-        </p:nvSpPr>
-        <p:spPr>
-          <a:xfrm>
-            <a:off x="6525491" y="4169664"/>
-            <a:ext cx="603504" cy="475488"/>
-          </a:xfrm>
-          <a:prstGeom prst="rect">
-            <a:avLst/>
-          </a:prstGeom>
-          <a:noFill/>
-          <a:ln/>
-        </p:spPr>
-        <p:txBody>
-          <a:bodyPr wrap="square" lIns="0" tIns="0" rIns="0" bIns="0" rtlCol="0" anchor="ctr"/>
-          <a:lstStyle/>
-          <a:p>
-            <a:pPr algn="ctr" indent="0" marL="0">
-              <a:buNone/>
-            </a:pPr>
-            <a:r>
-              <a:rPr lang="en-US" sz="900" b="1" dirty="0">
-                <a:solidFill>
-                  <a:srgbClr val="9D174D"/>
-                </a:solidFill>
-                <a:latin typeface="Trebuchet MS" pitchFamily="34" charset="0"/>
-                <a:ea typeface="Trebuchet MS" pitchFamily="34" charset="-122"/>
-                <a:cs typeface="Trebuchet MS" pitchFamily="34" charset="-120"/>
-              </a:rPr>
-              <a:t>e</a:t>
-            </a:r>
-            <a:endParaRPr lang="en-US" sz="900" dirty="0"/>
-          </a:p>
-        </p:txBody>
-      </p:sp>
-      <p:sp>
-        <p:nvSpPr>
-          <p:cNvPr id="58" name="Shape 56"/>
-          <p:cNvSpPr/>
-          <p:nvPr/>
-        </p:nvSpPr>
-        <p:spPr>
-          <a:xfrm>
-            <a:off x="7178871" y="4169664"/>
-            <a:ext cx="603504" cy="475488"/>
-          </a:xfrm>
-          <a:prstGeom prst="rect">
-            <a:avLst>
-              <a:gd name="adj" fmla="val 7692"/>
-            </a:avLst>
-          </a:prstGeom>
-          <a:solidFill>
-            <a:srgbClr val="FFFFFF"/>
-          </a:solidFill>
-          <a:ln w="12700">
-            <a:solidFill>
-              <a:srgbClr val="DB2777"/>
-            </a:solidFill>
-            <a:prstDash val="solid"/>
-          </a:ln>
-        </p:spPr>
-      </p:sp>
-      <p:sp>
-        <p:nvSpPr>
-          <p:cNvPr id="59" name="Text 57"/>
-          <p:cNvSpPr/>
-          <p:nvPr/>
-        </p:nvSpPr>
-        <p:spPr>
-          <a:xfrm>
-            <a:off x="7178871" y="4169664"/>
-            <a:ext cx="603504" cy="475488"/>
-          </a:xfrm>
-          <a:prstGeom prst="rect">
-            <a:avLst/>
-          </a:prstGeom>
-          <a:noFill/>
-          <a:ln/>
-        </p:spPr>
-        <p:txBody>
-          <a:bodyPr wrap="square" lIns="0" tIns="0" rIns="0" bIns="0" rtlCol="0" anchor="ctr"/>
-          <a:lstStyle/>
-          <a:p>
-            <a:pPr algn="ctr" indent="0" marL="0">
-              <a:buNone/>
-            </a:pPr>
-            <a:r>
-              <a:rPr lang="en-US" sz="900" b="1" dirty="0">
-                <a:solidFill>
-                  <a:srgbClr val="9D174D"/>
-                </a:solidFill>
-                <a:latin typeface="Trebuchet MS" pitchFamily="34" charset="0"/>
-                <a:ea typeface="Trebuchet MS" pitchFamily="34" charset="-122"/>
-                <a:cs typeface="Trebuchet MS" pitchFamily="34" charset="-120"/>
-              </a:rPr>
-              <a:t>n</a:t>
-            </a:r>
-            <a:endParaRPr lang="en-US" sz="900" dirty="0"/>
-          </a:p>
-        </p:txBody>
-      </p:sp>
-      <p:sp>
-        <p:nvSpPr>
-          <p:cNvPr id="60" name="Shape 58"/>
-          <p:cNvSpPr/>
-          <p:nvPr/>
-        </p:nvSpPr>
-        <p:spPr>
-          <a:xfrm>
-            <a:off x="7832252" y="4169664"/>
-            <a:ext cx="603504" cy="475488"/>
-          </a:xfrm>
-          <a:prstGeom prst="rect">
-            <a:avLst>
-              <a:gd name="adj" fmla="val 7692"/>
-            </a:avLst>
-          </a:prstGeom>
-          <a:solidFill>
-            <a:srgbClr val="FFFFFF"/>
-          </a:solidFill>
-          <a:ln w="12700">
-            <a:solidFill>
-              <a:srgbClr val="DB2777"/>
-            </a:solidFill>
-            <a:prstDash val="solid"/>
-          </a:ln>
-        </p:spPr>
-      </p:sp>
-      <p:sp>
-        <p:nvSpPr>
-          <p:cNvPr id="61" name="Text 59"/>
-          <p:cNvSpPr/>
-          <p:nvPr/>
-        </p:nvSpPr>
-        <p:spPr>
-          <a:xfrm>
-            <a:off x="7832252" y="4169664"/>
-            <a:ext cx="603504" cy="475488"/>
-          </a:xfrm>
-          <a:prstGeom prst="rect">
-            <a:avLst/>
-          </a:prstGeom>
-          <a:noFill/>
-          <a:ln/>
-        </p:spPr>
-        <p:txBody>
-          <a:bodyPr wrap="square" lIns="0" tIns="0" rIns="0" bIns="0" rtlCol="0" anchor="ctr"/>
-          <a:lstStyle/>
-          <a:p>
-            <a:pPr algn="ctr" indent="0" marL="0">
-              <a:buNone/>
-            </a:pPr>
-            <a:r>
-              <a:rPr lang="en-US" sz="900" b="1" dirty="0">
-                <a:solidFill>
-                  <a:srgbClr val="9D174D"/>
-                </a:solidFill>
-                <a:latin typeface="Trebuchet MS" pitchFamily="34" charset="0"/>
-                <a:ea typeface="Trebuchet MS" pitchFamily="34" charset="-122"/>
-                <a:cs typeface="Trebuchet MS" pitchFamily="34" charset="-120"/>
-              </a:rPr>
-              <a:t>t</a:t>
-            </a:r>
-            <a:endParaRPr lang="en-US" sz="900" dirty="0"/>
+            <a:off x="7677912" y="4572000"/>
+            <a:ext cx="685800" cy="219456"/>
+          </a:xfrm>
+          <a:prstGeom prst="rect">
+            <a:avLst/>
+          </a:prstGeom>
+          <a:noFill/>
+          <a:ln/>
+        </p:spPr>
+        <p:txBody>
+          <a:bodyPr wrap="square" lIns="0" tIns="0" rIns="0" bIns="0" rtlCol="0" anchor="t"/>
+          <a:lstStyle/>
+          <a:p>
+            <a:pPr algn="ctr" indent="0" marL="0">
+              <a:buNone/>
+            </a:pPr>
+            <a:r>
+              <a:rPr lang="en-US" sz="750" i="1" dirty="0">
+                <a:solidFill>
+                  <a:srgbClr val="94A3B8"/>
+                </a:solidFill>
+                <a:latin typeface="Calibri" pitchFamily="34" charset="0"/>
+                <a:ea typeface="Calibri" pitchFamily="34" charset="-122"/>
+                <a:cs typeface="Calibri" pitchFamily="34" charset="-120"/>
+              </a:rPr>
+              <a:t>/shun/</a:t>
+            </a:r>
+            <a:endParaRPr lang="en-US" sz="750" dirty="0"/>
           </a:p>
         </p:txBody>
       </p:sp>
@@ -36275,7 +36158,7 @@
                 <a:ea typeface="Trebuchet MS" pitchFamily="34" charset="-122"/>
                 <a:cs typeface="Trebuchet MS" pitchFamily="34" charset="-120"/>
               </a:rPr>
-              <a:t>-ent</a:t>
+              <a:t>-ly</a:t>
             </a:r>
             <a:endParaRPr lang="en-US" sz="1300" dirty="0"/>
           </a:p>
@@ -36364,7 +36247,7 @@
                 <a:ea typeface="Trebuchet MS" pitchFamily="34" charset="-122"/>
                 <a:cs typeface="Trebuchet MS" pitchFamily="34" charset="-120"/>
               </a:rPr>
-              <a:t>stick</a:t>
+              <a:t>stop</a:t>
             </a:r>
             <a:endParaRPr lang="en-US" sz="1300" dirty="0"/>
           </a:p>
@@ -36428,7 +36311,7 @@
                 <a:ea typeface="Trebuchet MS" pitchFamily="34" charset="-122"/>
                 <a:cs typeface="Trebuchet MS" pitchFamily="34" charset="-120"/>
               </a:rPr>
-              <a:t>-ing</a:t>
+              <a:t>-ent</a:t>
             </a:r>
             <a:endParaRPr lang="en-US" sz="1300" dirty="0"/>
           </a:p>
@@ -36517,7 +36400,7 @@
                 <a:ea typeface="Trebuchet MS" pitchFamily="34" charset="-122"/>
                 <a:cs typeface="Trebuchet MS" pitchFamily="34" charset="-120"/>
               </a:rPr>
-              <a:t>stop</a:t>
+              <a:t>living</a:t>
             </a:r>
             <a:endParaRPr lang="en-US" sz="1300" dirty="0"/>
           </a:p>
@@ -36581,7 +36464,7 @@
                 <a:ea typeface="Trebuchet MS" pitchFamily="34" charset="-122"/>
                 <a:cs typeface="Trebuchet MS" pitchFamily="34" charset="-120"/>
               </a:rPr>
-              <a:t>-er</a:t>
+              <a:t>-ance</a:t>
             </a:r>
             <a:endParaRPr lang="en-US" sz="1300" dirty="0"/>
           </a:p>
@@ -36670,7 +36553,7 @@
                 <a:ea typeface="Trebuchet MS" pitchFamily="34" charset="-122"/>
                 <a:cs typeface="Trebuchet MS" pitchFamily="34" charset="-120"/>
               </a:rPr>
-              <a:t>living</a:t>
+              <a:t>fiction</a:t>
             </a:r>
             <a:endParaRPr lang="en-US" sz="1300" dirty="0"/>
           </a:p>
@@ -36734,7 +36617,7 @@
                 <a:ea typeface="Trebuchet MS" pitchFamily="34" charset="-122"/>
                 <a:cs typeface="Trebuchet MS" pitchFamily="34" charset="-120"/>
               </a:rPr>
-              <a:t>-ly</a:t>
+              <a:t>-tion</a:t>
             </a:r>
             <a:endParaRPr lang="en-US" sz="1300" dirty="0"/>
           </a:p>
@@ -37037,7 +36920,7 @@
                 <a:ea typeface="Trebuchet MS" pitchFamily="34" charset="-122"/>
                 <a:cs typeface="Trebuchet MS" pitchFamily="34" charset="-120"/>
               </a:rPr>
-              <a:t>nonstick</a:t>
+              <a:t>nonliving</a:t>
             </a:r>
             <a:endParaRPr lang="en-US" sz="1200" dirty="0"/>
           </a:p>
@@ -37103,7 +36986,7 @@
                 <a:ea typeface="Trebuchet MS" pitchFamily="34" charset="-122"/>
                 <a:cs typeface="Trebuchet MS" pitchFamily="34" charset="-120"/>
               </a:rPr>
-              <a:t>nonliving</a:t>
+              <a:t>nonprofit</a:t>
             </a:r>
             <a:endParaRPr lang="en-US" sz="1200" dirty="0"/>
           </a:p>
@@ -37169,7 +37052,7 @@
                 <a:ea typeface="Trebuchet MS" pitchFamily="34" charset="-122"/>
                 <a:cs typeface="Trebuchet MS" pitchFamily="34" charset="-120"/>
               </a:rPr>
-              <a:t>nonprofit</a:t>
+              <a:t>nonviolent</a:t>
             </a:r>
             <a:endParaRPr lang="en-US" sz="1200" dirty="0"/>
           </a:p>
@@ -37301,7 +37184,7 @@
                 <a:ea typeface="Trebuchet MS" pitchFamily="34" charset="-122"/>
                 <a:cs typeface="Trebuchet MS" pitchFamily="34" charset="-120"/>
               </a:rPr>
-              <a:t>nonviolent</a:t>
+              <a:t>nonfatal</a:t>
             </a:r>
             <a:endParaRPr lang="en-US" sz="1200" dirty="0"/>
           </a:p>
@@ -38628,7 +38511,7 @@
                 <a:ea typeface="Calibri" pitchFamily="34" charset="-122"/>
                 <a:cs typeface="Calibri" pitchFamily="34" charset="-120"/>
               </a:rPr>
-              <a:t>2.  The word 'nonfiction' refers to made-up stories.</a:t>
+              <a:t>2.  Adding 'non-' to a word usually gives it the opposite meaning.</a:t>
             </a:r>
             <a:endParaRPr lang="en-US" sz="1300" dirty="0"/>
           </a:p>
@@ -38651,11 +38534,11 @@
             </a:avLst>
           </a:prstGeom>
           <a:solidFill>
-            <a:srgbClr val="FEE2E2"/>
-          </a:solidFill>
-          <a:ln w="12700">
-            <a:solidFill>
-              <a:srgbClr val="DC2626"/>
+            <a:srgbClr val="DCFCE7"/>
+          </a:solidFill>
+          <a:ln w="12700">
+            <a:solidFill>
+              <a:srgbClr val="16A34A"/>
             </a:solidFill>
             <a:prstDash val="solid"/>
           </a:ln>
@@ -38688,13 +38571,13 @@
             <a:r>
               <a:rPr lang="en-US" sz="1100" b="1" dirty="0">
                 <a:solidFill>
-                  <a:srgbClr val="DC2626"/>
+                  <a:srgbClr val="16A34A"/>
                 </a:solidFill>
                 <a:latin typeface="Trebuchet MS" pitchFamily="34" charset="0"/>
                 <a:ea typeface="Trebuchet MS" pitchFamily="34" charset="-122"/>
                 <a:cs typeface="Trebuchet MS" pitchFamily="34" charset="-120"/>
               </a:rPr>
-              <a:t>FALSE</a:t>
+              <a:t>TRUE</a:t>
             </a:r>
             <a:endParaRPr lang="en-US" sz="1100" dirty="0"/>
           </a:p>
@@ -38767,7 +38650,7 @@
                 <a:ea typeface="Calibri" pitchFamily="34" charset="-122"/>
                 <a:cs typeface="Calibri" pitchFamily="34" charset="-120"/>
               </a:rPr>
-              <a:t>3.  Adding 'non-' to a word creates its opposite meaning.</a:t>
+              <a:t>3.  The prefix 'non-' comes from a Greek word meaning 'many'.</a:t>
             </a:r>
             <a:endParaRPr lang="en-US" sz="1300" dirty="0"/>
           </a:p>
@@ -38790,11 +38673,11 @@
             </a:avLst>
           </a:prstGeom>
           <a:solidFill>
-            <a:srgbClr val="DCFCE7"/>
-          </a:solidFill>
-          <a:ln w="12700">
-            <a:solidFill>
-              <a:srgbClr val="16A34A"/>
+            <a:srgbClr val="FEE2E2"/>
+          </a:solidFill>
+          <a:ln w="12700">
+            <a:solidFill>
+              <a:srgbClr val="DC2626"/>
             </a:solidFill>
             <a:prstDash val="solid"/>
           </a:ln>
@@ -38827,13 +38710,13 @@
             <a:r>
               <a:rPr lang="en-US" sz="1100" b="1" dirty="0">
                 <a:solidFill>
-                  <a:srgbClr val="16A34A"/>
+                  <a:srgbClr val="DC2626"/>
                 </a:solidFill>
                 <a:latin typeface="Trebuchet MS" pitchFamily="34" charset="0"/>
                 <a:ea typeface="Trebuchet MS" pitchFamily="34" charset="-122"/>
                 <a:cs typeface="Trebuchet MS" pitchFamily="34" charset="-120"/>
               </a:rPr>
-              <a:t>TRUE</a:t>
+              <a:t>FALSE</a:t>
             </a:r>
             <a:endParaRPr lang="en-US" sz="1100" dirty="0"/>
           </a:p>
@@ -38906,7 +38789,7 @@
                 <a:ea typeface="Calibri" pitchFamily="34" charset="-122"/>
                 <a:cs typeface="Calibri" pitchFamily="34" charset="-120"/>
               </a:rPr>
-              <a:t>4.  A nonstop flight lands at several airports along the way.</a:t>
+              <a:t>4.  'Nonfiction' books are about real people and events.</a:t>
             </a:r>
             <a:endParaRPr lang="en-US" sz="1300" dirty="0"/>
           </a:p>
@@ -38929,11 +38812,11 @@
             </a:avLst>
           </a:prstGeom>
           <a:solidFill>
-            <a:srgbClr val="FEE2E2"/>
-          </a:solidFill>
-          <a:ln w="12700">
-            <a:solidFill>
-              <a:srgbClr val="DC2626"/>
+            <a:srgbClr val="DCFCE7"/>
+          </a:solidFill>
+          <a:ln w="12700">
+            <a:solidFill>
+              <a:srgbClr val="16A34A"/>
             </a:solidFill>
             <a:prstDash val="solid"/>
           </a:ln>
@@ -38966,13 +38849,13 @@
             <a:r>
               <a:rPr lang="en-US" sz="1100" b="1" dirty="0">
                 <a:solidFill>
-                  <a:srgbClr val="DC2626"/>
+                  <a:srgbClr val="16A34A"/>
                 </a:solidFill>
                 <a:latin typeface="Trebuchet MS" pitchFamily="34" charset="0"/>
                 <a:ea typeface="Trebuchet MS" pitchFamily="34" charset="-122"/>
                 <a:cs typeface="Trebuchet MS" pitchFamily="34" charset="-120"/>
               </a:rPr>
-              <a:t>FALSE</a:t>
+              <a:t>TRUE</a:t>
             </a:r>
             <a:endParaRPr lang="en-US" sz="1100" dirty="0"/>
           </a:p>
@@ -39045,7 +38928,7 @@
                 <a:ea typeface="Calibri" pitchFamily="34" charset="-122"/>
                 <a:cs typeface="Calibri" pitchFamily="34" charset="-120"/>
               </a:rPr>
-              <a:t>5.  'Nonverbal' communication includes things like facial expressions and gestures.</a:t>
+              <a:t>5.  The word 'nonsense' means something that makes perfect sense.</a:t>
             </a:r>
             <a:endParaRPr lang="en-US" sz="1300" dirty="0"/>
           </a:p>
@@ -39068,11 +38951,11 @@
             </a:avLst>
           </a:prstGeom>
           <a:solidFill>
-            <a:srgbClr val="DCFCE7"/>
-          </a:solidFill>
-          <a:ln w="12700">
-            <a:solidFill>
-              <a:srgbClr val="16A34A"/>
+            <a:srgbClr val="FEE2E2"/>
+          </a:solidFill>
+          <a:ln w="12700">
+            <a:solidFill>
+              <a:srgbClr val="DC2626"/>
             </a:solidFill>
             <a:prstDash val="solid"/>
           </a:ln>
@@ -39105,13 +38988,13 @@
             <a:r>
               <a:rPr lang="en-US" sz="1100" b="1" dirty="0">
                 <a:solidFill>
-                  <a:srgbClr val="16A34A"/>
+                  <a:srgbClr val="DC2626"/>
                 </a:solidFill>
                 <a:latin typeface="Trebuchet MS" pitchFamily="34" charset="0"/>
                 <a:ea typeface="Trebuchet MS" pitchFamily="34" charset="-122"/>
                 <a:cs typeface="Trebuchet MS" pitchFamily="34" charset="-120"/>
               </a:rPr>
-              <a:t>TRUE</a:t>
+              <a:t>FALSE</a:t>
             </a:r>
             <a:endParaRPr lang="en-US" sz="1100" dirty="0"/>
           </a:p>
@@ -39882,7 +39765,7 @@
                 <a:ea typeface="Trebuchet MS" pitchFamily="34" charset="-122"/>
                 <a:cs typeface="Trebuchet MS" pitchFamily="34" charset="-120"/>
               </a:rPr>
-              <a:t>nonstick</a:t>
+              <a:t>nonliving</a:t>
             </a:r>
             <a:endParaRPr lang="en-US" sz="1300" dirty="0"/>
           </a:p>
@@ -39948,7 +39831,7 @@
                 <a:ea typeface="Trebuchet MS" pitchFamily="34" charset="-122"/>
                 <a:cs typeface="Trebuchet MS" pitchFamily="34" charset="-120"/>
               </a:rPr>
-              <a:t>nonliving</a:t>
+              <a:t>nonprofit</a:t>
             </a:r>
             <a:endParaRPr lang="en-US" sz="1300" dirty="0"/>
           </a:p>
@@ -40014,7 +39897,7 @@
                 <a:ea typeface="Trebuchet MS" pitchFamily="34" charset="-122"/>
                 <a:cs typeface="Trebuchet MS" pitchFamily="34" charset="-120"/>
               </a:rPr>
-              <a:t>nonprofit</a:t>
+              <a:t>nonviolent</a:t>
             </a:r>
             <a:endParaRPr lang="en-US" sz="1300" dirty="0"/>
           </a:p>
@@ -40954,7 +40837,7 @@
                 <a:ea typeface="Trebuchet MS" pitchFamily="34" charset="-122"/>
                 <a:cs typeface="Trebuchet MS" pitchFamily="34" charset="-120"/>
               </a:rPr>
-              <a:t>-ent</a:t>
+              <a:t>-ly</a:t>
             </a:r>
             <a:endParaRPr lang="en-US" sz="1300" dirty="0"/>
           </a:p>
@@ -41043,7 +40926,7 @@
                 <a:ea typeface="Trebuchet MS" pitchFamily="34" charset="-122"/>
                 <a:cs typeface="Trebuchet MS" pitchFamily="34" charset="-120"/>
               </a:rPr>
-              <a:t>stick</a:t>
+              <a:t>stop</a:t>
             </a:r>
             <a:endParaRPr lang="en-US" sz="1300" dirty="0"/>
           </a:p>
@@ -41107,7 +40990,7 @@
                 <a:ea typeface="Trebuchet MS" pitchFamily="34" charset="-122"/>
                 <a:cs typeface="Trebuchet MS" pitchFamily="34" charset="-120"/>
               </a:rPr>
-              <a:t>-ing</a:t>
+              <a:t>-ent</a:t>
             </a:r>
             <a:endParaRPr lang="en-US" sz="1300" dirty="0"/>
           </a:p>
@@ -41196,7 +41079,7 @@
                 <a:ea typeface="Trebuchet MS" pitchFamily="34" charset="-122"/>
                 <a:cs typeface="Trebuchet MS" pitchFamily="34" charset="-120"/>
               </a:rPr>
-              <a:t>stop</a:t>
+              <a:t>living</a:t>
             </a:r>
             <a:endParaRPr lang="en-US" sz="1300" dirty="0"/>
           </a:p>
@@ -41260,7 +41143,7 @@
                 <a:ea typeface="Trebuchet MS" pitchFamily="34" charset="-122"/>
                 <a:cs typeface="Trebuchet MS" pitchFamily="34" charset="-120"/>
               </a:rPr>
-              <a:t>-er</a:t>
+              <a:t>-ance</a:t>
             </a:r>
             <a:endParaRPr lang="en-US" sz="1300" dirty="0"/>
           </a:p>
@@ -41349,7 +41232,7 @@
                 <a:ea typeface="Trebuchet MS" pitchFamily="34" charset="-122"/>
                 <a:cs typeface="Trebuchet MS" pitchFamily="34" charset="-120"/>
               </a:rPr>
-              <a:t>living</a:t>
+              <a:t>fiction</a:t>
             </a:r>
             <a:endParaRPr lang="en-US" sz="1300" dirty="0"/>
           </a:p>
@@ -41413,7 +41296,7 @@
                 <a:ea typeface="Trebuchet MS" pitchFamily="34" charset="-122"/>
                 <a:cs typeface="Trebuchet MS" pitchFamily="34" charset="-120"/>
               </a:rPr>
-              <a:t>-ly</a:t>
+              <a:t>-tion</a:t>
             </a:r>
             <a:endParaRPr lang="en-US" sz="1300" dirty="0"/>
           </a:p>
@@ -42324,7 +42207,7 @@
                 <a:ea typeface="Calibri" pitchFamily="34" charset="-122"/>
                 <a:cs typeface="Calibri" pitchFamily="34" charset="-120"/>
               </a:rPr>
-              <a:t>Writing that is about real events and true facts, not made-up stories.</a:t>
+              <a:t>Writing about real events and facts, not made-up stories.</a:t>
             </a:r>
             <a:endParaRPr lang="en-US" sz="1200" dirty="0"/>
           </a:p>
@@ -42463,7 +42346,7 @@
                 <a:ea typeface="Calibri" pitchFamily="34" charset="-122"/>
                 <a:cs typeface="Calibri" pitchFamily="34" charset="-120"/>
               </a:rPr>
-              <a:t>Something that has never been alive, like a rock or a coin.</a:t>
+              <a:t>An organisation that doesn't aim to make money, usually helping others.</a:t>
             </a:r>
             <a:endParaRPr lang="en-US" sz="1200" dirty="0"/>
           </a:p>
@@ -42602,7 +42485,7 @@
                 <a:ea typeface="Calibri" pitchFamily="34" charset="-122"/>
                 <a:cs typeface="Calibri" pitchFamily="34" charset="-120"/>
               </a:rPr>
-              <a:t>A surface that food does not stick to, like a frying pan coating.</a:t>
+              <a:t>Something that is not alive, like a rock or a chair.</a:t>
             </a:r>
             <a:endParaRPr lang="en-US" sz="1200" dirty="0"/>
           </a:p>
@@ -42675,7 +42558,7 @@
                 <a:ea typeface="Trebuchet MS" pitchFamily="34" charset="-122"/>
                 <a:cs typeface="Trebuchet MS" pitchFamily="34" charset="-120"/>
               </a:rPr>
-              <a:t>nonstick</a:t>
+              <a:t>nonliving</a:t>
             </a:r>
             <a:endParaRPr lang="en-US" sz="1200" dirty="0"/>
           </a:p>
@@ -42741,7 +42624,7 @@
                 <a:ea typeface="Calibri" pitchFamily="34" charset="-122"/>
                 <a:cs typeface="Calibri" pitchFamily="34" charset="-120"/>
               </a:rPr>
-              <a:t>An organisation that does not try to make money — it helps people instead.</a:t>
+              <a:t>Not using force or harm to solve problems.</a:t>
             </a:r>
             <a:endParaRPr lang="en-US" sz="1200" dirty="0"/>
           </a:p>
@@ -42814,7 +42697,7 @@
                 <a:ea typeface="Trebuchet MS" pitchFamily="34" charset="-122"/>
                 <a:cs typeface="Trebuchet MS" pitchFamily="34" charset="-120"/>
               </a:rPr>
-              <a:t>nonliving</a:t>
+              <a:t>nonprofit</a:t>
             </a:r>
             <a:endParaRPr lang="en-US" sz="1200" dirty="0"/>
           </a:p>
@@ -42880,7 +42763,7 @@
                 <a:ea typeface="Calibri" pitchFamily="34" charset="-122"/>
                 <a:cs typeface="Calibri" pitchFamily="34" charset="-120"/>
               </a:rPr>
-              <a:t>Something that continues without any breaks or pauses.</a:t>
+              <a:t>Without any pauses or breaks; continuing all the time.</a:t>
             </a:r>
             <a:endParaRPr lang="en-US" sz="1200" dirty="0"/>
           </a:p>
@@ -42953,7 +42836,7 @@
                 <a:ea typeface="Trebuchet MS" pitchFamily="34" charset="-122"/>
                 <a:cs typeface="Trebuchet MS" pitchFamily="34" charset="-120"/>
               </a:rPr>
-              <a:t>nonprofit</a:t>
+              <a:t>nonviolent</a:t>
             </a:r>
             <a:endParaRPr lang="en-US" sz="1200" dirty="0"/>
           </a:p>
@@ -43019,7 +42902,7 @@
                 <a:ea typeface="Calibri" pitchFamily="34" charset="-122"/>
                 <a:cs typeface="Calibri" pitchFamily="34" charset="-120"/>
               </a:rPr>
-              <a:t>Communication that doesn't use words, like nodding or using hand gestures.</a:t>
+              <a:t>Communicating without words, like using gestures or facial expressions.</a:t>
             </a:r>
             <a:endParaRPr lang="en-US" sz="1200" dirty="0"/>
           </a:p>
@@ -43653,7 +43536,7 @@
                 <a:ea typeface="Calibri" pitchFamily="34" charset="-122"/>
                 <a:cs typeface="Calibri" pitchFamily="34" charset="-120"/>
               </a:rPr>
-              <a:t>Our teacher asked us to choose a nonfiction book about animals for our research project.</a:t>
+              <a:t>The library has a great section of nonfiction books about Australian animals.</a:t>
             </a:r>
             <a:endParaRPr lang="en-US" sz="1500" dirty="0"/>
           </a:p>
@@ -43817,7 +43700,7 @@
                 <a:ea typeface="Calibri" pitchFamily="34" charset="-122"/>
                 <a:cs typeface="Calibri" pitchFamily="34" charset="-120"/>
               </a:rPr>
-              <a:t>The coach reminded us that the tournament runs nonstop from nine o'clock until three in the afternoon.</a:t>
+              <a:t>The teacher told the class to stop talking nonsense and focus on their work.</a:t>
             </a:r>
             <a:endParaRPr lang="en-US" sz="1500" dirty="0"/>
           </a:p>
@@ -43981,7 +43864,7 @@
                 <a:ea typeface="Calibri" pitchFamily="34" charset="-122"/>
                 <a:cs typeface="Calibri" pitchFamily="34" charset="-120"/>
               </a:rPr>
-              <a:t>The students planned a nonviolent protest to show they cared about protecting the local forest.</a:t>
+              <a:t>The train from Sydney to Melbourne was a nonstop journey overnight.</a:t>
             </a:r>
             <a:endParaRPr lang="en-US" sz="1500" dirty="0"/>
           </a:p>
